--- a/plugins/gradient-cio/assets/examples/internal-gips-review-firm.pptx
+++ b/plugins/gradient-cio/assets/examples/internal-gips-review-firm.pptx
@@ -3662,7 +3662,7 @@
               <a:rPr>
                 <a:latin typeface="Inter"/>
               </a:rPr>
-              <a:t>SUBJECT</a:t>
+              <a:t>COMPOSITE</a:t>
             </a:r>
           </a:p>
         </p:txBody>
@@ -3963,224 +3963,7 @@
       </p:sp>
       <p:sp>
         <p:nvSpPr>
-          <p:cNvPr id="17" name="Rectangle 16"/>
-          <p:cNvSpPr/>
-          <p:nvPr/>
-        </p:nvSpPr>
-        <p:spPr>
-          <a:xfrm>
-            <a:off x="685800" y="5687568"/>
-            <a:ext cx="3337560" cy="530352"/>
-          </a:xfrm>
-          <a:prstGeom prst="rect">
-            <a:avLst/>
-          </a:prstGeom>
-          <a:solidFill>
-            <a:srgbClr val="F2A93B"/>
-          </a:solidFill>
-          <a:ln>
-            <a:solidFill>
-              <a:srgbClr val="F2A93B"/>
-            </a:solidFill>
-          </a:ln>
-        </p:spPr>
-        <p:style>
-          <a:lnRef idx="1">
-            <a:schemeClr val="accent1"/>
-          </a:lnRef>
-          <a:fillRef idx="3">
-            <a:schemeClr val="accent1"/>
-          </a:fillRef>
-          <a:effectRef idx="2">
-            <a:schemeClr val="accent1"/>
-          </a:effectRef>
-          <a:fontRef idx="minor">
-            <a:schemeClr val="lt1"/>
-          </a:fontRef>
-        </p:style>
-        <p:txBody>
-          <a:bodyPr rtlCol="0" anchor="ctr"/>
-          <a:lstStyle/>
-          <a:p>
-            <a:pPr algn="ctr">
-              <a:defRPr>
-                <a:latin typeface="Inter"/>
-              </a:defRPr>
-            </a:pPr>
-          </a:p>
-        </p:txBody>
-      </p:sp>
-      <p:sp>
-        <p:nvSpPr>
-          <p:cNvPr id="18" name="TextBox 17"/>
-          <p:cNvSpPr txBox="1"/>
-          <p:nvPr/>
-        </p:nvSpPr>
-        <p:spPr>
-          <a:xfrm>
-            <a:off x="822960" y="5760720"/>
-            <a:ext cx="3063240" cy="128016"/>
-          </a:xfrm>
-          <a:prstGeom prst="rect">
-            <a:avLst/>
-          </a:prstGeom>
-          <a:noFill/>
-        </p:spPr>
-        <p:txBody>
-          <a:bodyPr wrap="none" lIns="9144" rIns="9144" tIns="9144" bIns="9144" anchor="t">
-            <a:spAutoFit/>
-          </a:bodyPr>
-          <a:lstStyle/>
-          <a:p>
-            <a:pPr algn="l">
-              <a:spcAft>
-                <a:spcPts val="0"/>
-              </a:spcAft>
-              <a:defRPr sz="620" b="1">
-                <a:solidFill>
-                  <a:srgbClr val="0D1117"/>
-                </a:solidFill>
-                <a:latin typeface="Inter"/>
-              </a:defRPr>
-            </a:pPr>
-            <a:r>
-              <a:rPr>
-                <a:latin typeface="Inter"/>
-              </a:rPr>
-              <a:t>OVERALL VIEW</a:t>
-            </a:r>
-          </a:p>
-        </p:txBody>
-      </p:sp>
-      <p:sp>
-        <p:nvSpPr>
-          <p:cNvPr id="19" name="TextBox 18"/>
-          <p:cNvSpPr txBox="1"/>
-          <p:nvPr/>
-        </p:nvSpPr>
-        <p:spPr>
-          <a:xfrm>
-            <a:off x="822960" y="5916168"/>
-            <a:ext cx="3063240" cy="182880"/>
-          </a:xfrm>
-          <a:prstGeom prst="rect">
-            <a:avLst/>
-          </a:prstGeom>
-          <a:noFill/>
-        </p:spPr>
-        <p:txBody>
-          <a:bodyPr wrap="none" lIns="9144" rIns="9144" tIns="9144" bIns="9144" anchor="t">
-            <a:spAutoFit/>
-          </a:bodyPr>
-          <a:lstStyle/>
-          <a:p>
-            <a:pPr algn="l">
-              <a:spcAft>
-                <a:spcPts val="0"/>
-              </a:spcAft>
-              <a:defRPr sz="900" b="1">
-                <a:solidFill>
-                  <a:srgbClr val="0D1117"/>
-                </a:solidFill>
-                <a:latin typeface="Inter"/>
-              </a:defRPr>
-            </a:pPr>
-            <a:r>
-              <a:rPr>
-                <a:latin typeface="Inter"/>
-              </a:rPr>
-              <a:t>Satisfactory with follow-ups</a:t>
-            </a:r>
-          </a:p>
-        </p:txBody>
-      </p:sp>
-      <p:sp>
-        <p:nvSpPr>
-          <p:cNvPr id="20" name="TextBox 19"/>
-          <p:cNvSpPr txBox="1"/>
-          <p:nvPr/>
-        </p:nvSpPr>
-        <p:spPr>
-          <a:xfrm>
-            <a:off x="4297680" y="5733288"/>
-            <a:ext cx="3108960" cy="164592"/>
-          </a:xfrm>
-          <a:prstGeom prst="rect">
-            <a:avLst/>
-          </a:prstGeom>
-          <a:noFill/>
-        </p:spPr>
-        <p:txBody>
-          <a:bodyPr wrap="none" lIns="9144" rIns="9144" tIns="9144" bIns="9144" anchor="t">
-            <a:spAutoFit/>
-          </a:bodyPr>
-          <a:lstStyle/>
-          <a:p>
-            <a:pPr algn="l">
-              <a:spcAft>
-                <a:spcPts val="0"/>
-              </a:spcAft>
-              <a:defRPr sz="650" b="1">
-                <a:solidFill>
-                  <a:srgbClr val="8A94A1"/>
-                </a:solidFill>
-                <a:latin typeface="Inter"/>
-              </a:defRPr>
-            </a:pPr>
-            <a:r>
-              <a:rPr>
-                <a:latin typeface="Inter"/>
-              </a:rPr>
-              <a:t>SCOPE REVIEWED</a:t>
-            </a:r>
-          </a:p>
-        </p:txBody>
-      </p:sp>
-      <p:sp>
-        <p:nvSpPr>
-          <p:cNvPr id="21" name="TextBox 20"/>
-          <p:cNvSpPr txBox="1"/>
-          <p:nvPr/>
-        </p:nvSpPr>
-        <p:spPr>
-          <a:xfrm>
-            <a:off x="4297680" y="5934456"/>
-            <a:ext cx="3108960" cy="201168"/>
-          </a:xfrm>
-          <a:prstGeom prst="rect">
-            <a:avLst/>
-          </a:prstGeom>
-          <a:noFill/>
-        </p:spPr>
-        <p:txBody>
-          <a:bodyPr wrap="none" lIns="9144" rIns="9144" tIns="9144" bIns="9144" anchor="t">
-            <a:spAutoFit/>
-          </a:bodyPr>
-          <a:lstStyle/>
-          <a:p>
-            <a:pPr algn="l">
-              <a:spcAft>
-                <a:spcPts val="0"/>
-              </a:spcAft>
-              <a:defRPr sz="800" b="1">
-                <a:solidFill>
-                  <a:srgbClr val="FFFFFF"/>
-                </a:solidFill>
-                <a:latin typeface="Inter"/>
-              </a:defRPr>
-            </a:pPr>
-            <a:r>
-              <a:rPr>
-                <a:latin typeface="Inter"/>
-              </a:rPr>
-              <a:t>5 of 5 · Complete</a:t>
-            </a:r>
-          </a:p>
-        </p:txBody>
-      </p:sp>
-      <p:sp>
-        <p:nvSpPr>
-          <p:cNvPr id="22" name="TextBox 21"/>
+          <p:cNvPr id="17" name="TextBox 16"/>
           <p:cNvSpPr txBox="1"/>
           <p:nvPr/>
         </p:nvSpPr>
@@ -4222,7 +4005,7 @@
       </p:sp>
       <p:sp>
         <p:nvSpPr>
-          <p:cNvPr id="23" name="TextBox 22"/>
+          <p:cNvPr id="18" name="TextBox 17"/>
           <p:cNvSpPr txBox="1"/>
           <p:nvPr/>
         </p:nvSpPr>
@@ -4264,7 +4047,7 @@
       </p:sp>
       <p:sp>
         <p:nvSpPr>
-          <p:cNvPr id="24" name="TextBox 23"/>
+          <p:cNvPr id="19" name="TextBox 18"/>
           <p:cNvSpPr txBox="1"/>
           <p:nvPr/>
         </p:nvSpPr>
@@ -4379,48 +4162,6 @@
         </p:nvSpPr>
         <p:spPr>
           <a:xfrm>
-            <a:off x="5897880" y="310896"/>
-            <a:ext cx="4800600" cy="256032"/>
-          </a:xfrm>
-          <a:prstGeom prst="rect">
-            <a:avLst/>
-          </a:prstGeom>
-          <a:noFill/>
-        </p:spPr>
-        <p:txBody>
-          <a:bodyPr wrap="none" lIns="9144" rIns="9144" tIns="9144" bIns="9144" anchor="t">
-            <a:spAutoFit/>
-          </a:bodyPr>
-          <a:lstStyle/>
-          <a:p>
-            <a:pPr algn="r">
-              <a:spcAft>
-                <a:spcPts val="0"/>
-              </a:spcAft>
-              <a:defRPr sz="680" b="1">
-                <a:solidFill>
-                  <a:srgbClr val="4F6B00"/>
-                </a:solidFill>
-                <a:latin typeface="Inter"/>
-              </a:defRPr>
-            </a:pPr>
-            <a:r>
-              <a:rPr>
-                <a:latin typeface="Inter"/>
-              </a:rPr>
-              <a:t>Illustrative, Gradient Maintained — demo data, not the client's holdings or managers</a:t>
-            </a:r>
-          </a:p>
-        </p:txBody>
-      </p:sp>
-      <p:sp>
-        <p:nvSpPr>
-          <p:cNvPr id="4" name="TextBox 3"/>
-          <p:cNvSpPr txBox="1"/>
-          <p:nvPr/>
-        </p:nvSpPr>
-        <p:spPr>
-          <a:xfrm>
             <a:off x="640080" y="566928"/>
             <a:ext cx="10058400" cy="530352"/>
           </a:xfrm>
@@ -4457,7 +4198,7 @@
       </p:sp>
       <p:sp>
         <p:nvSpPr>
-          <p:cNvPr id="5" name="Rectangle 4"/>
+          <p:cNvPr id="4" name="Rectangle 3"/>
           <p:cNvSpPr/>
           <p:nvPr/>
         </p:nvSpPr>
@@ -4506,7 +4247,7 @@
       </p:sp>
       <p:sp>
         <p:nvSpPr>
-          <p:cNvPr id="6" name="Rectangle 5"/>
+          <p:cNvPr id="5" name="Rectangle 4"/>
           <p:cNvSpPr/>
           <p:nvPr/>
         </p:nvSpPr>
@@ -4555,7 +4296,7 @@
       </p:sp>
       <p:sp>
         <p:nvSpPr>
-          <p:cNvPr id="7" name="TextBox 6"/>
+          <p:cNvPr id="6" name="TextBox 5"/>
           <p:cNvSpPr txBox="1"/>
           <p:nvPr/>
         </p:nvSpPr>
@@ -4597,7 +4338,7 @@
       </p:sp>
       <p:sp>
         <p:nvSpPr>
-          <p:cNvPr id="8" name="TextBox 7"/>
+          <p:cNvPr id="7" name="TextBox 6"/>
           <p:cNvSpPr txBox="1"/>
           <p:nvPr/>
         </p:nvSpPr>
@@ -4658,7 +4399,7 @@
       </p:sp>
       <p:sp>
         <p:nvSpPr>
-          <p:cNvPr id="9" name="Rectangle 8"/>
+          <p:cNvPr id="8" name="Rectangle 7"/>
           <p:cNvSpPr/>
           <p:nvPr/>
         </p:nvSpPr>
@@ -4707,7 +4448,7 @@
       </p:sp>
       <p:sp>
         <p:nvSpPr>
-          <p:cNvPr id="10" name="TextBox 9"/>
+          <p:cNvPr id="9" name="TextBox 8"/>
           <p:cNvSpPr txBox="1"/>
           <p:nvPr/>
         </p:nvSpPr>
@@ -4749,7 +4490,7 @@
       </p:sp>
       <p:sp>
         <p:nvSpPr>
-          <p:cNvPr id="11" name="TextBox 10"/>
+          <p:cNvPr id="10" name="TextBox 9"/>
           <p:cNvSpPr txBox="1"/>
           <p:nvPr/>
         </p:nvSpPr>
@@ -4791,7 +4532,7 @@
       </p:sp>
       <p:sp>
         <p:nvSpPr>
-          <p:cNvPr id="12" name="TextBox 11"/>
+          <p:cNvPr id="11" name="TextBox 10"/>
           <p:cNvSpPr txBox="1"/>
           <p:nvPr/>
         </p:nvSpPr>
@@ -4906,48 +4647,6 @@
         </p:nvSpPr>
         <p:spPr>
           <a:xfrm>
-            <a:off x="5897880" y="310896"/>
-            <a:ext cx="4800600" cy="256032"/>
-          </a:xfrm>
-          <a:prstGeom prst="rect">
-            <a:avLst/>
-          </a:prstGeom>
-          <a:noFill/>
-        </p:spPr>
-        <p:txBody>
-          <a:bodyPr wrap="none" lIns="9144" rIns="9144" tIns="9144" bIns="9144" anchor="t">
-            <a:spAutoFit/>
-          </a:bodyPr>
-          <a:lstStyle/>
-          <a:p>
-            <a:pPr algn="r">
-              <a:spcAft>
-                <a:spcPts val="0"/>
-              </a:spcAft>
-              <a:defRPr sz="680" b="1">
-                <a:solidFill>
-                  <a:srgbClr val="4F6B00"/>
-                </a:solidFill>
-                <a:latin typeface="Inter"/>
-              </a:defRPr>
-            </a:pPr>
-            <a:r>
-              <a:rPr>
-                <a:latin typeface="Inter"/>
-              </a:rPr>
-              <a:t>Illustrative, Gradient Maintained — demo data, not the client's holdings or managers</a:t>
-            </a:r>
-          </a:p>
-        </p:txBody>
-      </p:sp>
-      <p:sp>
-        <p:nvSpPr>
-          <p:cNvPr id="4" name="TextBox 3"/>
-          <p:cNvSpPr txBox="1"/>
-          <p:nvPr/>
-        </p:nvSpPr>
-        <p:spPr>
-          <a:xfrm>
             <a:off x="640080" y="566928"/>
             <a:ext cx="10058400" cy="530352"/>
           </a:xfrm>
@@ -4984,7 +4683,7 @@
       </p:sp>
       <p:sp>
         <p:nvSpPr>
-          <p:cNvPr id="5" name="Rectangle 4"/>
+          <p:cNvPr id="4" name="Rectangle 3"/>
           <p:cNvSpPr/>
           <p:nvPr/>
         </p:nvSpPr>
@@ -5033,7 +4732,7 @@
       </p:sp>
       <p:sp>
         <p:nvSpPr>
-          <p:cNvPr id="6" name="Rectangle 5"/>
+          <p:cNvPr id="5" name="Rectangle 4"/>
           <p:cNvSpPr/>
           <p:nvPr/>
         </p:nvSpPr>
@@ -5082,7 +4781,7 @@
       </p:sp>
       <p:sp>
         <p:nvSpPr>
-          <p:cNvPr id="7" name="TextBox 6"/>
+          <p:cNvPr id="6" name="TextBox 5"/>
           <p:cNvSpPr txBox="1"/>
           <p:nvPr/>
         </p:nvSpPr>
@@ -5124,7 +4823,7 @@
       </p:sp>
       <p:sp>
         <p:nvSpPr>
-          <p:cNvPr id="8" name="TextBox 7"/>
+          <p:cNvPr id="7" name="TextBox 6"/>
           <p:cNvSpPr txBox="1"/>
           <p:nvPr/>
         </p:nvSpPr>
@@ -5199,7 +4898,7 @@
       </p:sp>
       <p:sp>
         <p:nvSpPr>
-          <p:cNvPr id="9" name="TextBox 8"/>
+          <p:cNvPr id="8" name="TextBox 7"/>
           <p:cNvSpPr txBox="1"/>
           <p:nvPr/>
         </p:nvSpPr>
@@ -5260,7 +4959,7 @@
       </p:sp>
       <p:sp>
         <p:nvSpPr>
-          <p:cNvPr id="10" name="Rectangle 9"/>
+          <p:cNvPr id="9" name="Rectangle 8"/>
           <p:cNvSpPr/>
           <p:nvPr/>
         </p:nvSpPr>
@@ -5309,7 +5008,7 @@
       </p:sp>
       <p:sp>
         <p:nvSpPr>
-          <p:cNvPr id="11" name="TextBox 10"/>
+          <p:cNvPr id="10" name="TextBox 9"/>
           <p:cNvSpPr txBox="1"/>
           <p:nvPr/>
         </p:nvSpPr>
@@ -5351,7 +5050,7 @@
       </p:sp>
       <p:sp>
         <p:nvSpPr>
-          <p:cNvPr id="12" name="TextBox 11"/>
+          <p:cNvPr id="11" name="TextBox 10"/>
           <p:cNvSpPr txBox="1"/>
           <p:nvPr/>
         </p:nvSpPr>
@@ -5393,7 +5092,7 @@
       </p:sp>
       <p:sp>
         <p:nvSpPr>
-          <p:cNvPr id="13" name="TextBox 12"/>
+          <p:cNvPr id="12" name="TextBox 11"/>
           <p:cNvSpPr txBox="1"/>
           <p:nvPr/>
         </p:nvSpPr>
@@ -5508,48 +5207,6 @@
         </p:nvSpPr>
         <p:spPr>
           <a:xfrm>
-            <a:off x="5897880" y="310896"/>
-            <a:ext cx="4800600" cy="256032"/>
-          </a:xfrm>
-          <a:prstGeom prst="rect">
-            <a:avLst/>
-          </a:prstGeom>
-          <a:noFill/>
-        </p:spPr>
-        <p:txBody>
-          <a:bodyPr wrap="none" lIns="9144" rIns="9144" tIns="9144" bIns="9144" anchor="t">
-            <a:spAutoFit/>
-          </a:bodyPr>
-          <a:lstStyle/>
-          <a:p>
-            <a:pPr algn="r">
-              <a:spcAft>
-                <a:spcPts val="0"/>
-              </a:spcAft>
-              <a:defRPr sz="680" b="1">
-                <a:solidFill>
-                  <a:srgbClr val="4F6B00"/>
-                </a:solidFill>
-                <a:latin typeface="Inter"/>
-              </a:defRPr>
-            </a:pPr>
-            <a:r>
-              <a:rPr>
-                <a:latin typeface="Inter"/>
-              </a:rPr>
-              <a:t>Illustrative, Gradient Maintained — demo data, not the client's holdings or managers</a:t>
-            </a:r>
-          </a:p>
-        </p:txBody>
-      </p:sp>
-      <p:sp>
-        <p:nvSpPr>
-          <p:cNvPr id="4" name="TextBox 3"/>
-          <p:cNvSpPr txBox="1"/>
-          <p:nvPr/>
-        </p:nvSpPr>
-        <p:spPr>
-          <a:xfrm>
             <a:off x="640080" y="566928"/>
             <a:ext cx="10058400" cy="530352"/>
           </a:xfrm>
@@ -5586,7 +5243,7 @@
       </p:sp>
       <p:sp>
         <p:nvSpPr>
-          <p:cNvPr id="5" name="Rectangle 4"/>
+          <p:cNvPr id="4" name="Rectangle 3"/>
           <p:cNvSpPr/>
           <p:nvPr/>
         </p:nvSpPr>
@@ -5635,7 +5292,7 @@
       </p:sp>
       <p:sp>
         <p:nvSpPr>
-          <p:cNvPr id="6" name="Rectangle 5"/>
+          <p:cNvPr id="5" name="Rectangle 4"/>
           <p:cNvSpPr/>
           <p:nvPr/>
         </p:nvSpPr>
@@ -5684,7 +5341,7 @@
       </p:sp>
       <p:sp>
         <p:nvSpPr>
-          <p:cNvPr id="7" name="TextBox 6"/>
+          <p:cNvPr id="6" name="TextBox 5"/>
           <p:cNvSpPr txBox="1"/>
           <p:nvPr/>
         </p:nvSpPr>
@@ -5726,7 +5383,7 @@
       </p:sp>
       <p:sp>
         <p:nvSpPr>
-          <p:cNvPr id="8" name="TextBox 7"/>
+          <p:cNvPr id="7" name="TextBox 6"/>
           <p:cNvSpPr txBox="1"/>
           <p:nvPr/>
         </p:nvSpPr>
@@ -5808,7 +5465,7 @@
       </p:sp>
       <p:sp>
         <p:nvSpPr>
-          <p:cNvPr id="9" name="Rectangle 8"/>
+          <p:cNvPr id="8" name="Rectangle 7"/>
           <p:cNvSpPr/>
           <p:nvPr/>
         </p:nvSpPr>
@@ -5857,7 +5514,7 @@
       </p:sp>
       <p:sp>
         <p:nvSpPr>
-          <p:cNvPr id="10" name="TextBox 9"/>
+          <p:cNvPr id="9" name="TextBox 8"/>
           <p:cNvSpPr txBox="1"/>
           <p:nvPr/>
         </p:nvSpPr>
@@ -5899,7 +5556,7 @@
       </p:sp>
       <p:sp>
         <p:nvSpPr>
-          <p:cNvPr id="11" name="TextBox 10"/>
+          <p:cNvPr id="10" name="TextBox 9"/>
           <p:cNvSpPr txBox="1"/>
           <p:nvPr/>
         </p:nvSpPr>
@@ -5941,7 +5598,7 @@
       </p:sp>
       <p:sp>
         <p:nvSpPr>
-          <p:cNvPr id="12" name="TextBox 11"/>
+          <p:cNvPr id="11" name="TextBox 10"/>
           <p:cNvSpPr txBox="1"/>
           <p:nvPr/>
         </p:nvSpPr>
@@ -6056,48 +5713,6 @@
         </p:nvSpPr>
         <p:spPr>
           <a:xfrm>
-            <a:off x="5897880" y="310896"/>
-            <a:ext cx="4800600" cy="256032"/>
-          </a:xfrm>
-          <a:prstGeom prst="rect">
-            <a:avLst/>
-          </a:prstGeom>
-          <a:noFill/>
-        </p:spPr>
-        <p:txBody>
-          <a:bodyPr wrap="none" lIns="9144" rIns="9144" tIns="9144" bIns="9144" anchor="t">
-            <a:spAutoFit/>
-          </a:bodyPr>
-          <a:lstStyle/>
-          <a:p>
-            <a:pPr algn="r">
-              <a:spcAft>
-                <a:spcPts val="0"/>
-              </a:spcAft>
-              <a:defRPr sz="680" b="1">
-                <a:solidFill>
-                  <a:srgbClr val="4F6B00"/>
-                </a:solidFill>
-                <a:latin typeface="Inter"/>
-              </a:defRPr>
-            </a:pPr>
-            <a:r>
-              <a:rPr>
-                <a:latin typeface="Inter"/>
-              </a:rPr>
-              <a:t>Illustrative, Gradient Maintained — demo data, not the client's holdings or managers</a:t>
-            </a:r>
-          </a:p>
-        </p:txBody>
-      </p:sp>
-      <p:sp>
-        <p:nvSpPr>
-          <p:cNvPr id="4" name="TextBox 3"/>
-          <p:cNvSpPr txBox="1"/>
-          <p:nvPr/>
-        </p:nvSpPr>
-        <p:spPr>
-          <a:xfrm>
             <a:off x="640080" y="566928"/>
             <a:ext cx="10058400" cy="530352"/>
           </a:xfrm>
@@ -6134,7 +5749,7 @@
       </p:sp>
       <p:sp>
         <p:nvSpPr>
-          <p:cNvPr id="5" name="Rectangle 4"/>
+          <p:cNvPr id="4" name="Rectangle 3"/>
           <p:cNvSpPr/>
           <p:nvPr/>
         </p:nvSpPr>
@@ -6183,7 +5798,7 @@
       </p:sp>
       <p:sp>
         <p:nvSpPr>
-          <p:cNvPr id="6" name="Rectangle 5"/>
+          <p:cNvPr id="5" name="Rectangle 4"/>
           <p:cNvSpPr/>
           <p:nvPr/>
         </p:nvSpPr>
@@ -6232,7 +5847,7 @@
       </p:sp>
       <p:sp>
         <p:nvSpPr>
-          <p:cNvPr id="7" name="TextBox 6"/>
+          <p:cNvPr id="6" name="TextBox 5"/>
           <p:cNvSpPr txBox="1"/>
           <p:nvPr/>
         </p:nvSpPr>
@@ -6274,7 +5889,7 @@
       </p:sp>
       <p:sp>
         <p:nvSpPr>
-          <p:cNvPr id="8" name="TextBox 7"/>
+          <p:cNvPr id="7" name="TextBox 6"/>
           <p:cNvSpPr txBox="1"/>
           <p:nvPr/>
         </p:nvSpPr>
@@ -6348,7 +5963,7 @@
       </p:sp>
       <p:sp>
         <p:nvSpPr>
-          <p:cNvPr id="9" name="Rectangle 8"/>
+          <p:cNvPr id="8" name="Rectangle 7"/>
           <p:cNvSpPr/>
           <p:nvPr/>
         </p:nvSpPr>
@@ -6397,7 +6012,7 @@
       </p:sp>
       <p:sp>
         <p:nvSpPr>
-          <p:cNvPr id="10" name="TextBox 9"/>
+          <p:cNvPr id="9" name="TextBox 8"/>
           <p:cNvSpPr txBox="1"/>
           <p:nvPr/>
         </p:nvSpPr>
@@ -6439,7 +6054,7 @@
       </p:sp>
       <p:sp>
         <p:nvSpPr>
-          <p:cNvPr id="11" name="TextBox 10"/>
+          <p:cNvPr id="10" name="TextBox 9"/>
           <p:cNvSpPr txBox="1"/>
           <p:nvPr/>
         </p:nvSpPr>
@@ -6481,7 +6096,7 @@
       </p:sp>
       <p:sp>
         <p:nvSpPr>
-          <p:cNvPr id="12" name="TextBox 11"/>
+          <p:cNvPr id="11" name="TextBox 10"/>
           <p:cNvSpPr txBox="1"/>
           <p:nvPr/>
         </p:nvSpPr>
@@ -6596,48 +6211,6 @@
         </p:nvSpPr>
         <p:spPr>
           <a:xfrm>
-            <a:off x="5897880" y="310896"/>
-            <a:ext cx="4800600" cy="256032"/>
-          </a:xfrm>
-          <a:prstGeom prst="rect">
-            <a:avLst/>
-          </a:prstGeom>
-          <a:noFill/>
-        </p:spPr>
-        <p:txBody>
-          <a:bodyPr wrap="none" lIns="9144" rIns="9144" tIns="9144" bIns="9144" anchor="t">
-            <a:spAutoFit/>
-          </a:bodyPr>
-          <a:lstStyle/>
-          <a:p>
-            <a:pPr algn="r">
-              <a:spcAft>
-                <a:spcPts val="0"/>
-              </a:spcAft>
-              <a:defRPr sz="680" b="1">
-                <a:solidFill>
-                  <a:srgbClr val="4F6B00"/>
-                </a:solidFill>
-                <a:latin typeface="Inter"/>
-              </a:defRPr>
-            </a:pPr>
-            <a:r>
-              <a:rPr>
-                <a:latin typeface="Inter"/>
-              </a:rPr>
-              <a:t>Illustrative, Gradient Maintained — demo data, not the client's holdings or managers</a:t>
-            </a:r>
-          </a:p>
-        </p:txBody>
-      </p:sp>
-      <p:sp>
-        <p:nvSpPr>
-          <p:cNvPr id="4" name="TextBox 3"/>
-          <p:cNvSpPr txBox="1"/>
-          <p:nvPr/>
-        </p:nvSpPr>
-        <p:spPr>
-          <a:xfrm>
             <a:off x="640080" y="566928"/>
             <a:ext cx="10058400" cy="530352"/>
           </a:xfrm>
@@ -6674,7 +6247,7 @@
       </p:sp>
       <p:sp>
         <p:nvSpPr>
-          <p:cNvPr id="5" name="Rectangle 4"/>
+          <p:cNvPr id="4" name="Rectangle 3"/>
           <p:cNvSpPr/>
           <p:nvPr/>
         </p:nvSpPr>
@@ -6723,7 +6296,7 @@
       </p:sp>
       <p:sp>
         <p:nvSpPr>
-          <p:cNvPr id="6" name="Rectangle 5"/>
+          <p:cNvPr id="5" name="Rectangle 4"/>
           <p:cNvSpPr/>
           <p:nvPr/>
         </p:nvSpPr>
@@ -6772,7 +6345,7 @@
       </p:sp>
       <p:sp>
         <p:nvSpPr>
-          <p:cNvPr id="7" name="TextBox 6"/>
+          <p:cNvPr id="6" name="TextBox 5"/>
           <p:cNvSpPr txBox="1"/>
           <p:nvPr/>
         </p:nvSpPr>
@@ -6814,7 +6387,7 @@
       </p:sp>
       <p:sp>
         <p:nvSpPr>
-          <p:cNvPr id="8" name="TextBox 7"/>
+          <p:cNvPr id="7" name="TextBox 6"/>
           <p:cNvSpPr txBox="1"/>
           <p:nvPr/>
         </p:nvSpPr>
@@ -6856,7 +6429,7 @@
       </p:sp>
       <p:sp>
         <p:nvSpPr>
-          <p:cNvPr id="9" name="Rectangle 8"/>
+          <p:cNvPr id="8" name="Rectangle 7"/>
           <p:cNvSpPr/>
           <p:nvPr/>
         </p:nvSpPr>
@@ -6905,7 +6478,7 @@
       </p:sp>
       <p:sp>
         <p:nvSpPr>
-          <p:cNvPr id="10" name="TextBox 9"/>
+          <p:cNvPr id="9" name="TextBox 8"/>
           <p:cNvSpPr txBox="1"/>
           <p:nvPr/>
         </p:nvSpPr>
@@ -6947,7 +6520,7 @@
       </p:sp>
       <p:sp>
         <p:nvSpPr>
-          <p:cNvPr id="11" name="TextBox 10"/>
+          <p:cNvPr id="10" name="TextBox 9"/>
           <p:cNvSpPr txBox="1"/>
           <p:nvPr/>
         </p:nvSpPr>
@@ -6989,7 +6562,7 @@
       </p:sp>
       <p:sp>
         <p:nvSpPr>
-          <p:cNvPr id="12" name="TextBox 11"/>
+          <p:cNvPr id="11" name="TextBox 10"/>
           <p:cNvSpPr txBox="1"/>
           <p:nvPr/>
         </p:nvSpPr>
@@ -7104,48 +6677,6 @@
         </p:nvSpPr>
         <p:spPr>
           <a:xfrm>
-            <a:off x="5897880" y="310896"/>
-            <a:ext cx="4800600" cy="256032"/>
-          </a:xfrm>
-          <a:prstGeom prst="rect">
-            <a:avLst/>
-          </a:prstGeom>
-          <a:noFill/>
-        </p:spPr>
-        <p:txBody>
-          <a:bodyPr wrap="none" lIns="9144" rIns="9144" tIns="9144" bIns="9144" anchor="t">
-            <a:spAutoFit/>
-          </a:bodyPr>
-          <a:lstStyle/>
-          <a:p>
-            <a:pPr algn="r">
-              <a:spcAft>
-                <a:spcPts val="0"/>
-              </a:spcAft>
-              <a:defRPr sz="680" b="1">
-                <a:solidFill>
-                  <a:srgbClr val="4F6B00"/>
-                </a:solidFill>
-                <a:latin typeface="Inter"/>
-              </a:defRPr>
-            </a:pPr>
-            <a:r>
-              <a:rPr>
-                <a:latin typeface="Inter"/>
-              </a:rPr>
-              <a:t>Illustrative, Gradient Maintained — demo data, not the client's holdings or managers</a:t>
-            </a:r>
-          </a:p>
-        </p:txBody>
-      </p:sp>
-      <p:sp>
-        <p:nvSpPr>
-          <p:cNvPr id="4" name="TextBox 3"/>
-          <p:cNvSpPr txBox="1"/>
-          <p:nvPr/>
-        </p:nvSpPr>
-        <p:spPr>
-          <a:xfrm>
             <a:off x="640080" y="566928"/>
             <a:ext cx="10058400" cy="530352"/>
           </a:xfrm>
@@ -7182,7 +6713,7 @@
       </p:sp>
       <p:sp>
         <p:nvSpPr>
-          <p:cNvPr id="5" name="Rectangle 4"/>
+          <p:cNvPr id="4" name="Rectangle 3"/>
           <p:cNvSpPr/>
           <p:nvPr/>
         </p:nvSpPr>
@@ -7231,7 +6762,7 @@
       </p:sp>
       <p:sp>
         <p:nvSpPr>
-          <p:cNvPr id="6" name="Rectangle 5"/>
+          <p:cNvPr id="5" name="Rectangle 4"/>
           <p:cNvSpPr/>
           <p:nvPr/>
         </p:nvSpPr>
@@ -7280,7 +6811,7 @@
       </p:sp>
       <p:sp>
         <p:nvSpPr>
-          <p:cNvPr id="7" name="TextBox 6"/>
+          <p:cNvPr id="6" name="TextBox 5"/>
           <p:cNvSpPr txBox="1"/>
           <p:nvPr/>
         </p:nvSpPr>
@@ -7322,14 +6853,105 @@
       </p:sp>
       <p:sp>
         <p:nvSpPr>
-          <p:cNvPr id="8" name="Rectangle 7"/>
+          <p:cNvPr id="7" name="Rectangle 6"/>
           <p:cNvSpPr/>
           <p:nvPr/>
         </p:nvSpPr>
         <p:spPr>
           <a:xfrm>
-            <a:off x="640080" y="1325880"/>
-            <a:ext cx="10908792" cy="1866268"/>
+            <a:off x="640080" y="1399032"/>
+            <a:ext cx="73152" cy="1165298"/>
+          </a:xfrm>
+          <a:prstGeom prst="rect">
+            <a:avLst/>
+          </a:prstGeom>
+          <a:solidFill>
+            <a:srgbClr val="F2A93B"/>
+          </a:solidFill>
+          <a:ln>
+            <a:solidFill>
+              <a:srgbClr val="F2A93B"/>
+            </a:solidFill>
+          </a:ln>
+        </p:spPr>
+        <p:style>
+          <a:lnRef idx="1">
+            <a:schemeClr val="accent1"/>
+          </a:lnRef>
+          <a:fillRef idx="3">
+            <a:schemeClr val="accent1"/>
+          </a:fillRef>
+          <a:effectRef idx="2">
+            <a:schemeClr val="accent1"/>
+          </a:effectRef>
+          <a:fontRef idx="minor">
+            <a:schemeClr val="lt1"/>
+          </a:fontRef>
+        </p:style>
+        <p:txBody>
+          <a:bodyPr rtlCol="0" anchor="ctr"/>
+          <a:lstStyle/>
+          <a:p>
+            <a:pPr algn="ctr">
+              <a:defRPr>
+                <a:latin typeface="Inter"/>
+              </a:defRPr>
+            </a:pPr>
+          </a:p>
+        </p:txBody>
+      </p:sp>
+      <p:sp>
+        <p:nvSpPr>
+          <p:cNvPr id="8" name="TextBox 7"/>
+          <p:cNvSpPr txBox="1"/>
+          <p:nvPr/>
+        </p:nvSpPr>
+        <p:spPr>
+          <a:xfrm>
+            <a:off x="896112" y="1371600"/>
+            <a:ext cx="10588752" cy="760729"/>
+          </a:xfrm>
+          <a:prstGeom prst="rect">
+            <a:avLst/>
+          </a:prstGeom>
+          <a:noFill/>
+        </p:spPr>
+        <p:txBody>
+          <a:bodyPr wrap="none" lIns="9144" rIns="9144" tIns="9144" bIns="9144" anchor="t">
+            <a:spAutoFit/>
+          </a:bodyPr>
+          <a:lstStyle/>
+          <a:p>
+            <a:pPr algn="l">
+              <a:spcAft>
+                <a:spcPts val="0"/>
+              </a:spcAft>
+              <a:defRPr sz="1800" b="1">
+                <a:solidFill>
+                  <a:srgbClr val="0D1117"/>
+                </a:solidFill>
+                <a:latin typeface="Inter"/>
+              </a:defRPr>
+            </a:pPr>
+            <a:r>
+              <a:rPr>
+                <a:latin typeface="Inter"/>
+              </a:rPr>
+              <a:t>Satisfactory with follow-ups</a:t>
+            </a:r>
+          </a:p>
+        </p:txBody>
+      </p:sp>
+      <p:sp>
+        <p:nvSpPr>
+          <p:cNvPr id="9" name="Rectangle 8"/>
+          <p:cNvSpPr/>
+          <p:nvPr/>
+        </p:nvSpPr>
+        <p:spPr>
+          <a:xfrm>
+            <a:off x="640080" y="2747210"/>
+            <a:ext cx="10908792" cy="1311602"/>
           </a:xfrm>
           <a:prstGeom prst="rect">
             <a:avLst/>
@@ -7371,14 +6993,14 @@
       </p:sp>
       <p:sp>
         <p:nvSpPr>
-          <p:cNvPr id="9" name="Rectangle 8"/>
+          <p:cNvPr id="10" name="Rectangle 9"/>
           <p:cNvSpPr/>
           <p:nvPr/>
         </p:nvSpPr>
         <p:spPr>
           <a:xfrm>
-            <a:off x="640080" y="1325880"/>
-            <a:ext cx="54864" cy="1866268"/>
+            <a:off x="640080" y="2747210"/>
+            <a:ext cx="54864" cy="1311602"/>
           </a:xfrm>
           <a:prstGeom prst="rect">
             <a:avLst/>
@@ -7420,13 +7042,13 @@
       </p:sp>
       <p:sp>
         <p:nvSpPr>
-          <p:cNvPr id="10" name="TextBox 9"/>
+          <p:cNvPr id="11" name="TextBox 10"/>
           <p:cNvSpPr txBox="1"/>
           <p:nvPr/>
         </p:nvSpPr>
         <p:spPr>
           <a:xfrm>
-            <a:off x="804671" y="1435607"/>
+            <a:off x="804671" y="2856938"/>
             <a:ext cx="10616184" cy="228600"/>
           </a:xfrm>
           <a:prstGeom prst="rect">
@@ -7462,14 +7084,14 @@
       </p:sp>
       <p:sp>
         <p:nvSpPr>
-          <p:cNvPr id="11" name="TextBox 10"/>
+          <p:cNvPr id="12" name="TextBox 11"/>
           <p:cNvSpPr txBox="1"/>
           <p:nvPr/>
         </p:nvSpPr>
         <p:spPr>
           <a:xfrm>
-            <a:off x="804671" y="1719072"/>
-            <a:ext cx="10616184" cy="1381636"/>
+            <a:off x="804671" y="3140402"/>
+            <a:ext cx="10616184" cy="826970"/>
           </a:xfrm>
           <a:prstGeom prst="rect">
             <a:avLst/>
@@ -7504,14 +7126,14 @@
       </p:sp>
       <p:sp>
         <p:nvSpPr>
-          <p:cNvPr id="12" name="Rectangle 11"/>
+          <p:cNvPr id="13" name="Rectangle 12"/>
           <p:cNvSpPr/>
           <p:nvPr/>
         </p:nvSpPr>
         <p:spPr>
           <a:xfrm>
-            <a:off x="640080" y="3301876"/>
-            <a:ext cx="2644902" cy="2916043"/>
+            <a:off x="640080" y="4168541"/>
+            <a:ext cx="2644902" cy="2049378"/>
           </a:xfrm>
           <a:prstGeom prst="rect">
             <a:avLst/>
@@ -7553,13 +7175,13 @@
       </p:sp>
       <p:sp>
         <p:nvSpPr>
-          <p:cNvPr id="13" name="Rectangle 12"/>
+          <p:cNvPr id="14" name="Rectangle 13"/>
           <p:cNvSpPr/>
           <p:nvPr/>
         </p:nvSpPr>
         <p:spPr>
           <a:xfrm>
-            <a:off x="640080" y="3301876"/>
+            <a:off x="640080" y="4168541"/>
             <a:ext cx="2644902" cy="45720"/>
           </a:xfrm>
           <a:prstGeom prst="rect">
@@ -7602,13 +7224,13 @@
       </p:sp>
       <p:sp>
         <p:nvSpPr>
-          <p:cNvPr id="14" name="TextBox 13"/>
+          <p:cNvPr id="15" name="TextBox 14"/>
           <p:cNvSpPr txBox="1"/>
           <p:nvPr/>
         </p:nvSpPr>
         <p:spPr>
           <a:xfrm>
-            <a:off x="749808" y="3429892"/>
+            <a:off x="749808" y="4296557"/>
             <a:ext cx="2425446" cy="201168"/>
           </a:xfrm>
           <a:prstGeom prst="rect">
@@ -7644,13 +7266,13 @@
       </p:sp>
       <p:sp>
         <p:nvSpPr>
-          <p:cNvPr id="15" name="TextBox 14"/>
+          <p:cNvPr id="16" name="TextBox 15"/>
           <p:cNvSpPr txBox="1"/>
           <p:nvPr/>
         </p:nvSpPr>
         <p:spPr>
           <a:xfrm>
-            <a:off x="749808" y="3685924"/>
+            <a:off x="749808" y="4552589"/>
             <a:ext cx="2425446" cy="475488"/>
           </a:xfrm>
           <a:prstGeom prst="rect">
@@ -7686,7 +7308,7 @@
       </p:sp>
       <p:sp>
         <p:nvSpPr>
-          <p:cNvPr id="16" name="TextBox 15"/>
+          <p:cNvPr id="17" name="TextBox 16"/>
           <p:cNvSpPr txBox="1"/>
           <p:nvPr/>
         </p:nvSpPr>
@@ -7728,14 +7350,14 @@
       </p:sp>
       <p:sp>
         <p:nvSpPr>
-          <p:cNvPr id="17" name="Rectangle 16"/>
+          <p:cNvPr id="18" name="Rectangle 17"/>
           <p:cNvSpPr/>
           <p:nvPr/>
         </p:nvSpPr>
         <p:spPr>
           <a:xfrm>
-            <a:off x="3394710" y="3301876"/>
-            <a:ext cx="2644902" cy="2916043"/>
+            <a:off x="3394710" y="4168541"/>
+            <a:ext cx="2644902" cy="2049378"/>
           </a:xfrm>
           <a:prstGeom prst="rect">
             <a:avLst/>
@@ -7777,13 +7399,13 @@
       </p:sp>
       <p:sp>
         <p:nvSpPr>
-          <p:cNvPr id="18" name="Rectangle 17"/>
+          <p:cNvPr id="19" name="Rectangle 18"/>
           <p:cNvSpPr/>
           <p:nvPr/>
         </p:nvSpPr>
         <p:spPr>
           <a:xfrm>
-            <a:off x="3394710" y="3301876"/>
+            <a:off x="3394710" y="4168541"/>
             <a:ext cx="2644902" cy="45720"/>
           </a:xfrm>
           <a:prstGeom prst="rect">
@@ -7826,13 +7448,13 @@
       </p:sp>
       <p:sp>
         <p:nvSpPr>
-          <p:cNvPr id="19" name="TextBox 18"/>
+          <p:cNvPr id="20" name="TextBox 19"/>
           <p:cNvSpPr txBox="1"/>
           <p:nvPr/>
         </p:nvSpPr>
         <p:spPr>
           <a:xfrm>
-            <a:off x="3504438" y="3429892"/>
+            <a:off x="3504438" y="4296557"/>
             <a:ext cx="2425446" cy="201168"/>
           </a:xfrm>
           <a:prstGeom prst="rect">
@@ -7868,13 +7490,13 @@
       </p:sp>
       <p:sp>
         <p:nvSpPr>
-          <p:cNvPr id="20" name="TextBox 19"/>
+          <p:cNvPr id="21" name="TextBox 20"/>
           <p:cNvSpPr txBox="1"/>
           <p:nvPr/>
         </p:nvSpPr>
         <p:spPr>
           <a:xfrm>
-            <a:off x="3504438" y="3685924"/>
+            <a:off x="3504438" y="4552589"/>
             <a:ext cx="2425446" cy="475488"/>
           </a:xfrm>
           <a:prstGeom prst="rect">
@@ -7910,7 +7532,7 @@
       </p:sp>
       <p:sp>
         <p:nvSpPr>
-          <p:cNvPr id="21" name="TextBox 20"/>
+          <p:cNvPr id="22" name="TextBox 21"/>
           <p:cNvSpPr txBox="1"/>
           <p:nvPr/>
         </p:nvSpPr>
@@ -7952,14 +7574,14 @@
       </p:sp>
       <p:sp>
         <p:nvSpPr>
-          <p:cNvPr id="22" name="Rectangle 21"/>
+          <p:cNvPr id="23" name="Rectangle 22"/>
           <p:cNvSpPr/>
           <p:nvPr/>
         </p:nvSpPr>
         <p:spPr>
           <a:xfrm>
-            <a:off x="6149340" y="3301876"/>
-            <a:ext cx="2644902" cy="2916043"/>
+            <a:off x="6149340" y="4168541"/>
+            <a:ext cx="2644902" cy="2049378"/>
           </a:xfrm>
           <a:prstGeom prst="rect">
             <a:avLst/>
@@ -8001,13 +7623,13 @@
       </p:sp>
       <p:sp>
         <p:nvSpPr>
-          <p:cNvPr id="23" name="Rectangle 22"/>
+          <p:cNvPr id="24" name="Rectangle 23"/>
           <p:cNvSpPr/>
           <p:nvPr/>
         </p:nvSpPr>
         <p:spPr>
           <a:xfrm>
-            <a:off x="6149340" y="3301876"/>
+            <a:off x="6149340" y="4168541"/>
             <a:ext cx="2644902" cy="45720"/>
           </a:xfrm>
           <a:prstGeom prst="rect">
@@ -8050,13 +7672,13 @@
       </p:sp>
       <p:sp>
         <p:nvSpPr>
-          <p:cNvPr id="24" name="TextBox 23"/>
+          <p:cNvPr id="25" name="TextBox 24"/>
           <p:cNvSpPr txBox="1"/>
           <p:nvPr/>
         </p:nvSpPr>
         <p:spPr>
           <a:xfrm>
-            <a:off x="6259068" y="3429892"/>
+            <a:off x="6259068" y="4296557"/>
             <a:ext cx="2425446" cy="201168"/>
           </a:xfrm>
           <a:prstGeom prst="rect">
@@ -8092,13 +7714,13 @@
       </p:sp>
       <p:sp>
         <p:nvSpPr>
-          <p:cNvPr id="25" name="TextBox 24"/>
+          <p:cNvPr id="26" name="TextBox 25"/>
           <p:cNvSpPr txBox="1"/>
           <p:nvPr/>
         </p:nvSpPr>
         <p:spPr>
           <a:xfrm>
-            <a:off x="6259068" y="3685924"/>
+            <a:off x="6259068" y="4552589"/>
             <a:ext cx="2425446" cy="475488"/>
           </a:xfrm>
           <a:prstGeom prst="rect">
@@ -8134,7 +7756,7 @@
       </p:sp>
       <p:sp>
         <p:nvSpPr>
-          <p:cNvPr id="26" name="TextBox 25"/>
+          <p:cNvPr id="27" name="TextBox 26"/>
           <p:cNvSpPr txBox="1"/>
           <p:nvPr/>
         </p:nvSpPr>
@@ -8176,14 +7798,14 @@
       </p:sp>
       <p:sp>
         <p:nvSpPr>
-          <p:cNvPr id="27" name="Rectangle 26"/>
+          <p:cNvPr id="28" name="Rectangle 27"/>
           <p:cNvSpPr/>
           <p:nvPr/>
         </p:nvSpPr>
         <p:spPr>
           <a:xfrm>
-            <a:off x="8903970" y="3301876"/>
-            <a:ext cx="2644902" cy="2916043"/>
+            <a:off x="8903970" y="4168541"/>
+            <a:ext cx="2644902" cy="2049378"/>
           </a:xfrm>
           <a:prstGeom prst="rect">
             <a:avLst/>
@@ -8225,13 +7847,13 @@
       </p:sp>
       <p:sp>
         <p:nvSpPr>
-          <p:cNvPr id="28" name="Rectangle 27"/>
+          <p:cNvPr id="29" name="Rectangle 28"/>
           <p:cNvSpPr/>
           <p:nvPr/>
         </p:nvSpPr>
         <p:spPr>
           <a:xfrm>
-            <a:off x="8903970" y="3301876"/>
+            <a:off x="8903970" y="4168541"/>
             <a:ext cx="2644902" cy="45720"/>
           </a:xfrm>
           <a:prstGeom prst="rect">
@@ -8274,13 +7896,13 @@
       </p:sp>
       <p:sp>
         <p:nvSpPr>
-          <p:cNvPr id="29" name="TextBox 28"/>
+          <p:cNvPr id="30" name="TextBox 29"/>
           <p:cNvSpPr txBox="1"/>
           <p:nvPr/>
         </p:nvSpPr>
         <p:spPr>
           <a:xfrm>
-            <a:off x="9013698" y="3429892"/>
+            <a:off x="9013698" y="4296557"/>
             <a:ext cx="2425446" cy="201168"/>
           </a:xfrm>
           <a:prstGeom prst="rect">
@@ -8316,13 +7938,13 @@
       </p:sp>
       <p:sp>
         <p:nvSpPr>
-          <p:cNvPr id="30" name="TextBox 29"/>
+          <p:cNvPr id="31" name="TextBox 30"/>
           <p:cNvSpPr txBox="1"/>
           <p:nvPr/>
         </p:nvSpPr>
         <p:spPr>
           <a:xfrm>
-            <a:off x="9013698" y="3685924"/>
+            <a:off x="9013698" y="4552589"/>
             <a:ext cx="2425446" cy="475488"/>
           </a:xfrm>
           <a:prstGeom prst="rect">
@@ -8358,7 +7980,7 @@
       </p:sp>
       <p:sp>
         <p:nvSpPr>
-          <p:cNvPr id="31" name="TextBox 30"/>
+          <p:cNvPr id="32" name="TextBox 31"/>
           <p:cNvSpPr txBox="1"/>
           <p:nvPr/>
         </p:nvSpPr>
@@ -8400,7 +8022,7 @@
       </p:sp>
       <p:sp>
         <p:nvSpPr>
-          <p:cNvPr id="32" name="Rectangle 31"/>
+          <p:cNvPr id="33" name="Rectangle 32"/>
           <p:cNvSpPr/>
           <p:nvPr/>
         </p:nvSpPr>
@@ -8449,7 +8071,7 @@
       </p:sp>
       <p:sp>
         <p:nvSpPr>
-          <p:cNvPr id="33" name="TextBox 32"/>
+          <p:cNvPr id="34" name="TextBox 33"/>
           <p:cNvSpPr txBox="1"/>
           <p:nvPr/>
         </p:nvSpPr>
@@ -8491,7 +8113,7 @@
       </p:sp>
       <p:sp>
         <p:nvSpPr>
-          <p:cNvPr id="34" name="TextBox 33"/>
+          <p:cNvPr id="35" name="TextBox 34"/>
           <p:cNvSpPr txBox="1"/>
           <p:nvPr/>
         </p:nvSpPr>
@@ -8533,7 +8155,7 @@
       </p:sp>
       <p:sp>
         <p:nvSpPr>
-          <p:cNvPr id="35" name="TextBox 34"/>
+          <p:cNvPr id="36" name="TextBox 35"/>
           <p:cNvSpPr txBox="1"/>
           <p:nvPr/>
         </p:nvSpPr>
@@ -8648,48 +8270,6 @@
         </p:nvSpPr>
         <p:spPr>
           <a:xfrm>
-            <a:off x="5897880" y="310896"/>
-            <a:ext cx="4800600" cy="256032"/>
-          </a:xfrm>
-          <a:prstGeom prst="rect">
-            <a:avLst/>
-          </a:prstGeom>
-          <a:noFill/>
-        </p:spPr>
-        <p:txBody>
-          <a:bodyPr wrap="none" lIns="9144" rIns="9144" tIns="9144" bIns="9144" anchor="t">
-            <a:spAutoFit/>
-          </a:bodyPr>
-          <a:lstStyle/>
-          <a:p>
-            <a:pPr algn="r">
-              <a:spcAft>
-                <a:spcPts val="0"/>
-              </a:spcAft>
-              <a:defRPr sz="680" b="1">
-                <a:solidFill>
-                  <a:srgbClr val="4F6B00"/>
-                </a:solidFill>
-                <a:latin typeface="Inter"/>
-              </a:defRPr>
-            </a:pPr>
-            <a:r>
-              <a:rPr>
-                <a:latin typeface="Inter"/>
-              </a:rPr>
-              <a:t>Illustrative, Gradient Maintained — demo data, not the client's holdings or managers</a:t>
-            </a:r>
-          </a:p>
-        </p:txBody>
-      </p:sp>
-      <p:sp>
-        <p:nvSpPr>
-          <p:cNvPr id="4" name="TextBox 3"/>
-          <p:cNvSpPr txBox="1"/>
-          <p:nvPr/>
-        </p:nvSpPr>
-        <p:spPr>
-          <a:xfrm>
             <a:off x="640080" y="566928"/>
             <a:ext cx="10058400" cy="530352"/>
           </a:xfrm>
@@ -8726,7 +8306,7 @@
       </p:sp>
       <p:sp>
         <p:nvSpPr>
-          <p:cNvPr id="5" name="Rectangle 4"/>
+          <p:cNvPr id="4" name="Rectangle 3"/>
           <p:cNvSpPr/>
           <p:nvPr/>
         </p:nvSpPr>
@@ -8775,7 +8355,7 @@
       </p:sp>
       <p:sp>
         <p:nvSpPr>
-          <p:cNvPr id="6" name="Rectangle 5"/>
+          <p:cNvPr id="5" name="Rectangle 4"/>
           <p:cNvSpPr/>
           <p:nvPr/>
         </p:nvSpPr>
@@ -8824,7 +8404,7 @@
       </p:sp>
       <p:sp>
         <p:nvSpPr>
-          <p:cNvPr id="7" name="TextBox 6"/>
+          <p:cNvPr id="6" name="TextBox 5"/>
           <p:cNvSpPr txBox="1"/>
           <p:nvPr/>
         </p:nvSpPr>
@@ -8866,7 +8446,7 @@
       </p:sp>
       <p:sp>
         <p:nvSpPr>
-          <p:cNvPr id="8" name="TextBox 7"/>
+          <p:cNvPr id="7" name="TextBox 6"/>
           <p:cNvSpPr txBox="1"/>
           <p:nvPr/>
         </p:nvSpPr>
@@ -8908,7 +8488,7 @@
       </p:sp>
       <p:graphicFrame>
         <p:nvGraphicFramePr>
-          <p:cNvPr id="9" name="Table 8"/>
+          <p:cNvPr id="8" name="Table 7"/>
           <p:cNvGraphicFramePr>
             <a:graphicFrameLocks noGrp="1"/>
           </p:cNvGraphicFramePr>
@@ -9057,7 +8637,7 @@
                         <a:rPr>
                           <a:latin typeface="Inter"/>
                         </a:rPr>
-                        <a:t>● available</a:t>
+                        <a:t>● Available</a:t>
                       </a:r>
                     </a:p>
                   </a:txBody>
@@ -9140,7 +8720,7 @@
                         <a:rPr>
                           <a:latin typeface="Inter"/>
                         </a:rPr>
-                        <a:t>● degraded</a:t>
+                        <a:t>● Incomplete</a:t>
                       </a:r>
                     </a:p>
                   </a:txBody>
@@ -9184,7 +8764,7 @@
       </p:graphicFrame>
       <p:sp>
         <p:nvSpPr>
-          <p:cNvPr id="10" name="TextBox 9"/>
+          <p:cNvPr id="9" name="TextBox 8"/>
           <p:cNvSpPr txBox="1"/>
           <p:nvPr/>
         </p:nvSpPr>
@@ -9226,7 +8806,7 @@
       </p:sp>
       <p:sp>
         <p:nvSpPr>
-          <p:cNvPr id="11" name="Rectangle 10"/>
+          <p:cNvPr id="10" name="Rectangle 9"/>
           <p:cNvSpPr/>
           <p:nvPr/>
         </p:nvSpPr>
@@ -9275,7 +8855,7 @@
       </p:sp>
       <p:sp>
         <p:nvSpPr>
-          <p:cNvPr id="12" name="Rectangle 11"/>
+          <p:cNvPr id="11" name="Rectangle 10"/>
           <p:cNvSpPr/>
           <p:nvPr/>
         </p:nvSpPr>
@@ -9324,7 +8904,7 @@
       </p:sp>
       <p:sp>
         <p:nvSpPr>
-          <p:cNvPr id="13" name="TextBox 12"/>
+          <p:cNvPr id="12" name="TextBox 11"/>
           <p:cNvSpPr txBox="1"/>
           <p:nvPr/>
         </p:nvSpPr>
@@ -9366,7 +8946,7 @@
       </p:sp>
       <p:sp>
         <p:nvSpPr>
-          <p:cNvPr id="14" name="TextBox 13"/>
+          <p:cNvPr id="13" name="TextBox 12"/>
           <p:cNvSpPr txBox="1"/>
           <p:nvPr/>
         </p:nvSpPr>
@@ -9408,7 +8988,7 @@
       </p:sp>
       <p:sp>
         <p:nvSpPr>
-          <p:cNvPr id="15" name="Rectangle 14"/>
+          <p:cNvPr id="14" name="Rectangle 13"/>
           <p:cNvSpPr/>
           <p:nvPr/>
         </p:nvSpPr>
@@ -9457,7 +9037,7 @@
       </p:sp>
       <p:sp>
         <p:nvSpPr>
-          <p:cNvPr id="16" name="Rectangle 15"/>
+          <p:cNvPr id="15" name="Rectangle 14"/>
           <p:cNvSpPr/>
           <p:nvPr/>
         </p:nvSpPr>
@@ -9506,7 +9086,7 @@
       </p:sp>
       <p:sp>
         <p:nvSpPr>
-          <p:cNvPr id="17" name="TextBox 16"/>
+          <p:cNvPr id="16" name="TextBox 15"/>
           <p:cNvSpPr txBox="1"/>
           <p:nvPr/>
         </p:nvSpPr>
@@ -9548,7 +9128,7 @@
       </p:sp>
       <p:sp>
         <p:nvSpPr>
-          <p:cNvPr id="18" name="TextBox 17"/>
+          <p:cNvPr id="17" name="TextBox 16"/>
           <p:cNvSpPr txBox="1"/>
           <p:nvPr/>
         </p:nvSpPr>
@@ -9590,7 +9170,7 @@
       </p:sp>
       <p:sp>
         <p:nvSpPr>
-          <p:cNvPr id="19" name="Rectangle 18"/>
+          <p:cNvPr id="18" name="Rectangle 17"/>
           <p:cNvSpPr/>
           <p:nvPr/>
         </p:nvSpPr>
@@ -9639,7 +9219,7 @@
       </p:sp>
       <p:sp>
         <p:nvSpPr>
-          <p:cNvPr id="20" name="TextBox 19"/>
+          <p:cNvPr id="19" name="TextBox 18"/>
           <p:cNvSpPr txBox="1"/>
           <p:nvPr/>
         </p:nvSpPr>
@@ -9681,7 +9261,7 @@
       </p:sp>
       <p:sp>
         <p:nvSpPr>
-          <p:cNvPr id="21" name="TextBox 20"/>
+          <p:cNvPr id="20" name="TextBox 19"/>
           <p:cNvSpPr txBox="1"/>
           <p:nvPr/>
         </p:nvSpPr>
@@ -9723,7 +9303,7 @@
       </p:sp>
       <p:sp>
         <p:nvSpPr>
-          <p:cNvPr id="22" name="TextBox 21"/>
+          <p:cNvPr id="21" name="TextBox 20"/>
           <p:cNvSpPr txBox="1"/>
           <p:nvPr/>
         </p:nvSpPr>
@@ -9838,48 +9418,6 @@
         </p:nvSpPr>
         <p:spPr>
           <a:xfrm>
-            <a:off x="5897880" y="310896"/>
-            <a:ext cx="4800600" cy="256032"/>
-          </a:xfrm>
-          <a:prstGeom prst="rect">
-            <a:avLst/>
-          </a:prstGeom>
-          <a:noFill/>
-        </p:spPr>
-        <p:txBody>
-          <a:bodyPr wrap="none" lIns="9144" rIns="9144" tIns="9144" bIns="9144" anchor="t">
-            <a:spAutoFit/>
-          </a:bodyPr>
-          <a:lstStyle/>
-          <a:p>
-            <a:pPr algn="r">
-              <a:spcAft>
-                <a:spcPts val="0"/>
-              </a:spcAft>
-              <a:defRPr sz="680" b="1">
-                <a:solidFill>
-                  <a:srgbClr val="4F6B00"/>
-                </a:solidFill>
-                <a:latin typeface="Inter"/>
-              </a:defRPr>
-            </a:pPr>
-            <a:r>
-              <a:rPr>
-                <a:latin typeface="Inter"/>
-              </a:rPr>
-              <a:t>Illustrative, Gradient Maintained — demo data, not the client's holdings or managers</a:t>
-            </a:r>
-          </a:p>
-        </p:txBody>
-      </p:sp>
-      <p:sp>
-        <p:nvSpPr>
-          <p:cNvPr id="4" name="TextBox 3"/>
-          <p:cNvSpPr txBox="1"/>
-          <p:nvPr/>
-        </p:nvSpPr>
-        <p:spPr>
-          <a:xfrm>
             <a:off x="640080" y="566928"/>
             <a:ext cx="10058400" cy="530352"/>
           </a:xfrm>
@@ -9916,7 +9454,7 @@
       </p:sp>
       <p:sp>
         <p:nvSpPr>
-          <p:cNvPr id="5" name="Rectangle 4"/>
+          <p:cNvPr id="4" name="Rectangle 3"/>
           <p:cNvSpPr/>
           <p:nvPr/>
         </p:nvSpPr>
@@ -9965,7 +9503,7 @@
       </p:sp>
       <p:sp>
         <p:nvSpPr>
-          <p:cNvPr id="6" name="Rectangle 5"/>
+          <p:cNvPr id="5" name="Rectangle 4"/>
           <p:cNvSpPr/>
           <p:nvPr/>
         </p:nvSpPr>
@@ -10014,7 +9552,7 @@
       </p:sp>
       <p:sp>
         <p:nvSpPr>
-          <p:cNvPr id="7" name="TextBox 6"/>
+          <p:cNvPr id="6" name="TextBox 5"/>
           <p:cNvSpPr txBox="1"/>
           <p:nvPr/>
         </p:nvSpPr>
@@ -10056,7 +9594,7 @@
       </p:sp>
       <p:sp>
         <p:nvSpPr>
-          <p:cNvPr id="8" name="Rectangle 7"/>
+          <p:cNvPr id="7" name="Rectangle 6"/>
           <p:cNvSpPr/>
           <p:nvPr/>
         </p:nvSpPr>
@@ -10105,7 +9643,7 @@
       </p:sp>
       <p:sp>
         <p:nvSpPr>
-          <p:cNvPr id="9" name="Rectangle 8"/>
+          <p:cNvPr id="8" name="Rectangle 7"/>
           <p:cNvSpPr/>
           <p:nvPr/>
         </p:nvSpPr>
@@ -10154,7 +9692,7 @@
       </p:sp>
       <p:sp>
         <p:nvSpPr>
-          <p:cNvPr id="10" name="TextBox 9"/>
+          <p:cNvPr id="9" name="TextBox 8"/>
           <p:cNvSpPr txBox="1"/>
           <p:nvPr/>
         </p:nvSpPr>
@@ -10196,7 +9734,7 @@
       </p:sp>
       <p:sp>
         <p:nvSpPr>
-          <p:cNvPr id="11" name="TextBox 10"/>
+          <p:cNvPr id="10" name="TextBox 9"/>
           <p:cNvSpPr txBox="1"/>
           <p:nvPr/>
         </p:nvSpPr>
@@ -10238,7 +9776,7 @@
       </p:sp>
       <p:sp>
         <p:nvSpPr>
-          <p:cNvPr id="12" name="Rectangle 11"/>
+          <p:cNvPr id="11" name="Rectangle 10"/>
           <p:cNvSpPr/>
           <p:nvPr/>
         </p:nvSpPr>
@@ -10287,7 +9825,7 @@
       </p:sp>
       <p:sp>
         <p:nvSpPr>
-          <p:cNvPr id="13" name="Rectangle 12"/>
+          <p:cNvPr id="12" name="Rectangle 11"/>
           <p:cNvSpPr/>
           <p:nvPr/>
         </p:nvSpPr>
@@ -10336,7 +9874,7 @@
       </p:sp>
       <p:sp>
         <p:nvSpPr>
-          <p:cNvPr id="14" name="TextBox 13"/>
+          <p:cNvPr id="13" name="TextBox 12"/>
           <p:cNvSpPr txBox="1"/>
           <p:nvPr/>
         </p:nvSpPr>
@@ -10378,7 +9916,7 @@
       </p:sp>
       <p:sp>
         <p:nvSpPr>
-          <p:cNvPr id="15" name="TextBox 14"/>
+          <p:cNvPr id="14" name="TextBox 13"/>
           <p:cNvSpPr txBox="1"/>
           <p:nvPr/>
         </p:nvSpPr>
@@ -10420,7 +9958,7 @@
       </p:sp>
       <p:sp>
         <p:nvSpPr>
-          <p:cNvPr id="16" name="Rectangle 15"/>
+          <p:cNvPr id="15" name="Rectangle 14"/>
           <p:cNvSpPr/>
           <p:nvPr/>
         </p:nvSpPr>
@@ -10469,7 +10007,7 @@
       </p:sp>
       <p:sp>
         <p:nvSpPr>
-          <p:cNvPr id="17" name="TextBox 16"/>
+          <p:cNvPr id="16" name="TextBox 15"/>
           <p:cNvSpPr txBox="1"/>
           <p:nvPr/>
         </p:nvSpPr>
@@ -10511,7 +10049,7 @@
       </p:sp>
       <p:sp>
         <p:nvSpPr>
-          <p:cNvPr id="18" name="TextBox 17"/>
+          <p:cNvPr id="17" name="TextBox 16"/>
           <p:cNvSpPr txBox="1"/>
           <p:nvPr/>
         </p:nvSpPr>
@@ -10553,7 +10091,7 @@
       </p:sp>
       <p:sp>
         <p:nvSpPr>
-          <p:cNvPr id="19" name="TextBox 18"/>
+          <p:cNvPr id="18" name="TextBox 17"/>
           <p:cNvSpPr txBox="1"/>
           <p:nvPr/>
         </p:nvSpPr>
@@ -10668,48 +10206,6 @@
         </p:nvSpPr>
         <p:spPr>
           <a:xfrm>
-            <a:off x="5897880" y="310896"/>
-            <a:ext cx="4800600" cy="256032"/>
-          </a:xfrm>
-          <a:prstGeom prst="rect">
-            <a:avLst/>
-          </a:prstGeom>
-          <a:noFill/>
-        </p:spPr>
-        <p:txBody>
-          <a:bodyPr wrap="none" lIns="9144" rIns="9144" tIns="9144" bIns="9144" anchor="t">
-            <a:spAutoFit/>
-          </a:bodyPr>
-          <a:lstStyle/>
-          <a:p>
-            <a:pPr algn="r">
-              <a:spcAft>
-                <a:spcPts val="0"/>
-              </a:spcAft>
-              <a:defRPr sz="680" b="1">
-                <a:solidFill>
-                  <a:srgbClr val="4F6B00"/>
-                </a:solidFill>
-                <a:latin typeface="Inter"/>
-              </a:defRPr>
-            </a:pPr>
-            <a:r>
-              <a:rPr>
-                <a:latin typeface="Inter"/>
-              </a:rPr>
-              <a:t>Illustrative, Gradient Maintained — demo data, not the client's holdings or managers</a:t>
-            </a:r>
-          </a:p>
-        </p:txBody>
-      </p:sp>
-      <p:sp>
-        <p:nvSpPr>
-          <p:cNvPr id="4" name="TextBox 3"/>
-          <p:cNvSpPr txBox="1"/>
-          <p:nvPr/>
-        </p:nvSpPr>
-        <p:spPr>
-          <a:xfrm>
             <a:off x="640080" y="566928"/>
             <a:ext cx="10058400" cy="530352"/>
           </a:xfrm>
@@ -10746,7 +10242,7 @@
       </p:sp>
       <p:sp>
         <p:nvSpPr>
-          <p:cNvPr id="5" name="Rectangle 4"/>
+          <p:cNvPr id="4" name="Rectangle 3"/>
           <p:cNvSpPr/>
           <p:nvPr/>
         </p:nvSpPr>
@@ -10795,7 +10291,7 @@
       </p:sp>
       <p:sp>
         <p:nvSpPr>
-          <p:cNvPr id="6" name="Rectangle 5"/>
+          <p:cNvPr id="5" name="Rectangle 4"/>
           <p:cNvSpPr/>
           <p:nvPr/>
         </p:nvSpPr>
@@ -10844,7 +10340,7 @@
       </p:sp>
       <p:sp>
         <p:nvSpPr>
-          <p:cNvPr id="7" name="TextBox 6"/>
+          <p:cNvPr id="6" name="TextBox 5"/>
           <p:cNvSpPr txBox="1"/>
           <p:nvPr/>
         </p:nvSpPr>
@@ -10886,7 +10382,7 @@
       </p:sp>
       <p:sp>
         <p:nvSpPr>
-          <p:cNvPr id="8" name="TextBox 7"/>
+          <p:cNvPr id="7" name="TextBox 6"/>
           <p:cNvSpPr txBox="1"/>
           <p:nvPr/>
         </p:nvSpPr>
@@ -10928,7 +10424,7 @@
       </p:sp>
       <p:graphicFrame>
         <p:nvGraphicFramePr>
-          <p:cNvPr id="9" name="Chart 8"/>
+          <p:cNvPr id="8" name="Chart 7"/>
           <p:cNvGraphicFramePr>
             <a:graphicFrameLocks noGrp="1"/>
           </p:cNvGraphicFramePr>
@@ -10946,7 +10442,7 @@
       </p:graphicFrame>
       <p:sp>
         <p:nvSpPr>
-          <p:cNvPr id="10" name="Rectangle 9"/>
+          <p:cNvPr id="9" name="Rectangle 8"/>
           <p:cNvSpPr/>
           <p:nvPr/>
         </p:nvSpPr>
@@ -10995,7 +10491,7 @@
       </p:sp>
       <p:sp>
         <p:nvSpPr>
-          <p:cNvPr id="11" name="TextBox 10"/>
+          <p:cNvPr id="10" name="TextBox 9"/>
           <p:cNvSpPr txBox="1"/>
           <p:nvPr/>
         </p:nvSpPr>
@@ -11037,7 +10533,7 @@
       </p:sp>
       <p:sp>
         <p:nvSpPr>
-          <p:cNvPr id="12" name="TextBox 11"/>
+          <p:cNvPr id="11" name="TextBox 10"/>
           <p:cNvSpPr txBox="1"/>
           <p:nvPr/>
         </p:nvSpPr>
@@ -11079,7 +10575,7 @@
       </p:sp>
       <p:sp>
         <p:nvSpPr>
-          <p:cNvPr id="13" name="TextBox 12"/>
+          <p:cNvPr id="12" name="TextBox 11"/>
           <p:cNvSpPr txBox="1"/>
           <p:nvPr/>
         </p:nvSpPr>
@@ -11194,48 +10690,6 @@
         </p:nvSpPr>
         <p:spPr>
           <a:xfrm>
-            <a:off x="5897880" y="310896"/>
-            <a:ext cx="4800600" cy="256032"/>
-          </a:xfrm>
-          <a:prstGeom prst="rect">
-            <a:avLst/>
-          </a:prstGeom>
-          <a:noFill/>
-        </p:spPr>
-        <p:txBody>
-          <a:bodyPr wrap="none" lIns="9144" rIns="9144" tIns="9144" bIns="9144" anchor="t">
-            <a:spAutoFit/>
-          </a:bodyPr>
-          <a:lstStyle/>
-          <a:p>
-            <a:pPr algn="r">
-              <a:spcAft>
-                <a:spcPts val="0"/>
-              </a:spcAft>
-              <a:defRPr sz="680" b="1">
-                <a:solidFill>
-                  <a:srgbClr val="4F6B00"/>
-                </a:solidFill>
-                <a:latin typeface="Inter"/>
-              </a:defRPr>
-            </a:pPr>
-            <a:r>
-              <a:rPr>
-                <a:latin typeface="Inter"/>
-              </a:rPr>
-              <a:t>Illustrative, Gradient Maintained — demo data, not the client's holdings or managers</a:t>
-            </a:r>
-          </a:p>
-        </p:txBody>
-      </p:sp>
-      <p:sp>
-        <p:nvSpPr>
-          <p:cNvPr id="4" name="TextBox 3"/>
-          <p:cNvSpPr txBox="1"/>
-          <p:nvPr/>
-        </p:nvSpPr>
-        <p:spPr>
-          <a:xfrm>
             <a:off x="640080" y="566928"/>
             <a:ext cx="10058400" cy="530352"/>
           </a:xfrm>
@@ -11272,7 +10726,7 @@
       </p:sp>
       <p:sp>
         <p:nvSpPr>
-          <p:cNvPr id="5" name="Rectangle 4"/>
+          <p:cNvPr id="4" name="Rectangle 3"/>
           <p:cNvSpPr/>
           <p:nvPr/>
         </p:nvSpPr>
@@ -11321,7 +10775,7 @@
       </p:sp>
       <p:sp>
         <p:nvSpPr>
-          <p:cNvPr id="6" name="Rectangle 5"/>
+          <p:cNvPr id="5" name="Rectangle 4"/>
           <p:cNvSpPr/>
           <p:nvPr/>
         </p:nvSpPr>
@@ -11370,7 +10824,7 @@
       </p:sp>
       <p:sp>
         <p:nvSpPr>
-          <p:cNvPr id="7" name="TextBox 6"/>
+          <p:cNvPr id="6" name="TextBox 5"/>
           <p:cNvSpPr txBox="1"/>
           <p:nvPr/>
         </p:nvSpPr>
@@ -11412,7 +10866,7 @@
       </p:sp>
       <p:sp>
         <p:nvSpPr>
-          <p:cNvPr id="8" name="TextBox 7"/>
+          <p:cNvPr id="7" name="TextBox 6"/>
           <p:cNvSpPr txBox="1"/>
           <p:nvPr/>
         </p:nvSpPr>
@@ -11454,7 +10908,7 @@
       </p:sp>
       <p:graphicFrame>
         <p:nvGraphicFramePr>
-          <p:cNvPr id="9" name="Chart 8"/>
+          <p:cNvPr id="8" name="Chart 7"/>
           <p:cNvGraphicFramePr>
             <a:graphicFrameLocks noGrp="1"/>
           </p:cNvGraphicFramePr>
@@ -11472,7 +10926,7 @@
       </p:graphicFrame>
       <p:sp>
         <p:nvSpPr>
-          <p:cNvPr id="10" name="Rectangle 9"/>
+          <p:cNvPr id="9" name="Rectangle 8"/>
           <p:cNvSpPr/>
           <p:nvPr/>
         </p:nvSpPr>
@@ -11521,7 +10975,7 @@
       </p:sp>
       <p:sp>
         <p:nvSpPr>
-          <p:cNvPr id="11" name="TextBox 10"/>
+          <p:cNvPr id="10" name="TextBox 9"/>
           <p:cNvSpPr txBox="1"/>
           <p:nvPr/>
         </p:nvSpPr>
@@ -11563,7 +11017,7 @@
       </p:sp>
       <p:sp>
         <p:nvSpPr>
-          <p:cNvPr id="12" name="TextBox 11"/>
+          <p:cNvPr id="11" name="TextBox 10"/>
           <p:cNvSpPr txBox="1"/>
           <p:nvPr/>
         </p:nvSpPr>
@@ -11605,7 +11059,7 @@
       </p:sp>
       <p:sp>
         <p:nvSpPr>
-          <p:cNvPr id="13" name="TextBox 12"/>
+          <p:cNvPr id="12" name="TextBox 11"/>
           <p:cNvSpPr txBox="1"/>
           <p:nvPr/>
         </p:nvSpPr>
@@ -11720,48 +11174,6 @@
         </p:nvSpPr>
         <p:spPr>
           <a:xfrm>
-            <a:off x="5897880" y="310896"/>
-            <a:ext cx="4800600" cy="256032"/>
-          </a:xfrm>
-          <a:prstGeom prst="rect">
-            <a:avLst/>
-          </a:prstGeom>
-          <a:noFill/>
-        </p:spPr>
-        <p:txBody>
-          <a:bodyPr wrap="none" lIns="9144" rIns="9144" tIns="9144" bIns="9144" anchor="t">
-            <a:spAutoFit/>
-          </a:bodyPr>
-          <a:lstStyle/>
-          <a:p>
-            <a:pPr algn="r">
-              <a:spcAft>
-                <a:spcPts val="0"/>
-              </a:spcAft>
-              <a:defRPr sz="680" b="1">
-                <a:solidFill>
-                  <a:srgbClr val="4F6B00"/>
-                </a:solidFill>
-                <a:latin typeface="Inter"/>
-              </a:defRPr>
-            </a:pPr>
-            <a:r>
-              <a:rPr>
-                <a:latin typeface="Inter"/>
-              </a:rPr>
-              <a:t>Illustrative, Gradient Maintained — demo data, not the client's holdings or managers</a:t>
-            </a:r>
-          </a:p>
-        </p:txBody>
-      </p:sp>
-      <p:sp>
-        <p:nvSpPr>
-          <p:cNvPr id="4" name="TextBox 3"/>
-          <p:cNvSpPr txBox="1"/>
-          <p:nvPr/>
-        </p:nvSpPr>
-        <p:spPr>
-          <a:xfrm>
             <a:off x="640080" y="566928"/>
             <a:ext cx="10058400" cy="530352"/>
           </a:xfrm>
@@ -11798,7 +11210,7 @@
       </p:sp>
       <p:sp>
         <p:nvSpPr>
-          <p:cNvPr id="5" name="Rectangle 4"/>
+          <p:cNvPr id="4" name="Rectangle 3"/>
           <p:cNvSpPr/>
           <p:nvPr/>
         </p:nvSpPr>
@@ -11847,7 +11259,7 @@
       </p:sp>
       <p:sp>
         <p:nvSpPr>
-          <p:cNvPr id="6" name="Rectangle 5"/>
+          <p:cNvPr id="5" name="Rectangle 4"/>
           <p:cNvSpPr/>
           <p:nvPr/>
         </p:nvSpPr>
@@ -11896,7 +11308,7 @@
       </p:sp>
       <p:sp>
         <p:nvSpPr>
-          <p:cNvPr id="7" name="TextBox 6"/>
+          <p:cNvPr id="6" name="TextBox 5"/>
           <p:cNvSpPr txBox="1"/>
           <p:nvPr/>
         </p:nvSpPr>
@@ -11938,7 +11350,7 @@
       </p:sp>
       <p:sp>
         <p:nvSpPr>
-          <p:cNvPr id="8" name="TextBox 7"/>
+          <p:cNvPr id="7" name="TextBox 6"/>
           <p:cNvSpPr txBox="1"/>
           <p:nvPr/>
         </p:nvSpPr>
@@ -11980,7 +11392,7 @@
       </p:sp>
       <p:graphicFrame>
         <p:nvGraphicFramePr>
-          <p:cNvPr id="9" name="Table 8"/>
+          <p:cNvPr id="8" name="Table 7"/>
           <p:cNvGraphicFramePr>
             <a:graphicFrameLocks noGrp="1"/>
           </p:cNvGraphicFramePr>
@@ -12102,7 +11514,7 @@
                         <a:rPr>
                           <a:latin typeface="Inter"/>
                         </a:rPr>
-                        <a:t>● MEDIUM</a:t>
+                        <a:t>● Medium</a:t>
                       </a:r>
                     </a:p>
                   </a:txBody>
@@ -12185,7 +11597,7 @@
                         <a:rPr>
                           <a:latin typeface="Inter"/>
                         </a:rPr>
-                        <a:t>● MEDIUM</a:t>
+                        <a:t>● Medium</a:t>
                       </a:r>
                     </a:p>
                   </a:txBody>
@@ -12268,7 +11680,7 @@
                         <a:rPr>
                           <a:latin typeface="Inter"/>
                         </a:rPr>
-                        <a:t>● LOW</a:t>
+                        <a:t>● Low</a:t>
                       </a:r>
                     </a:p>
                   </a:txBody>
@@ -12339,7 +11751,7 @@
       </p:graphicFrame>
       <p:sp>
         <p:nvSpPr>
-          <p:cNvPr id="10" name="TextBox 9"/>
+          <p:cNvPr id="9" name="TextBox 8"/>
           <p:cNvSpPr txBox="1"/>
           <p:nvPr/>
         </p:nvSpPr>
@@ -12389,7 +11801,7 @@
       </p:sp>
       <p:sp>
         <p:nvSpPr>
-          <p:cNvPr id="11" name="Rectangle 10"/>
+          <p:cNvPr id="10" name="Rectangle 9"/>
           <p:cNvSpPr/>
           <p:nvPr/>
         </p:nvSpPr>
@@ -12438,7 +11850,7 @@
       </p:sp>
       <p:sp>
         <p:nvSpPr>
-          <p:cNvPr id="12" name="Rectangle 11"/>
+          <p:cNvPr id="11" name="Rectangle 10"/>
           <p:cNvSpPr/>
           <p:nvPr/>
         </p:nvSpPr>
@@ -12487,7 +11899,7 @@
       </p:sp>
       <p:sp>
         <p:nvSpPr>
-          <p:cNvPr id="13" name="TextBox 12"/>
+          <p:cNvPr id="12" name="TextBox 11"/>
           <p:cNvSpPr txBox="1"/>
           <p:nvPr/>
         </p:nvSpPr>
@@ -12529,7 +11941,7 @@
       </p:sp>
       <p:sp>
         <p:nvSpPr>
-          <p:cNvPr id="14" name="TextBox 13"/>
+          <p:cNvPr id="13" name="TextBox 12"/>
           <p:cNvSpPr txBox="1"/>
           <p:nvPr/>
         </p:nvSpPr>
@@ -12571,7 +11983,7 @@
       </p:sp>
       <p:sp>
         <p:nvSpPr>
-          <p:cNvPr id="15" name="Rectangle 14"/>
+          <p:cNvPr id="14" name="Rectangle 13"/>
           <p:cNvSpPr/>
           <p:nvPr/>
         </p:nvSpPr>
@@ -12620,7 +12032,7 @@
       </p:sp>
       <p:sp>
         <p:nvSpPr>
-          <p:cNvPr id="16" name="TextBox 15"/>
+          <p:cNvPr id="15" name="TextBox 14"/>
           <p:cNvSpPr txBox="1"/>
           <p:nvPr/>
         </p:nvSpPr>
@@ -12662,7 +12074,7 @@
       </p:sp>
       <p:sp>
         <p:nvSpPr>
-          <p:cNvPr id="17" name="TextBox 16"/>
+          <p:cNvPr id="16" name="TextBox 15"/>
           <p:cNvSpPr txBox="1"/>
           <p:nvPr/>
         </p:nvSpPr>
@@ -12704,7 +12116,7 @@
       </p:sp>
       <p:sp>
         <p:nvSpPr>
-          <p:cNvPr id="18" name="TextBox 17"/>
+          <p:cNvPr id="17" name="TextBox 16"/>
           <p:cNvSpPr txBox="1"/>
           <p:nvPr/>
         </p:nvSpPr>
@@ -12819,48 +12231,6 @@
         </p:nvSpPr>
         <p:spPr>
           <a:xfrm>
-            <a:off x="5897880" y="310896"/>
-            <a:ext cx="4800600" cy="256032"/>
-          </a:xfrm>
-          <a:prstGeom prst="rect">
-            <a:avLst/>
-          </a:prstGeom>
-          <a:noFill/>
-        </p:spPr>
-        <p:txBody>
-          <a:bodyPr wrap="none" lIns="9144" rIns="9144" tIns="9144" bIns="9144" anchor="t">
-            <a:spAutoFit/>
-          </a:bodyPr>
-          <a:lstStyle/>
-          <a:p>
-            <a:pPr algn="r">
-              <a:spcAft>
-                <a:spcPts val="0"/>
-              </a:spcAft>
-              <a:defRPr sz="680" b="1">
-                <a:solidFill>
-                  <a:srgbClr val="4F6B00"/>
-                </a:solidFill>
-                <a:latin typeface="Inter"/>
-              </a:defRPr>
-            </a:pPr>
-            <a:r>
-              <a:rPr>
-                <a:latin typeface="Inter"/>
-              </a:rPr>
-              <a:t>Illustrative, Gradient Maintained — demo data, not the client's holdings or managers</a:t>
-            </a:r>
-          </a:p>
-        </p:txBody>
-      </p:sp>
-      <p:sp>
-        <p:nvSpPr>
-          <p:cNvPr id="4" name="TextBox 3"/>
-          <p:cNvSpPr txBox="1"/>
-          <p:nvPr/>
-        </p:nvSpPr>
-        <p:spPr>
-          <a:xfrm>
             <a:off x="640080" y="566928"/>
             <a:ext cx="10058400" cy="530352"/>
           </a:xfrm>
@@ -12897,7 +12267,7 @@
       </p:sp>
       <p:sp>
         <p:nvSpPr>
-          <p:cNvPr id="5" name="Rectangle 4"/>
+          <p:cNvPr id="4" name="Rectangle 3"/>
           <p:cNvSpPr/>
           <p:nvPr/>
         </p:nvSpPr>
@@ -12946,7 +12316,7 @@
       </p:sp>
       <p:sp>
         <p:nvSpPr>
-          <p:cNvPr id="6" name="Rectangle 5"/>
+          <p:cNvPr id="5" name="Rectangle 4"/>
           <p:cNvSpPr/>
           <p:nvPr/>
         </p:nvSpPr>
@@ -12995,7 +12365,7 @@
       </p:sp>
       <p:sp>
         <p:nvSpPr>
-          <p:cNvPr id="7" name="TextBox 6"/>
+          <p:cNvPr id="6" name="TextBox 5"/>
           <p:cNvSpPr txBox="1"/>
           <p:nvPr/>
         </p:nvSpPr>
@@ -13037,7 +12407,7 @@
       </p:sp>
       <p:sp>
         <p:nvSpPr>
-          <p:cNvPr id="8" name="Rectangle 7"/>
+          <p:cNvPr id="7" name="Rectangle 6"/>
           <p:cNvSpPr/>
           <p:nvPr/>
         </p:nvSpPr>
@@ -13086,7 +12456,7 @@
       </p:sp>
       <p:sp>
         <p:nvSpPr>
-          <p:cNvPr id="9" name="Rectangle 8"/>
+          <p:cNvPr id="8" name="Rectangle 7"/>
           <p:cNvSpPr/>
           <p:nvPr/>
         </p:nvSpPr>
@@ -13135,7 +12505,7 @@
       </p:sp>
       <p:sp>
         <p:nvSpPr>
-          <p:cNvPr id="10" name="TextBox 9"/>
+          <p:cNvPr id="9" name="TextBox 8"/>
           <p:cNvSpPr txBox="1"/>
           <p:nvPr/>
         </p:nvSpPr>
@@ -13177,7 +12547,7 @@
       </p:sp>
       <p:sp>
         <p:nvSpPr>
-          <p:cNvPr id="11" name="TextBox 10"/>
+          <p:cNvPr id="10" name="TextBox 9"/>
           <p:cNvSpPr txBox="1"/>
           <p:nvPr/>
         </p:nvSpPr>
@@ -13219,7 +12589,7 @@
       </p:sp>
       <p:sp>
         <p:nvSpPr>
-          <p:cNvPr id="12" name="Rectangle 11"/>
+          <p:cNvPr id="11" name="Rectangle 10"/>
           <p:cNvSpPr/>
           <p:nvPr/>
         </p:nvSpPr>
@@ -13268,7 +12638,7 @@
       </p:sp>
       <p:sp>
         <p:nvSpPr>
-          <p:cNvPr id="13" name="TextBox 12"/>
+          <p:cNvPr id="12" name="TextBox 11"/>
           <p:cNvSpPr txBox="1"/>
           <p:nvPr/>
         </p:nvSpPr>
@@ -13310,7 +12680,7 @@
       </p:sp>
       <p:sp>
         <p:nvSpPr>
-          <p:cNvPr id="14" name="TextBox 13"/>
+          <p:cNvPr id="13" name="TextBox 12"/>
           <p:cNvSpPr txBox="1"/>
           <p:nvPr/>
         </p:nvSpPr>
@@ -13352,7 +12722,7 @@
       </p:sp>
       <p:sp>
         <p:nvSpPr>
-          <p:cNvPr id="15" name="TextBox 14"/>
+          <p:cNvPr id="14" name="TextBox 13"/>
           <p:cNvSpPr txBox="1"/>
           <p:nvPr/>
         </p:nvSpPr>
@@ -13467,48 +12837,6 @@
         </p:nvSpPr>
         <p:spPr>
           <a:xfrm>
-            <a:off x="5897880" y="310896"/>
-            <a:ext cx="4800600" cy="256032"/>
-          </a:xfrm>
-          <a:prstGeom prst="rect">
-            <a:avLst/>
-          </a:prstGeom>
-          <a:noFill/>
-        </p:spPr>
-        <p:txBody>
-          <a:bodyPr wrap="none" lIns="9144" rIns="9144" tIns="9144" bIns="9144" anchor="t">
-            <a:spAutoFit/>
-          </a:bodyPr>
-          <a:lstStyle/>
-          <a:p>
-            <a:pPr algn="r">
-              <a:spcAft>
-                <a:spcPts val="0"/>
-              </a:spcAft>
-              <a:defRPr sz="680" b="1">
-                <a:solidFill>
-                  <a:srgbClr val="4F6B00"/>
-                </a:solidFill>
-                <a:latin typeface="Inter"/>
-              </a:defRPr>
-            </a:pPr>
-            <a:r>
-              <a:rPr>
-                <a:latin typeface="Inter"/>
-              </a:rPr>
-              <a:t>Illustrative, Gradient Maintained — demo data, not the client's holdings or managers</a:t>
-            </a:r>
-          </a:p>
-        </p:txBody>
-      </p:sp>
-      <p:sp>
-        <p:nvSpPr>
-          <p:cNvPr id="4" name="TextBox 3"/>
-          <p:cNvSpPr txBox="1"/>
-          <p:nvPr/>
-        </p:nvSpPr>
-        <p:spPr>
-          <a:xfrm>
             <a:off x="640080" y="566928"/>
             <a:ext cx="10058400" cy="530352"/>
           </a:xfrm>
@@ -13545,7 +12873,7 @@
       </p:sp>
       <p:sp>
         <p:nvSpPr>
-          <p:cNvPr id="5" name="Rectangle 4"/>
+          <p:cNvPr id="4" name="Rectangle 3"/>
           <p:cNvSpPr/>
           <p:nvPr/>
         </p:nvSpPr>
@@ -13594,7 +12922,7 @@
       </p:sp>
       <p:sp>
         <p:nvSpPr>
-          <p:cNvPr id="6" name="Rectangle 5"/>
+          <p:cNvPr id="5" name="Rectangle 4"/>
           <p:cNvSpPr/>
           <p:nvPr/>
         </p:nvSpPr>
@@ -13643,7 +12971,7 @@
       </p:sp>
       <p:sp>
         <p:nvSpPr>
-          <p:cNvPr id="7" name="TextBox 6"/>
+          <p:cNvPr id="6" name="TextBox 5"/>
           <p:cNvSpPr txBox="1"/>
           <p:nvPr/>
         </p:nvSpPr>
@@ -13685,7 +13013,7 @@
       </p:sp>
       <p:sp>
         <p:nvSpPr>
-          <p:cNvPr id="8" name="TextBox 7"/>
+          <p:cNvPr id="7" name="TextBox 6"/>
           <p:cNvSpPr txBox="1"/>
           <p:nvPr/>
         </p:nvSpPr>
@@ -13727,7 +13055,7 @@
       </p:sp>
       <p:graphicFrame>
         <p:nvGraphicFramePr>
-          <p:cNvPr id="9" name="Table 8"/>
+          <p:cNvPr id="8" name="Table 7"/>
           <p:cNvGraphicFramePr>
             <a:graphicFrameLocks noGrp="1"/>
           </p:cNvGraphicFramePr>
@@ -14163,7 +13491,7 @@
       </p:graphicFrame>
       <p:sp>
         <p:nvSpPr>
-          <p:cNvPr id="10" name="Rectangle 9"/>
+          <p:cNvPr id="9" name="Rectangle 8"/>
           <p:cNvSpPr/>
           <p:nvPr/>
         </p:nvSpPr>
@@ -14212,7 +13540,7 @@
       </p:sp>
       <p:sp>
         <p:nvSpPr>
-          <p:cNvPr id="11" name="TextBox 10"/>
+          <p:cNvPr id="10" name="TextBox 9"/>
           <p:cNvSpPr txBox="1"/>
           <p:nvPr/>
         </p:nvSpPr>
@@ -14254,7 +13582,7 @@
       </p:sp>
       <p:sp>
         <p:nvSpPr>
-          <p:cNvPr id="12" name="TextBox 11"/>
+          <p:cNvPr id="11" name="TextBox 10"/>
           <p:cNvSpPr txBox="1"/>
           <p:nvPr/>
         </p:nvSpPr>
@@ -14296,7 +13624,7 @@
       </p:sp>
       <p:sp>
         <p:nvSpPr>
-          <p:cNvPr id="13" name="TextBox 12"/>
+          <p:cNvPr id="12" name="TextBox 11"/>
           <p:cNvSpPr txBox="1"/>
           <p:nvPr/>
         </p:nvSpPr>

--- a/plugins/gradient-cio/assets/examples/internal-gips-review-firm.pptx
+++ b/plugins/gradient-cio/assets/examples/internal-gips-review-firm.pptx
@@ -16,9 +16,6 @@
     <ns0:sldId id="264" ns1:id="rId15"/>
     <ns0:sldId id="265" ns1:id="rId16"/>
     <ns0:sldId id="266" ns1:id="rId17"/>
-    <ns0:sldId id="267" ns1:id="rId18"/>
-    <ns0:sldId id="268" ns1:id="rId19"/>
-    <ns0:sldId id="269" ns1:id="rId20"/>
   </ns0:sldIdLst>
   <ns0:sldSz cx="12191695" cy="6858000" type="screen16x9"/>
   <ns0:notesSz cx="6858000" cy="9144000"/>
@@ -1116,71 +1113,7 @@
               <a:t>Observation: One significant event lacks an effective date [S1]. Why it matters: Readers cannot align the event with reported returns. Uncertainty: The date may exist outside the supplied report. What would change the view: Follow-up request 1 producing dated event evidence.</a:t>
             </a:r>
           </a:p>
-        </p:txBody>
-      </p:sp>
-      <p:sp>
-        <p:nvSpPr>
-          <p:cNvPr id="4" name="Slide Number Placeholder 3"/>
-          <p:cNvSpPr>
-            <a:spLocks noGrp="1"/>
-          </p:cNvSpPr>
-          <p:nvPr>
-            <p:ph type="sldNum" idx="5" sz="quarter"/>
-          </p:nvPr>
-        </p:nvSpPr>
-        <p:spPr/>
-      </p:sp>
-    </p:spTree>
-  </p:cSld>
-  <p:clrMapOvr>
-    <a:masterClrMapping/>
-  </p:clrMapOvr>
-</p:notes>
-</file>
-
-<file path=ppt/notesSlides/notesSlide2.xml><?xml version="1.0" encoding="utf-8"?>
-<p:notes xmlns:a="http://schemas.openxmlformats.org/drawingml/2006/main" xmlns:p="http://schemas.openxmlformats.org/presentationml/2006/main" xmlns:r="http://schemas.openxmlformats.org/officeDocument/2006/relationships">
-  <p:cSld>
-    <p:spTree>
-      <p:nvGrpSpPr>
-        <p:cNvPr id="1" name=""/>
-        <p:cNvGrpSpPr/>
-        <p:nvPr/>
-      </p:nvGrpSpPr>
-      <p:grpSpPr>
-        <a:xfrm>
-          <a:off x="0" y="0"/>
-          <a:ext cx="0" cy="0"/>
-          <a:chOff x="0" y="0"/>
-          <a:chExt cx="0" cy="0"/>
-        </a:xfrm>
-      </p:grpSpPr>
-      <p:sp>
-        <p:nvSpPr>
-          <p:cNvPr id="2" name="Slide Image Placeholder 1"/>
-          <p:cNvSpPr>
-            <a:spLocks noGrp="1"/>
-          </p:cNvSpPr>
-          <p:nvPr>
-            <p:ph type="sldImg" idx="2"/>
-          </p:nvPr>
-        </p:nvSpPr>
-        <p:spPr/>
-      </p:sp>
-      <p:sp>
-        <p:nvSpPr>
-          <p:cNvPr id="3" name="Notes Placeholder 2"/>
-          <p:cNvSpPr>
-            <a:spLocks noGrp="1"/>
-          </p:cNvSpPr>
-          <p:nvPr>
-            <p:ph type="body" idx="3" sz="quarter"/>
-          </p:nvPr>
-        </p:nvSpPr>
-        <p:spPr/>
-        <p:txBody>
-          <a:bodyPr/>
-          <a:lstStyle/>
+          <a:p/>
           <a:p>
             <a:r>
               <a:t>Analysis — fee interpretation remains open</a:t>
@@ -4450,7 +4383,7 @@
               <a:rPr>
                 <a:latin typeface="Inter"/>
               </a:rPr>
-              <a:t>Preparer fix list — continued</a:t>
+              <a:t>Appendix — Sources and methods</a:t>
             </a:r>
           </a:p>
         </p:txBody>
@@ -4519,11 +4452,11 @@
             <a:avLst/>
           </a:prstGeom>
           <a:solidFill>
-            <a:srgbClr val="C6F432"/>
+            <a:srgbClr val="9AA5B1"/>
           </a:solidFill>
           <a:ln>
             <a:solidFill>
-              <a:srgbClr val="C6F432"/>
+              <a:srgbClr val="9AA5B1"/>
             </a:solidFill>
           </a:ln>
         </p:spPr>
@@ -4590,7 +4523,7 @@
               <a:rPr>
                 <a:latin typeface="Inter"/>
               </a:rPr>
-              <a:t>03</a:t>
+              <a:t>A</a:t>
             </a:r>
           </a:p>
         </p:txBody>
@@ -4619,11 +4552,11 @@
           <a:p>
             <a:pPr algn="l">
               <a:spcAft>
-                <a:spcPts val="500"/>
+                <a:spcPts val="0"/>
               </a:spcAft>
-              <a:defRPr sz="1050" b="0">
-                <a:solidFill>
-                  <a:srgbClr val="0D1117"/>
+              <a:defRPr sz="1100" b="0">
+                <a:solidFill>
+                  <a:srgbClr val="4A5563"/>
                 </a:solidFill>
                 <a:latin typeface="Inter"/>
               </a:defRPr>
@@ -4632,26 +4565,39 @@
               <a:rPr>
                 <a:latin typeface="Inter"/>
               </a:rPr>
-              <a:t>•  Add the significant event's effective date to the report before the next issue (4.C.19) [S1].</a:t>
-            </a:r>
-          </a:p>
-          <a:p>
-            <a:pPr algn="l">
-              <a:spcAft>
-                <a:spcPts val="500"/>
-              </a:spcAft>
-              <a:defRPr sz="1050" b="0">
-                <a:solidFill>
-                  <a:srgbClr val="0D1117"/>
-                </a:solidFill>
-                <a:latin typeface="Inter"/>
-              </a:defRPr>
-            </a:pPr>
+              <a:t>Illustrative, Gradient Maintained — demo data, not the client's holdings or managers. All organizations,</a:t>
+            </a:r>
+            <a:br/>
+            <a:br/>
             <a:r>
               <a:rPr>
                 <a:latin typeface="Inter"/>
               </a:rPr>
-              <a:t>•  State the complete management and performance fee schedule in the disclosure note (4.C.11) [S2].</a:t>
+              <a:t>portfolios, managers and results in this public example are illustrative.</a:t>
+            </a:r>
+            <a:br/>
+            <a:br/>
+            <a:r>
+              <a:rPr>
+                <a:latin typeface="Inter"/>
+              </a:rPr>
+              <a:t> ·  Tag  ·  Source  ·  Detail  ·  As of  ·  Validation  · </a:t>
+            </a:r>
+            <a:br/>
+            <a:br/>
+            <a:r>
+              <a:rPr>
+                <a:latin typeface="Inter"/>
+              </a:rPr>
+              <a:t> ·  S1  ·  Composite report  ·  Pages 1–4  ·  2025-12-31  ·  Illustrative document  · </a:t>
+            </a:r>
+            <a:br/>
+            <a:br/>
+            <a:r>
+              <a:rPr>
+                <a:latin typeface="Inter"/>
+              </a:rPr>
+              <a:t> ·  S2  ·  Disclosure schedule  ·  Fee and composite notes  ·  2026-03-31  ·  Illustrative document  ·</a:t>
             </a:r>
           </a:p>
         </p:txBody>
@@ -4977,7 +4923,7 @@
               <a:rPr>
                 <a:latin typeface="Inter"/>
               </a:rPr>
-              <a:t>Follow-up requests</a:t>
+              <a:t>Appendix — Method &amp; disclaimer</a:t>
             </a:r>
           </a:p>
         </p:txBody>
@@ -5046,11 +4992,11 @@
             <a:avLst/>
           </a:prstGeom>
           <a:solidFill>
-            <a:srgbClr val="C6F432"/>
+            <a:srgbClr val="9AA5B1"/>
           </a:solidFill>
           <a:ln>
             <a:solidFill>
-              <a:srgbClr val="C6F432"/>
+              <a:srgbClr val="9AA5B1"/>
             </a:solidFill>
           </a:ln>
         </p:spPr>
@@ -5117,7 +5063,7 @@
               <a:rPr>
                 <a:latin typeface="Inter"/>
               </a:rPr>
-              <a:t>04</a:t>
+              <a:t>C</a:t>
             </a:r>
           </a:p>
         </p:txBody>
@@ -5131,7 +5077,7 @@
         <p:spPr>
           <a:xfrm>
             <a:off x="640080" y="1325880"/>
-            <a:ext cx="10908792" cy="2977665"/>
+            <a:ext cx="10908792" cy="4892040"/>
           </a:xfrm>
           <a:prstGeom prst="rect">
             <a:avLst/>
@@ -5146,11 +5092,11 @@
           <a:p>
             <a:pPr algn="l">
               <a:spcAft>
-                <a:spcPts val="500"/>
+                <a:spcPts val="0"/>
               </a:spcAft>
-              <a:defRPr sz="1000" b="0">
-                <a:solidFill>
-                  <a:srgbClr val="0D1117"/>
+              <a:defRPr sz="1100" b="0">
+                <a:solidFill>
+                  <a:srgbClr val="4A5563"/>
                 </a:solidFill>
                 <a:latin typeface="Inter"/>
               </a:defRPr>
@@ -5159,108 +5105,14 @@
               <a:rPr>
                 <a:latin typeface="Inter"/>
               </a:rPr>
-              <a:t>01  Provide the significant-event effective date and approved disclosure text.</a:t>
-            </a:r>
-            <a:br/>
-            <a:r>
-              <a:rPr>
-                <a:latin typeface="Inter"/>
-              </a:rPr>
-              <a:t>      Closes the 4.C.19 gap [S1].</a:t>
-            </a:r>
-          </a:p>
-          <a:p>
-            <a:pPr algn="l">
-              <a:spcAft>
-                <a:spcPts val="500"/>
-              </a:spcAft>
-              <a:defRPr sz="1000" b="0">
-                <a:solidFill>
-                  <a:srgbClr val="0D1117"/>
-                </a:solidFill>
-                <a:latin typeface="Inter"/>
-              </a:defRPr>
-            </a:pPr>
-            <a:r>
-              <a:rPr>
-                <a:latin typeface="Inter"/>
-              </a:rPr>
-              <a:t>02  Provide the complete fee schedule and approved disclosure text.</a:t>
-            </a:r>
-            <a:br/>
-            <a:r>
-              <a:rPr>
-                <a:latin typeface="Inter"/>
-              </a:rPr>
-              <a:t>      Closes the 4.C.11 gap [S2].</a:t>
-            </a:r>
-          </a:p>
-        </p:txBody>
-      </p:sp>
-      <p:sp>
-        <p:nvSpPr>
-          <p:cNvPr id="9" name="TextBox 8"/>
-          <p:cNvSpPr txBox="1"/>
-          <p:nvPr/>
-        </p:nvSpPr>
-        <p:spPr>
-          <a:xfrm>
-            <a:off x="640080" y="4413273"/>
-            <a:ext cx="10908792" cy="1804646"/>
-          </a:xfrm>
-          <a:prstGeom prst="rect">
-            <a:avLst/>
-          </a:prstGeom>
-          <a:noFill/>
-        </p:spPr>
-        <p:txBody>
-          <a:bodyPr wrap="none" lIns="9144" rIns="9144" tIns="9144" bIns="9144" anchor="t">
-            <a:spAutoFit/>
-          </a:bodyPr>
-          <a:lstStyle/>
-          <a:p>
-            <a:pPr algn="l">
-              <a:spcAft>
-                <a:spcPts val="500"/>
-              </a:spcAft>
-              <a:defRPr sz="1050" b="0">
-                <a:solidFill>
-                  <a:srgbClr val="0D1117"/>
-                </a:solidFill>
-                <a:latin typeface="Inter"/>
-              </a:defRPr>
-            </a:pPr>
-            <a:r>
-              <a:rPr>
-                <a:latin typeface="Inter"/>
-              </a:rPr>
-              <a:t>•  Provide the significant-event effective date and the approved disclosure text (4.C.19) [S1].</a:t>
-            </a:r>
-          </a:p>
-          <a:p>
-            <a:pPr algn="l">
-              <a:spcAft>
-                <a:spcPts val="500"/>
-              </a:spcAft>
-              <a:defRPr sz="1050" b="0">
-                <a:solidFill>
-                  <a:srgbClr val="0D1117"/>
-                </a:solidFill>
-                <a:latin typeface="Inter"/>
-              </a:defRPr>
-            </a:pPr>
-            <a:r>
-              <a:rPr>
-                <a:latin typeface="Inter"/>
-              </a:rPr>
-              <a:t>•  Provide the complete fee schedule and approved disclosure text (4.C.11) [S2].</a:t>
-            </a:r>
-          </a:p>
-        </p:txBody>
-      </p:sp>
-      <p:sp>
-        <p:nvSpPr>
-          <p:cNvPr id="10" name="Rectangle 9"/>
+              <a:t>This illustrative review is not verification, certification, legal advice or an assessment of any real product.</a:t>
+            </a:r>
+          </a:p>
+        </p:txBody>
+      </p:sp>
+      <p:sp>
+        <p:nvSpPr>
+          <p:cNvPr id="9" name="Rectangle 8"/>
           <p:cNvSpPr/>
           <p:nvPr/>
         </p:nvSpPr>
@@ -5309,7 +5161,7 @@
       </p:sp>
       <p:sp>
         <p:nvSpPr>
-          <p:cNvPr id="11" name="TextBox 10"/>
+          <p:cNvPr id="10" name="TextBox 9"/>
           <p:cNvSpPr txBox="1"/>
           <p:nvPr/>
         </p:nvSpPr>
@@ -5344,14 +5196,14 @@
               <a:rPr>
                 <a:latin typeface="Inter"/>
               </a:rPr>
-              <a:t>Sources: S1 · S2</a:t>
-            </a:r>
-          </a:p>
-        </p:txBody>
-      </p:sp>
-      <p:sp>
-        <p:nvSpPr>
-          <p:cNvPr id="12" name="TextBox 11"/>
+              <a:t>Sources: none cited</a:t>
+            </a:r>
+          </a:p>
+        </p:txBody>
+      </p:sp>
+      <p:sp>
+        <p:nvSpPr>
+          <p:cNvPr id="11" name="TextBox 10"/>
           <p:cNvSpPr txBox="1"/>
           <p:nvPr/>
         </p:nvSpPr>
@@ -5393,7 +5245,7 @@
       </p:sp>
       <p:sp>
         <p:nvSpPr>
-          <p:cNvPr id="13" name="TextBox 12"/>
+          <p:cNvPr id="12" name="TextBox 11"/>
           <p:cNvSpPr txBox="1"/>
           <p:nvPr/>
         </p:nvSpPr>
@@ -5429,1602 +5281,6 @@
                 <a:latin typeface="Inter"/>
               </a:rPr>
               <a:t>11</a:t>
-            </a:r>
-          </a:p>
-        </p:txBody>
-      </p:sp>
-    </p:spTree>
-  </p:cSld>
-  <p:clrMapOvr>
-    <a:masterClrMapping/>
-  </p:clrMapOvr>
-</p:sld>
-</file>
-
-<file path=ppt/slides/slide12.xml><?xml version="1.0" encoding="utf-8"?>
-<p:sld xmlns:a="http://schemas.openxmlformats.org/drawingml/2006/main" xmlns:p="http://schemas.openxmlformats.org/presentationml/2006/main" xmlns:r="http://schemas.openxmlformats.org/officeDocument/2006/relationships">
-  <p:cSld>
-    <p:spTree>
-      <p:nvGrpSpPr>
-        <p:cNvPr id="1" name=""/>
-        <p:cNvGrpSpPr/>
-        <p:nvPr/>
-      </p:nvGrpSpPr>
-      <p:grpSpPr/>
-      <p:sp>
-        <p:nvSpPr>
-          <p:cNvPr id="2" name="Rectangle 1"/>
-          <p:cNvSpPr/>
-          <p:nvPr/>
-        </p:nvSpPr>
-        <p:spPr>
-          <a:xfrm>
-            <a:off x="0" y="0"/>
-            <a:ext cx="12191695" cy="6858000"/>
-          </a:xfrm>
-          <a:prstGeom prst="rect">
-            <a:avLst/>
-          </a:prstGeom>
-          <a:solidFill>
-            <a:srgbClr val="FFFFFF"/>
-          </a:solidFill>
-          <a:ln>
-            <a:solidFill>
-              <a:srgbClr val="FFFFFF"/>
-            </a:solidFill>
-          </a:ln>
-        </p:spPr>
-        <p:style>
-          <a:lnRef idx="1">
-            <a:schemeClr val="accent1"/>
-          </a:lnRef>
-          <a:fillRef idx="3">
-            <a:schemeClr val="accent1"/>
-          </a:fillRef>
-          <a:effectRef idx="2">
-            <a:schemeClr val="accent1"/>
-          </a:effectRef>
-          <a:fontRef idx="minor">
-            <a:schemeClr val="lt1"/>
-          </a:fontRef>
-        </p:style>
-        <p:txBody>
-          <a:bodyPr rtlCol="0" anchor="ctr"/>
-          <a:lstStyle/>
-          <a:p>
-            <a:pPr algn="ctr">
-              <a:defRPr>
-                <a:latin typeface="Inter"/>
-              </a:defRPr>
-            </a:pPr>
-          </a:p>
-        </p:txBody>
-      </p:sp>
-      <p:sp>
-        <p:nvSpPr>
-          <p:cNvPr id="3" name="TextBox 2"/>
-          <p:cNvSpPr txBox="1"/>
-          <p:nvPr/>
-        </p:nvSpPr>
-        <p:spPr>
-          <a:xfrm>
-            <a:off x="5897880" y="310896"/>
-            <a:ext cx="4800600" cy="256032"/>
-          </a:xfrm>
-          <a:prstGeom prst="rect">
-            <a:avLst/>
-          </a:prstGeom>
-          <a:noFill/>
-        </p:spPr>
-        <p:txBody>
-          <a:bodyPr wrap="none" lIns="9144" rIns="9144" tIns="9144" bIns="9144" anchor="t">
-            <a:spAutoFit/>
-          </a:bodyPr>
-          <a:lstStyle/>
-          <a:p>
-            <a:pPr algn="r">
-              <a:spcAft>
-                <a:spcPts val="0"/>
-              </a:spcAft>
-              <a:defRPr sz="680" b="1">
-                <a:solidFill>
-                  <a:srgbClr val="4F6B00"/>
-                </a:solidFill>
-                <a:latin typeface="Inter"/>
-              </a:defRPr>
-            </a:pPr>
-            <a:r>
-              <a:rPr>
-                <a:latin typeface="Inter"/>
-              </a:rPr>
-              <a:t>Illustrative, Gradient Maintained — demo data, not the client's holdings or managers</a:t>
-            </a:r>
-          </a:p>
-        </p:txBody>
-      </p:sp>
-      <p:sp>
-        <p:nvSpPr>
-          <p:cNvPr id="4" name="TextBox 3"/>
-          <p:cNvSpPr txBox="1"/>
-          <p:nvPr/>
-        </p:nvSpPr>
-        <p:spPr>
-          <a:xfrm>
-            <a:off x="640080" y="566928"/>
-            <a:ext cx="10058400" cy="530352"/>
-          </a:xfrm>
-          <a:prstGeom prst="rect">
-            <a:avLst/>
-          </a:prstGeom>
-          <a:noFill/>
-        </p:spPr>
-        <p:txBody>
-          <a:bodyPr wrap="none" lIns="9144" rIns="9144" tIns="9144" bIns="9144" anchor="t">
-            <a:spAutoFit/>
-          </a:bodyPr>
-          <a:lstStyle/>
-          <a:p>
-            <a:pPr algn="l">
-              <a:spcAft>
-                <a:spcPts val="0"/>
-              </a:spcAft>
-              <a:defRPr sz="2300" b="1">
-                <a:solidFill>
-                  <a:srgbClr val="0D1117"/>
-                </a:solidFill>
-                <a:latin typeface="Inter"/>
-              </a:defRPr>
-            </a:pPr>
-            <a:r>
-              <a:rPr>
-                <a:latin typeface="Inter"/>
-              </a:rPr>
-              <a:t>Appendix — Findings checklist</a:t>
-            </a:r>
-          </a:p>
-        </p:txBody>
-      </p:sp>
-      <p:sp>
-        <p:nvSpPr>
-          <p:cNvPr id="5" name="Rectangle 4"/>
-          <p:cNvSpPr/>
-          <p:nvPr/>
-        </p:nvSpPr>
-        <p:spPr>
-          <a:xfrm>
-            <a:off x="640080" y="1115568"/>
-            <a:ext cx="10908792" cy="18288"/>
-          </a:xfrm>
-          <a:prstGeom prst="rect">
-            <a:avLst/>
-          </a:prstGeom>
-          <a:solidFill>
-            <a:srgbClr val="0D1117"/>
-          </a:solidFill>
-          <a:ln>
-            <a:solidFill>
-              <a:srgbClr val="0D1117"/>
-            </a:solidFill>
-          </a:ln>
-        </p:spPr>
-        <p:style>
-          <a:lnRef idx="1">
-            <a:schemeClr val="accent1"/>
-          </a:lnRef>
-          <a:fillRef idx="3">
-            <a:schemeClr val="accent1"/>
-          </a:fillRef>
-          <a:effectRef idx="2">
-            <a:schemeClr val="accent1"/>
-          </a:effectRef>
-          <a:fontRef idx="minor">
-            <a:schemeClr val="lt1"/>
-          </a:fontRef>
-        </p:style>
-        <p:txBody>
-          <a:bodyPr rtlCol="0" anchor="ctr"/>
-          <a:lstStyle/>
-          <a:p>
-            <a:pPr algn="ctr">
-              <a:defRPr>
-                <a:latin typeface="Inter"/>
-              </a:defRPr>
-            </a:pPr>
-          </a:p>
-        </p:txBody>
-      </p:sp>
-      <p:sp>
-        <p:nvSpPr>
-          <p:cNvPr id="6" name="Rectangle 5"/>
-          <p:cNvSpPr/>
-          <p:nvPr/>
-        </p:nvSpPr>
-        <p:spPr>
-          <a:xfrm>
-            <a:off x="11018520" y="502920"/>
-            <a:ext cx="530352" cy="393192"/>
-          </a:xfrm>
-          <a:prstGeom prst="rect">
-            <a:avLst/>
-          </a:prstGeom>
-          <a:solidFill>
-            <a:srgbClr val="9AA5B1"/>
-          </a:solidFill>
-          <a:ln>
-            <a:solidFill>
-              <a:srgbClr val="9AA5B1"/>
-            </a:solidFill>
-          </a:ln>
-        </p:spPr>
-        <p:style>
-          <a:lnRef idx="1">
-            <a:schemeClr val="accent1"/>
-          </a:lnRef>
-          <a:fillRef idx="3">
-            <a:schemeClr val="accent1"/>
-          </a:fillRef>
-          <a:effectRef idx="2">
-            <a:schemeClr val="accent1"/>
-          </a:effectRef>
-          <a:fontRef idx="minor">
-            <a:schemeClr val="lt1"/>
-          </a:fontRef>
-        </p:style>
-        <p:txBody>
-          <a:bodyPr rtlCol="0" anchor="ctr"/>
-          <a:lstStyle/>
-          <a:p>
-            <a:pPr algn="ctr">
-              <a:defRPr>
-                <a:latin typeface="Inter"/>
-              </a:defRPr>
-            </a:pPr>
-          </a:p>
-        </p:txBody>
-      </p:sp>
-      <p:sp>
-        <p:nvSpPr>
-          <p:cNvPr id="7" name="TextBox 6"/>
-          <p:cNvSpPr txBox="1"/>
-          <p:nvPr/>
-        </p:nvSpPr>
-        <p:spPr>
-          <a:xfrm>
-            <a:off x="11045952" y="557784"/>
-            <a:ext cx="475488" cy="182880"/>
-          </a:xfrm>
-          <a:prstGeom prst="rect">
-            <a:avLst/>
-          </a:prstGeom>
-          <a:noFill/>
-        </p:spPr>
-        <p:txBody>
-          <a:bodyPr wrap="none" lIns="9144" rIns="9144" tIns="9144" bIns="9144" anchor="t">
-            <a:spAutoFit/>
-          </a:bodyPr>
-          <a:lstStyle/>
-          <a:p>
-            <a:pPr algn="ctr">
-              <a:spcAft>
-                <a:spcPts val="0"/>
-              </a:spcAft>
-              <a:defRPr sz="1000" b="1">
-                <a:solidFill>
-                  <a:srgbClr val="0D1117"/>
-                </a:solidFill>
-                <a:latin typeface="Inter"/>
-              </a:defRPr>
-            </a:pPr>
-            <a:r>
-              <a:rPr>
-                <a:latin typeface="Inter"/>
-              </a:rPr>
-              <a:t>B</a:t>
-            </a:r>
-          </a:p>
-        </p:txBody>
-      </p:sp>
-      <p:sp>
-        <p:nvSpPr>
-          <p:cNvPr id="8" name="TextBox 7"/>
-          <p:cNvSpPr txBox="1"/>
-          <p:nvPr/>
-        </p:nvSpPr>
-        <p:spPr>
-          <a:xfrm>
-            <a:off x="640080" y="1325880"/>
-            <a:ext cx="10908792" cy="4892040"/>
-          </a:xfrm>
-          <a:prstGeom prst="rect">
-            <a:avLst/>
-          </a:prstGeom>
-          <a:noFill/>
-        </p:spPr>
-        <p:txBody>
-          <a:bodyPr wrap="none" lIns="9144" rIns="9144" tIns="9144" bIns="9144" anchor="t">
-            <a:spAutoFit/>
-          </a:bodyPr>
-          <a:lstStyle/>
-          <a:p>
-            <a:pPr algn="l">
-              <a:spcAft>
-                <a:spcPts val="0"/>
-              </a:spcAft>
-              <a:defRPr sz="1100" b="0">
-                <a:solidFill>
-                  <a:srgbClr val="4A5563"/>
-                </a:solidFill>
-                <a:latin typeface="Inter"/>
-              </a:defRPr>
-            </a:pPr>
-            <a:r>
-              <a:rPr>
-                <a:latin typeface="Inter"/>
-              </a:rPr>
-              <a:t>·  Area  ·  Requirement  ·  Provision  ·  Status  ·  Evidence  ·  Finding / follow-up  · </a:t>
-            </a:r>
-            <a:br/>
-            <a:br/>
-            <a:r>
-              <a:rPr>
-                <a:latin typeface="Inter"/>
-              </a:rPr>
-              <a:t> ·  Returns  ·  Required annual returns  ·  4.A.1  ·  Met  ·  Report pp.1–2 [S1]  ·  —  · </a:t>
-            </a:r>
-            <a:br/>
-            <a:br/>
-            <a:r>
-              <a:rPr>
-                <a:latin typeface="Inter"/>
-              </a:rPr>
-              <a:t> ·  Benchmark  ·  Benchmark returns  ·  4.A.1  ·  Met  ·  Report pp.1–2 [S1]  ·  —  · </a:t>
-            </a:r>
-            <a:br/>
-            <a:br/>
-            <a:r>
-              <a:rPr>
-                <a:latin typeface="Inter"/>
-              </a:rPr>
-              <a:t> ·  Composite  ·  Composite description  ·  4.C.10  ·  Met  ·  Schedule [S2]  ·  —  · </a:t>
-            </a:r>
-            <a:br/>
-            <a:br/>
-            <a:r>
-              <a:rPr>
-                <a:latin typeface="Inter"/>
-              </a:rPr>
-              <a:t> ·  Fees  ·  Fee disclosure  ·  4.C.11  ·  Partially met  ·  Schedule [S2]  ·  Performance fee unclear  · </a:t>
-            </a:r>
-            <a:br/>
-            <a:br/>
-            <a:r>
-              <a:rPr>
-                <a:latin typeface="Inter"/>
-              </a:rPr>
-              <a:t> ·  Events  ·  Significant-event disclosure  ·  4.C.19  ·  Not met  ·  Report [S1]  ·  Event date absent  ·</a:t>
-            </a:r>
-          </a:p>
-        </p:txBody>
-      </p:sp>
-      <p:sp>
-        <p:nvSpPr>
-          <p:cNvPr id="9" name="Rectangle 8"/>
-          <p:cNvSpPr/>
-          <p:nvPr/>
-        </p:nvSpPr>
-        <p:spPr>
-          <a:xfrm>
-            <a:off x="640080" y="6446520"/>
-            <a:ext cx="10908792" cy="9144"/>
-          </a:xfrm>
-          <a:prstGeom prst="rect">
-            <a:avLst/>
-          </a:prstGeom>
-          <a:solidFill>
-            <a:srgbClr val="E3E7EC"/>
-          </a:solidFill>
-          <a:ln>
-            <a:solidFill>
-              <a:srgbClr val="E3E7EC"/>
-            </a:solidFill>
-          </a:ln>
-        </p:spPr>
-        <p:style>
-          <a:lnRef idx="1">
-            <a:schemeClr val="accent1"/>
-          </a:lnRef>
-          <a:fillRef idx="3">
-            <a:schemeClr val="accent1"/>
-          </a:fillRef>
-          <a:effectRef idx="2">
-            <a:schemeClr val="accent1"/>
-          </a:effectRef>
-          <a:fontRef idx="minor">
-            <a:schemeClr val="lt1"/>
-          </a:fontRef>
-        </p:style>
-        <p:txBody>
-          <a:bodyPr rtlCol="0" anchor="ctr"/>
-          <a:lstStyle/>
-          <a:p>
-            <a:pPr algn="ctr">
-              <a:defRPr>
-                <a:latin typeface="Inter"/>
-              </a:defRPr>
-            </a:pPr>
-          </a:p>
-        </p:txBody>
-      </p:sp>
-      <p:sp>
-        <p:nvSpPr>
-          <p:cNvPr id="10" name="TextBox 9"/>
-          <p:cNvSpPr txBox="1"/>
-          <p:nvPr/>
-        </p:nvSpPr>
-        <p:spPr>
-          <a:xfrm>
-            <a:off x="640080" y="6501384"/>
-            <a:ext cx="4297680" cy="146304"/>
-          </a:xfrm>
-          <a:prstGeom prst="rect">
-            <a:avLst/>
-          </a:prstGeom>
-          <a:noFill/>
-        </p:spPr>
-        <p:txBody>
-          <a:bodyPr wrap="none" lIns="9144" rIns="9144" tIns="9144" bIns="9144" anchor="t">
-            <a:spAutoFit/>
-          </a:bodyPr>
-          <a:lstStyle/>
-          <a:p>
-            <a:pPr algn="l">
-              <a:spcAft>
-                <a:spcPts val="0"/>
-              </a:spcAft>
-              <a:defRPr sz="650" b="0">
-                <a:solidFill>
-                  <a:srgbClr val="8A94A1"/>
-                </a:solidFill>
-                <a:latin typeface="Inter"/>
-              </a:defRPr>
-            </a:pPr>
-            <a:r>
-              <a:rPr>
-                <a:latin typeface="Inter"/>
-              </a:rPr>
-              <a:t>Sources: S1 · S2</a:t>
-            </a:r>
-          </a:p>
-        </p:txBody>
-      </p:sp>
-      <p:sp>
-        <p:nvSpPr>
-          <p:cNvPr id="11" name="TextBox 10"/>
-          <p:cNvSpPr txBox="1"/>
-          <p:nvPr/>
-        </p:nvSpPr>
-        <p:spPr>
-          <a:xfrm>
-            <a:off x="4480560" y="6501384"/>
-            <a:ext cx="5303520" cy="146304"/>
-          </a:xfrm>
-          <a:prstGeom prst="rect">
-            <a:avLst/>
-          </a:prstGeom>
-          <a:noFill/>
-        </p:spPr>
-        <p:txBody>
-          <a:bodyPr wrap="none" lIns="9144" rIns="9144" tIns="9144" bIns="9144" anchor="t">
-            <a:spAutoFit/>
-          </a:bodyPr>
-          <a:lstStyle/>
-          <a:p>
-            <a:pPr algn="ctr">
-              <a:spcAft>
-                <a:spcPts val="0"/>
-              </a:spcAft>
-              <a:defRPr sz="650" b="0">
-                <a:solidFill>
-                  <a:srgbClr val="8A94A1"/>
-                </a:solidFill>
-                <a:latin typeface="Inter"/>
-              </a:defRPr>
-            </a:pPr>
-            <a:r>
-              <a:rPr>
-                <a:latin typeface="Inter"/>
-              </a:rPr>
-              <a:t>Confidential — performance standards review · Data as of 2025-12-31</a:t>
-            </a:r>
-          </a:p>
-        </p:txBody>
-      </p:sp>
-      <p:sp>
-        <p:nvSpPr>
-          <p:cNvPr id="12" name="TextBox 11"/>
-          <p:cNvSpPr txBox="1"/>
-          <p:nvPr/>
-        </p:nvSpPr>
-        <p:spPr>
-          <a:xfrm>
-            <a:off x="10287000" y="6501384"/>
-            <a:ext cx="1261872" cy="146304"/>
-          </a:xfrm>
-          <a:prstGeom prst="rect">
-            <a:avLst/>
-          </a:prstGeom>
-          <a:noFill/>
-        </p:spPr>
-        <p:txBody>
-          <a:bodyPr wrap="none" lIns="9144" rIns="9144" tIns="9144" bIns="9144" anchor="t">
-            <a:spAutoFit/>
-          </a:bodyPr>
-          <a:lstStyle/>
-          <a:p>
-            <a:pPr algn="r">
-              <a:spcAft>
-                <a:spcPts val="0"/>
-              </a:spcAft>
-              <a:defRPr sz="650" b="0">
-                <a:solidFill>
-                  <a:srgbClr val="8A94A1"/>
-                </a:solidFill>
-                <a:latin typeface="Inter"/>
-              </a:defRPr>
-            </a:pPr>
-            <a:r>
-              <a:rPr>
-                <a:latin typeface="Inter"/>
-              </a:rPr>
-              <a:t>12</a:t>
-            </a:r>
-          </a:p>
-        </p:txBody>
-      </p:sp>
-    </p:spTree>
-  </p:cSld>
-  <p:clrMapOvr>
-    <a:masterClrMapping/>
-  </p:clrMapOvr>
-</p:sld>
-</file>
-
-<file path=ppt/slides/slide13.xml><?xml version="1.0" encoding="utf-8"?>
-<p:sld xmlns:a="http://schemas.openxmlformats.org/drawingml/2006/main" xmlns:p="http://schemas.openxmlformats.org/presentationml/2006/main" xmlns:r="http://schemas.openxmlformats.org/officeDocument/2006/relationships">
-  <p:cSld>
-    <p:spTree>
-      <p:nvGrpSpPr>
-        <p:cNvPr id="1" name=""/>
-        <p:cNvGrpSpPr/>
-        <p:nvPr/>
-      </p:nvGrpSpPr>
-      <p:grpSpPr/>
-      <p:sp>
-        <p:nvSpPr>
-          <p:cNvPr id="2" name="Rectangle 1"/>
-          <p:cNvSpPr/>
-          <p:nvPr/>
-        </p:nvSpPr>
-        <p:spPr>
-          <a:xfrm>
-            <a:off x="0" y="0"/>
-            <a:ext cx="12191695" cy="6858000"/>
-          </a:xfrm>
-          <a:prstGeom prst="rect">
-            <a:avLst/>
-          </a:prstGeom>
-          <a:solidFill>
-            <a:srgbClr val="FFFFFF"/>
-          </a:solidFill>
-          <a:ln>
-            <a:solidFill>
-              <a:srgbClr val="FFFFFF"/>
-            </a:solidFill>
-          </a:ln>
-        </p:spPr>
-        <p:style>
-          <a:lnRef idx="1">
-            <a:schemeClr val="accent1"/>
-          </a:lnRef>
-          <a:fillRef idx="3">
-            <a:schemeClr val="accent1"/>
-          </a:fillRef>
-          <a:effectRef idx="2">
-            <a:schemeClr val="accent1"/>
-          </a:effectRef>
-          <a:fontRef idx="minor">
-            <a:schemeClr val="lt1"/>
-          </a:fontRef>
-        </p:style>
-        <p:txBody>
-          <a:bodyPr rtlCol="0" anchor="ctr"/>
-          <a:lstStyle/>
-          <a:p>
-            <a:pPr algn="ctr">
-              <a:defRPr>
-                <a:latin typeface="Inter"/>
-              </a:defRPr>
-            </a:pPr>
-          </a:p>
-        </p:txBody>
-      </p:sp>
-      <p:sp>
-        <p:nvSpPr>
-          <p:cNvPr id="3" name="TextBox 2"/>
-          <p:cNvSpPr txBox="1"/>
-          <p:nvPr/>
-        </p:nvSpPr>
-        <p:spPr>
-          <a:xfrm>
-            <a:off x="5897880" y="310896"/>
-            <a:ext cx="4800600" cy="256032"/>
-          </a:xfrm>
-          <a:prstGeom prst="rect">
-            <a:avLst/>
-          </a:prstGeom>
-          <a:noFill/>
-        </p:spPr>
-        <p:txBody>
-          <a:bodyPr wrap="none" lIns="9144" rIns="9144" tIns="9144" bIns="9144" anchor="t">
-            <a:spAutoFit/>
-          </a:bodyPr>
-          <a:lstStyle/>
-          <a:p>
-            <a:pPr algn="r">
-              <a:spcAft>
-                <a:spcPts val="0"/>
-              </a:spcAft>
-              <a:defRPr sz="680" b="1">
-                <a:solidFill>
-                  <a:srgbClr val="4F6B00"/>
-                </a:solidFill>
-                <a:latin typeface="Inter"/>
-              </a:defRPr>
-            </a:pPr>
-            <a:r>
-              <a:rPr>
-                <a:latin typeface="Inter"/>
-              </a:rPr>
-              <a:t>Illustrative, Gradient Maintained — demo data, not the client's holdings or managers</a:t>
-            </a:r>
-          </a:p>
-        </p:txBody>
-      </p:sp>
-      <p:sp>
-        <p:nvSpPr>
-          <p:cNvPr id="4" name="TextBox 3"/>
-          <p:cNvSpPr txBox="1"/>
-          <p:nvPr/>
-        </p:nvSpPr>
-        <p:spPr>
-          <a:xfrm>
-            <a:off x="640080" y="566928"/>
-            <a:ext cx="10058400" cy="530352"/>
-          </a:xfrm>
-          <a:prstGeom prst="rect">
-            <a:avLst/>
-          </a:prstGeom>
-          <a:noFill/>
-        </p:spPr>
-        <p:txBody>
-          <a:bodyPr wrap="none" lIns="9144" rIns="9144" tIns="9144" bIns="9144" anchor="t">
-            <a:spAutoFit/>
-          </a:bodyPr>
-          <a:lstStyle/>
-          <a:p>
-            <a:pPr algn="l">
-              <a:spcAft>
-                <a:spcPts val="0"/>
-              </a:spcAft>
-              <a:defRPr sz="2300" b="1">
-                <a:solidFill>
-                  <a:srgbClr val="0D1117"/>
-                </a:solidFill>
-                <a:latin typeface="Inter"/>
-              </a:defRPr>
-            </a:pPr>
-            <a:r>
-              <a:rPr>
-                <a:latin typeface="Inter"/>
-              </a:rPr>
-              <a:t>Appendix — Sources and methods</a:t>
-            </a:r>
-          </a:p>
-        </p:txBody>
-      </p:sp>
-      <p:sp>
-        <p:nvSpPr>
-          <p:cNvPr id="5" name="Rectangle 4"/>
-          <p:cNvSpPr/>
-          <p:nvPr/>
-        </p:nvSpPr>
-        <p:spPr>
-          <a:xfrm>
-            <a:off x="640080" y="1115568"/>
-            <a:ext cx="10908792" cy="18288"/>
-          </a:xfrm>
-          <a:prstGeom prst="rect">
-            <a:avLst/>
-          </a:prstGeom>
-          <a:solidFill>
-            <a:srgbClr val="0D1117"/>
-          </a:solidFill>
-          <a:ln>
-            <a:solidFill>
-              <a:srgbClr val="0D1117"/>
-            </a:solidFill>
-          </a:ln>
-        </p:spPr>
-        <p:style>
-          <a:lnRef idx="1">
-            <a:schemeClr val="accent1"/>
-          </a:lnRef>
-          <a:fillRef idx="3">
-            <a:schemeClr val="accent1"/>
-          </a:fillRef>
-          <a:effectRef idx="2">
-            <a:schemeClr val="accent1"/>
-          </a:effectRef>
-          <a:fontRef idx="minor">
-            <a:schemeClr val="lt1"/>
-          </a:fontRef>
-        </p:style>
-        <p:txBody>
-          <a:bodyPr rtlCol="0" anchor="ctr"/>
-          <a:lstStyle/>
-          <a:p>
-            <a:pPr algn="ctr">
-              <a:defRPr>
-                <a:latin typeface="Inter"/>
-              </a:defRPr>
-            </a:pPr>
-          </a:p>
-        </p:txBody>
-      </p:sp>
-      <p:sp>
-        <p:nvSpPr>
-          <p:cNvPr id="6" name="Rectangle 5"/>
-          <p:cNvSpPr/>
-          <p:nvPr/>
-        </p:nvSpPr>
-        <p:spPr>
-          <a:xfrm>
-            <a:off x="11018520" y="502920"/>
-            <a:ext cx="530352" cy="393192"/>
-          </a:xfrm>
-          <a:prstGeom prst="rect">
-            <a:avLst/>
-          </a:prstGeom>
-          <a:solidFill>
-            <a:srgbClr val="9AA5B1"/>
-          </a:solidFill>
-          <a:ln>
-            <a:solidFill>
-              <a:srgbClr val="9AA5B1"/>
-            </a:solidFill>
-          </a:ln>
-        </p:spPr>
-        <p:style>
-          <a:lnRef idx="1">
-            <a:schemeClr val="accent1"/>
-          </a:lnRef>
-          <a:fillRef idx="3">
-            <a:schemeClr val="accent1"/>
-          </a:fillRef>
-          <a:effectRef idx="2">
-            <a:schemeClr val="accent1"/>
-          </a:effectRef>
-          <a:fontRef idx="minor">
-            <a:schemeClr val="lt1"/>
-          </a:fontRef>
-        </p:style>
-        <p:txBody>
-          <a:bodyPr rtlCol="0" anchor="ctr"/>
-          <a:lstStyle/>
-          <a:p>
-            <a:pPr algn="ctr">
-              <a:defRPr>
-                <a:latin typeface="Inter"/>
-              </a:defRPr>
-            </a:pPr>
-          </a:p>
-        </p:txBody>
-      </p:sp>
-      <p:sp>
-        <p:nvSpPr>
-          <p:cNvPr id="7" name="TextBox 6"/>
-          <p:cNvSpPr txBox="1"/>
-          <p:nvPr/>
-        </p:nvSpPr>
-        <p:spPr>
-          <a:xfrm>
-            <a:off x="11045952" y="557784"/>
-            <a:ext cx="475488" cy="182880"/>
-          </a:xfrm>
-          <a:prstGeom prst="rect">
-            <a:avLst/>
-          </a:prstGeom>
-          <a:noFill/>
-        </p:spPr>
-        <p:txBody>
-          <a:bodyPr wrap="none" lIns="9144" rIns="9144" tIns="9144" bIns="9144" anchor="t">
-            <a:spAutoFit/>
-          </a:bodyPr>
-          <a:lstStyle/>
-          <a:p>
-            <a:pPr algn="ctr">
-              <a:spcAft>
-                <a:spcPts val="0"/>
-              </a:spcAft>
-              <a:defRPr sz="1000" b="1">
-                <a:solidFill>
-                  <a:srgbClr val="0D1117"/>
-                </a:solidFill>
-                <a:latin typeface="Inter"/>
-              </a:defRPr>
-            </a:pPr>
-            <a:r>
-              <a:rPr>
-                <a:latin typeface="Inter"/>
-              </a:rPr>
-              <a:t>A</a:t>
-            </a:r>
-          </a:p>
-        </p:txBody>
-      </p:sp>
-      <p:sp>
-        <p:nvSpPr>
-          <p:cNvPr id="8" name="TextBox 7"/>
-          <p:cNvSpPr txBox="1"/>
-          <p:nvPr/>
-        </p:nvSpPr>
-        <p:spPr>
-          <a:xfrm>
-            <a:off x="640080" y="1325880"/>
-            <a:ext cx="10908792" cy="4892040"/>
-          </a:xfrm>
-          <a:prstGeom prst="rect">
-            <a:avLst/>
-          </a:prstGeom>
-          <a:noFill/>
-        </p:spPr>
-        <p:txBody>
-          <a:bodyPr wrap="none" lIns="9144" rIns="9144" tIns="9144" bIns="9144" anchor="t">
-            <a:spAutoFit/>
-          </a:bodyPr>
-          <a:lstStyle/>
-          <a:p>
-            <a:pPr algn="l">
-              <a:spcAft>
-                <a:spcPts val="0"/>
-              </a:spcAft>
-              <a:defRPr sz="1100" b="0">
-                <a:solidFill>
-                  <a:srgbClr val="4A5563"/>
-                </a:solidFill>
-                <a:latin typeface="Inter"/>
-              </a:defRPr>
-            </a:pPr>
-            <a:r>
-              <a:rPr>
-                <a:latin typeface="Inter"/>
-              </a:rPr>
-              <a:t>Illustrative, Gradient Maintained — demo data, not the client's holdings or managers. All organizations,</a:t>
-            </a:r>
-            <a:br/>
-            <a:br/>
-            <a:r>
-              <a:rPr>
-                <a:latin typeface="Inter"/>
-              </a:rPr>
-              <a:t>portfolios, managers and results in this public example are illustrative.</a:t>
-            </a:r>
-            <a:br/>
-            <a:br/>
-            <a:r>
-              <a:rPr>
-                <a:latin typeface="Inter"/>
-              </a:rPr>
-              <a:t> ·  Tag  ·  Source  ·  Detail  ·  As of  ·  Validation  · </a:t>
-            </a:r>
-            <a:br/>
-            <a:br/>
-            <a:r>
-              <a:rPr>
-                <a:latin typeface="Inter"/>
-              </a:rPr>
-              <a:t> ·  S1  ·  Composite report  ·  Pages 1–4  ·  2025-12-31  ·  Illustrative document  · </a:t>
-            </a:r>
-            <a:br/>
-            <a:br/>
-            <a:r>
-              <a:rPr>
-                <a:latin typeface="Inter"/>
-              </a:rPr>
-              <a:t> ·  S2  ·  Disclosure schedule  ·  Fee and composite notes  ·  2026-03-31  ·  Illustrative document  ·</a:t>
-            </a:r>
-          </a:p>
-        </p:txBody>
-      </p:sp>
-      <p:sp>
-        <p:nvSpPr>
-          <p:cNvPr id="9" name="Rectangle 8"/>
-          <p:cNvSpPr/>
-          <p:nvPr/>
-        </p:nvSpPr>
-        <p:spPr>
-          <a:xfrm>
-            <a:off x="640080" y="6446520"/>
-            <a:ext cx="10908792" cy="9144"/>
-          </a:xfrm>
-          <a:prstGeom prst="rect">
-            <a:avLst/>
-          </a:prstGeom>
-          <a:solidFill>
-            <a:srgbClr val="E3E7EC"/>
-          </a:solidFill>
-          <a:ln>
-            <a:solidFill>
-              <a:srgbClr val="E3E7EC"/>
-            </a:solidFill>
-          </a:ln>
-        </p:spPr>
-        <p:style>
-          <a:lnRef idx="1">
-            <a:schemeClr val="accent1"/>
-          </a:lnRef>
-          <a:fillRef idx="3">
-            <a:schemeClr val="accent1"/>
-          </a:fillRef>
-          <a:effectRef idx="2">
-            <a:schemeClr val="accent1"/>
-          </a:effectRef>
-          <a:fontRef idx="minor">
-            <a:schemeClr val="lt1"/>
-          </a:fontRef>
-        </p:style>
-        <p:txBody>
-          <a:bodyPr rtlCol="0" anchor="ctr"/>
-          <a:lstStyle/>
-          <a:p>
-            <a:pPr algn="ctr">
-              <a:defRPr>
-                <a:latin typeface="Inter"/>
-              </a:defRPr>
-            </a:pPr>
-          </a:p>
-        </p:txBody>
-      </p:sp>
-      <p:sp>
-        <p:nvSpPr>
-          <p:cNvPr id="10" name="TextBox 9"/>
-          <p:cNvSpPr txBox="1"/>
-          <p:nvPr/>
-        </p:nvSpPr>
-        <p:spPr>
-          <a:xfrm>
-            <a:off x="640080" y="6501384"/>
-            <a:ext cx="4297680" cy="146304"/>
-          </a:xfrm>
-          <a:prstGeom prst="rect">
-            <a:avLst/>
-          </a:prstGeom>
-          <a:noFill/>
-        </p:spPr>
-        <p:txBody>
-          <a:bodyPr wrap="none" lIns="9144" rIns="9144" tIns="9144" bIns="9144" anchor="t">
-            <a:spAutoFit/>
-          </a:bodyPr>
-          <a:lstStyle/>
-          <a:p>
-            <a:pPr algn="l">
-              <a:spcAft>
-                <a:spcPts val="0"/>
-              </a:spcAft>
-              <a:defRPr sz="650" b="0">
-                <a:solidFill>
-                  <a:srgbClr val="8A94A1"/>
-                </a:solidFill>
-                <a:latin typeface="Inter"/>
-              </a:defRPr>
-            </a:pPr>
-            <a:r>
-              <a:rPr>
-                <a:latin typeface="Inter"/>
-              </a:rPr>
-              <a:t>Sources: S1 · S2</a:t>
-            </a:r>
-          </a:p>
-        </p:txBody>
-      </p:sp>
-      <p:sp>
-        <p:nvSpPr>
-          <p:cNvPr id="11" name="TextBox 10"/>
-          <p:cNvSpPr txBox="1"/>
-          <p:nvPr/>
-        </p:nvSpPr>
-        <p:spPr>
-          <a:xfrm>
-            <a:off x="4480560" y="6501384"/>
-            <a:ext cx="5303520" cy="146304"/>
-          </a:xfrm>
-          <a:prstGeom prst="rect">
-            <a:avLst/>
-          </a:prstGeom>
-          <a:noFill/>
-        </p:spPr>
-        <p:txBody>
-          <a:bodyPr wrap="none" lIns="9144" rIns="9144" tIns="9144" bIns="9144" anchor="t">
-            <a:spAutoFit/>
-          </a:bodyPr>
-          <a:lstStyle/>
-          <a:p>
-            <a:pPr algn="ctr">
-              <a:spcAft>
-                <a:spcPts val="0"/>
-              </a:spcAft>
-              <a:defRPr sz="650" b="0">
-                <a:solidFill>
-                  <a:srgbClr val="8A94A1"/>
-                </a:solidFill>
-                <a:latin typeface="Inter"/>
-              </a:defRPr>
-            </a:pPr>
-            <a:r>
-              <a:rPr>
-                <a:latin typeface="Inter"/>
-              </a:rPr>
-              <a:t>Confidential — performance standards review · Data as of 2025-12-31</a:t>
-            </a:r>
-          </a:p>
-        </p:txBody>
-      </p:sp>
-      <p:sp>
-        <p:nvSpPr>
-          <p:cNvPr id="12" name="TextBox 11"/>
-          <p:cNvSpPr txBox="1"/>
-          <p:nvPr/>
-        </p:nvSpPr>
-        <p:spPr>
-          <a:xfrm>
-            <a:off x="10287000" y="6501384"/>
-            <a:ext cx="1261872" cy="146304"/>
-          </a:xfrm>
-          <a:prstGeom prst="rect">
-            <a:avLst/>
-          </a:prstGeom>
-          <a:noFill/>
-        </p:spPr>
-        <p:txBody>
-          <a:bodyPr wrap="none" lIns="9144" rIns="9144" tIns="9144" bIns="9144" anchor="t">
-            <a:spAutoFit/>
-          </a:bodyPr>
-          <a:lstStyle/>
-          <a:p>
-            <a:pPr algn="r">
-              <a:spcAft>
-                <a:spcPts val="0"/>
-              </a:spcAft>
-              <a:defRPr sz="650" b="0">
-                <a:solidFill>
-                  <a:srgbClr val="8A94A1"/>
-                </a:solidFill>
-                <a:latin typeface="Inter"/>
-              </a:defRPr>
-            </a:pPr>
-            <a:r>
-              <a:rPr>
-                <a:latin typeface="Inter"/>
-              </a:rPr>
-              <a:t>13</a:t>
-            </a:r>
-          </a:p>
-        </p:txBody>
-      </p:sp>
-    </p:spTree>
-  </p:cSld>
-  <p:clrMapOvr>
-    <a:masterClrMapping/>
-  </p:clrMapOvr>
-</p:sld>
-</file>
-
-<file path=ppt/slides/slide14.xml><?xml version="1.0" encoding="utf-8"?>
-<p:sld xmlns:a="http://schemas.openxmlformats.org/drawingml/2006/main" xmlns:p="http://schemas.openxmlformats.org/presentationml/2006/main" xmlns:r="http://schemas.openxmlformats.org/officeDocument/2006/relationships">
-  <p:cSld>
-    <p:spTree>
-      <p:nvGrpSpPr>
-        <p:cNvPr id="1" name=""/>
-        <p:cNvGrpSpPr/>
-        <p:nvPr/>
-      </p:nvGrpSpPr>
-      <p:grpSpPr/>
-      <p:sp>
-        <p:nvSpPr>
-          <p:cNvPr id="2" name="Rectangle 1"/>
-          <p:cNvSpPr/>
-          <p:nvPr/>
-        </p:nvSpPr>
-        <p:spPr>
-          <a:xfrm>
-            <a:off x="0" y="0"/>
-            <a:ext cx="12191695" cy="6858000"/>
-          </a:xfrm>
-          <a:prstGeom prst="rect">
-            <a:avLst/>
-          </a:prstGeom>
-          <a:solidFill>
-            <a:srgbClr val="FFFFFF"/>
-          </a:solidFill>
-          <a:ln>
-            <a:solidFill>
-              <a:srgbClr val="FFFFFF"/>
-            </a:solidFill>
-          </a:ln>
-        </p:spPr>
-        <p:style>
-          <a:lnRef idx="1">
-            <a:schemeClr val="accent1"/>
-          </a:lnRef>
-          <a:fillRef idx="3">
-            <a:schemeClr val="accent1"/>
-          </a:fillRef>
-          <a:effectRef idx="2">
-            <a:schemeClr val="accent1"/>
-          </a:effectRef>
-          <a:fontRef idx="minor">
-            <a:schemeClr val="lt1"/>
-          </a:fontRef>
-        </p:style>
-        <p:txBody>
-          <a:bodyPr rtlCol="0" anchor="ctr"/>
-          <a:lstStyle/>
-          <a:p>
-            <a:pPr algn="ctr">
-              <a:defRPr>
-                <a:latin typeface="Inter"/>
-              </a:defRPr>
-            </a:pPr>
-          </a:p>
-        </p:txBody>
-      </p:sp>
-      <p:sp>
-        <p:nvSpPr>
-          <p:cNvPr id="3" name="TextBox 2"/>
-          <p:cNvSpPr txBox="1"/>
-          <p:nvPr/>
-        </p:nvSpPr>
-        <p:spPr>
-          <a:xfrm>
-            <a:off x="5897880" y="310896"/>
-            <a:ext cx="4800600" cy="256032"/>
-          </a:xfrm>
-          <a:prstGeom prst="rect">
-            <a:avLst/>
-          </a:prstGeom>
-          <a:noFill/>
-        </p:spPr>
-        <p:txBody>
-          <a:bodyPr wrap="none" lIns="9144" rIns="9144" tIns="9144" bIns="9144" anchor="t">
-            <a:spAutoFit/>
-          </a:bodyPr>
-          <a:lstStyle/>
-          <a:p>
-            <a:pPr algn="r">
-              <a:spcAft>
-                <a:spcPts val="0"/>
-              </a:spcAft>
-              <a:defRPr sz="680" b="1">
-                <a:solidFill>
-                  <a:srgbClr val="4F6B00"/>
-                </a:solidFill>
-                <a:latin typeface="Inter"/>
-              </a:defRPr>
-            </a:pPr>
-            <a:r>
-              <a:rPr>
-                <a:latin typeface="Inter"/>
-              </a:rPr>
-              <a:t>Illustrative, Gradient Maintained — demo data, not the client's holdings or managers</a:t>
-            </a:r>
-          </a:p>
-        </p:txBody>
-      </p:sp>
-      <p:sp>
-        <p:nvSpPr>
-          <p:cNvPr id="4" name="TextBox 3"/>
-          <p:cNvSpPr txBox="1"/>
-          <p:nvPr/>
-        </p:nvSpPr>
-        <p:spPr>
-          <a:xfrm>
-            <a:off x="640080" y="566928"/>
-            <a:ext cx="10058400" cy="530352"/>
-          </a:xfrm>
-          <a:prstGeom prst="rect">
-            <a:avLst/>
-          </a:prstGeom>
-          <a:noFill/>
-        </p:spPr>
-        <p:txBody>
-          <a:bodyPr wrap="none" lIns="9144" rIns="9144" tIns="9144" bIns="9144" anchor="t">
-            <a:spAutoFit/>
-          </a:bodyPr>
-          <a:lstStyle/>
-          <a:p>
-            <a:pPr algn="l">
-              <a:spcAft>
-                <a:spcPts val="0"/>
-              </a:spcAft>
-              <a:defRPr sz="2300" b="1">
-                <a:solidFill>
-                  <a:srgbClr val="0D1117"/>
-                </a:solidFill>
-                <a:latin typeface="Inter"/>
-              </a:defRPr>
-            </a:pPr>
-            <a:r>
-              <a:rPr>
-                <a:latin typeface="Inter"/>
-              </a:rPr>
-              <a:t>Appendix — Method &amp; disclaimer</a:t>
-            </a:r>
-          </a:p>
-        </p:txBody>
-      </p:sp>
-      <p:sp>
-        <p:nvSpPr>
-          <p:cNvPr id="5" name="Rectangle 4"/>
-          <p:cNvSpPr/>
-          <p:nvPr/>
-        </p:nvSpPr>
-        <p:spPr>
-          <a:xfrm>
-            <a:off x="640080" y="1115568"/>
-            <a:ext cx="10908792" cy="18288"/>
-          </a:xfrm>
-          <a:prstGeom prst="rect">
-            <a:avLst/>
-          </a:prstGeom>
-          <a:solidFill>
-            <a:srgbClr val="0D1117"/>
-          </a:solidFill>
-          <a:ln>
-            <a:solidFill>
-              <a:srgbClr val="0D1117"/>
-            </a:solidFill>
-          </a:ln>
-        </p:spPr>
-        <p:style>
-          <a:lnRef idx="1">
-            <a:schemeClr val="accent1"/>
-          </a:lnRef>
-          <a:fillRef idx="3">
-            <a:schemeClr val="accent1"/>
-          </a:fillRef>
-          <a:effectRef idx="2">
-            <a:schemeClr val="accent1"/>
-          </a:effectRef>
-          <a:fontRef idx="minor">
-            <a:schemeClr val="lt1"/>
-          </a:fontRef>
-        </p:style>
-        <p:txBody>
-          <a:bodyPr rtlCol="0" anchor="ctr"/>
-          <a:lstStyle/>
-          <a:p>
-            <a:pPr algn="ctr">
-              <a:defRPr>
-                <a:latin typeface="Inter"/>
-              </a:defRPr>
-            </a:pPr>
-          </a:p>
-        </p:txBody>
-      </p:sp>
-      <p:sp>
-        <p:nvSpPr>
-          <p:cNvPr id="6" name="Rectangle 5"/>
-          <p:cNvSpPr/>
-          <p:nvPr/>
-        </p:nvSpPr>
-        <p:spPr>
-          <a:xfrm>
-            <a:off x="11018520" y="502920"/>
-            <a:ext cx="530352" cy="393192"/>
-          </a:xfrm>
-          <a:prstGeom prst="rect">
-            <a:avLst/>
-          </a:prstGeom>
-          <a:solidFill>
-            <a:srgbClr val="9AA5B1"/>
-          </a:solidFill>
-          <a:ln>
-            <a:solidFill>
-              <a:srgbClr val="9AA5B1"/>
-            </a:solidFill>
-          </a:ln>
-        </p:spPr>
-        <p:style>
-          <a:lnRef idx="1">
-            <a:schemeClr val="accent1"/>
-          </a:lnRef>
-          <a:fillRef idx="3">
-            <a:schemeClr val="accent1"/>
-          </a:fillRef>
-          <a:effectRef idx="2">
-            <a:schemeClr val="accent1"/>
-          </a:effectRef>
-          <a:fontRef idx="minor">
-            <a:schemeClr val="lt1"/>
-          </a:fontRef>
-        </p:style>
-        <p:txBody>
-          <a:bodyPr rtlCol="0" anchor="ctr"/>
-          <a:lstStyle/>
-          <a:p>
-            <a:pPr algn="ctr">
-              <a:defRPr>
-                <a:latin typeface="Inter"/>
-              </a:defRPr>
-            </a:pPr>
-          </a:p>
-        </p:txBody>
-      </p:sp>
-      <p:sp>
-        <p:nvSpPr>
-          <p:cNvPr id="7" name="TextBox 6"/>
-          <p:cNvSpPr txBox="1"/>
-          <p:nvPr/>
-        </p:nvSpPr>
-        <p:spPr>
-          <a:xfrm>
-            <a:off x="11045952" y="557784"/>
-            <a:ext cx="475488" cy="182880"/>
-          </a:xfrm>
-          <a:prstGeom prst="rect">
-            <a:avLst/>
-          </a:prstGeom>
-          <a:noFill/>
-        </p:spPr>
-        <p:txBody>
-          <a:bodyPr wrap="none" lIns="9144" rIns="9144" tIns="9144" bIns="9144" anchor="t">
-            <a:spAutoFit/>
-          </a:bodyPr>
-          <a:lstStyle/>
-          <a:p>
-            <a:pPr algn="ctr">
-              <a:spcAft>
-                <a:spcPts val="0"/>
-              </a:spcAft>
-              <a:defRPr sz="1000" b="1">
-                <a:solidFill>
-                  <a:srgbClr val="0D1117"/>
-                </a:solidFill>
-                <a:latin typeface="Inter"/>
-              </a:defRPr>
-            </a:pPr>
-            <a:r>
-              <a:rPr>
-                <a:latin typeface="Inter"/>
-              </a:rPr>
-              <a:t>C</a:t>
-            </a:r>
-          </a:p>
-        </p:txBody>
-      </p:sp>
-      <p:sp>
-        <p:nvSpPr>
-          <p:cNvPr id="8" name="TextBox 7"/>
-          <p:cNvSpPr txBox="1"/>
-          <p:nvPr/>
-        </p:nvSpPr>
-        <p:spPr>
-          <a:xfrm>
-            <a:off x="640080" y="1325880"/>
-            <a:ext cx="10908792" cy="4892040"/>
-          </a:xfrm>
-          <a:prstGeom prst="rect">
-            <a:avLst/>
-          </a:prstGeom>
-          <a:noFill/>
-        </p:spPr>
-        <p:txBody>
-          <a:bodyPr wrap="none" lIns="9144" rIns="9144" tIns="9144" bIns="9144" anchor="t">
-            <a:spAutoFit/>
-          </a:bodyPr>
-          <a:lstStyle/>
-          <a:p>
-            <a:pPr algn="l">
-              <a:spcAft>
-                <a:spcPts val="0"/>
-              </a:spcAft>
-              <a:defRPr sz="1100" b="0">
-                <a:solidFill>
-                  <a:srgbClr val="4A5563"/>
-                </a:solidFill>
-                <a:latin typeface="Inter"/>
-              </a:defRPr>
-            </a:pPr>
-            <a:r>
-              <a:rPr>
-                <a:latin typeface="Inter"/>
-              </a:rPr>
-              <a:t>This illustrative review is not verification, certification, legal advice or an assessment of any real product.</a:t>
-            </a:r>
-          </a:p>
-        </p:txBody>
-      </p:sp>
-      <p:sp>
-        <p:nvSpPr>
-          <p:cNvPr id="9" name="Rectangle 8"/>
-          <p:cNvSpPr/>
-          <p:nvPr/>
-        </p:nvSpPr>
-        <p:spPr>
-          <a:xfrm>
-            <a:off x="640080" y="6446520"/>
-            <a:ext cx="10908792" cy="9144"/>
-          </a:xfrm>
-          <a:prstGeom prst="rect">
-            <a:avLst/>
-          </a:prstGeom>
-          <a:solidFill>
-            <a:srgbClr val="E3E7EC"/>
-          </a:solidFill>
-          <a:ln>
-            <a:solidFill>
-              <a:srgbClr val="E3E7EC"/>
-            </a:solidFill>
-          </a:ln>
-        </p:spPr>
-        <p:style>
-          <a:lnRef idx="1">
-            <a:schemeClr val="accent1"/>
-          </a:lnRef>
-          <a:fillRef idx="3">
-            <a:schemeClr val="accent1"/>
-          </a:fillRef>
-          <a:effectRef idx="2">
-            <a:schemeClr val="accent1"/>
-          </a:effectRef>
-          <a:fontRef idx="minor">
-            <a:schemeClr val="lt1"/>
-          </a:fontRef>
-        </p:style>
-        <p:txBody>
-          <a:bodyPr rtlCol="0" anchor="ctr"/>
-          <a:lstStyle/>
-          <a:p>
-            <a:pPr algn="ctr">
-              <a:defRPr>
-                <a:latin typeface="Inter"/>
-              </a:defRPr>
-            </a:pPr>
-          </a:p>
-        </p:txBody>
-      </p:sp>
-      <p:sp>
-        <p:nvSpPr>
-          <p:cNvPr id="10" name="TextBox 9"/>
-          <p:cNvSpPr txBox="1"/>
-          <p:nvPr/>
-        </p:nvSpPr>
-        <p:spPr>
-          <a:xfrm>
-            <a:off x="640080" y="6501384"/>
-            <a:ext cx="4297680" cy="146304"/>
-          </a:xfrm>
-          <a:prstGeom prst="rect">
-            <a:avLst/>
-          </a:prstGeom>
-          <a:noFill/>
-        </p:spPr>
-        <p:txBody>
-          <a:bodyPr wrap="none" lIns="9144" rIns="9144" tIns="9144" bIns="9144" anchor="t">
-            <a:spAutoFit/>
-          </a:bodyPr>
-          <a:lstStyle/>
-          <a:p>
-            <a:pPr algn="l">
-              <a:spcAft>
-                <a:spcPts val="0"/>
-              </a:spcAft>
-              <a:defRPr sz="650" b="0">
-                <a:solidFill>
-                  <a:srgbClr val="8A94A1"/>
-                </a:solidFill>
-                <a:latin typeface="Inter"/>
-              </a:defRPr>
-            </a:pPr>
-            <a:r>
-              <a:rPr>
-                <a:latin typeface="Inter"/>
-              </a:rPr>
-              <a:t>Sources: none cited</a:t>
-            </a:r>
-          </a:p>
-        </p:txBody>
-      </p:sp>
-      <p:sp>
-        <p:nvSpPr>
-          <p:cNvPr id="11" name="TextBox 10"/>
-          <p:cNvSpPr txBox="1"/>
-          <p:nvPr/>
-        </p:nvSpPr>
-        <p:spPr>
-          <a:xfrm>
-            <a:off x="4480560" y="6501384"/>
-            <a:ext cx="5303520" cy="146304"/>
-          </a:xfrm>
-          <a:prstGeom prst="rect">
-            <a:avLst/>
-          </a:prstGeom>
-          <a:noFill/>
-        </p:spPr>
-        <p:txBody>
-          <a:bodyPr wrap="none" lIns="9144" rIns="9144" tIns="9144" bIns="9144" anchor="t">
-            <a:spAutoFit/>
-          </a:bodyPr>
-          <a:lstStyle/>
-          <a:p>
-            <a:pPr algn="ctr">
-              <a:spcAft>
-                <a:spcPts val="0"/>
-              </a:spcAft>
-              <a:defRPr sz="650" b="0">
-                <a:solidFill>
-                  <a:srgbClr val="8A94A1"/>
-                </a:solidFill>
-                <a:latin typeface="Inter"/>
-              </a:defRPr>
-            </a:pPr>
-            <a:r>
-              <a:rPr>
-                <a:latin typeface="Inter"/>
-              </a:rPr>
-              <a:t>Confidential — performance standards review · Data as of 2025-12-31</a:t>
-            </a:r>
-          </a:p>
-        </p:txBody>
-      </p:sp>
-      <p:sp>
-        <p:nvSpPr>
-          <p:cNvPr id="12" name="TextBox 11"/>
-          <p:cNvSpPr txBox="1"/>
-          <p:nvPr/>
-        </p:nvSpPr>
-        <p:spPr>
-          <a:xfrm>
-            <a:off x="10287000" y="6501384"/>
-            <a:ext cx="1261872" cy="146304"/>
-          </a:xfrm>
-          <a:prstGeom prst="rect">
-            <a:avLst/>
-          </a:prstGeom>
-          <a:noFill/>
-        </p:spPr>
-        <p:txBody>
-          <a:bodyPr wrap="none" lIns="9144" rIns="9144" tIns="9144" bIns="9144" anchor="t">
-            <a:spAutoFit/>
-          </a:bodyPr>
-          <a:lstStyle/>
-          <a:p>
-            <a:pPr algn="r">
-              <a:spcAft>
-                <a:spcPts val="0"/>
-              </a:spcAft>
-              <a:defRPr sz="650" b="0">
-                <a:solidFill>
-                  <a:srgbClr val="8A94A1"/>
-                </a:solidFill>
-                <a:latin typeface="Inter"/>
-              </a:defRPr>
-            </a:pPr>
-            <a:r>
-              <a:rPr>
-                <a:latin typeface="Inter"/>
-              </a:rPr>
-              <a:t>14</a:t>
             </a:r>
           </a:p>
         </p:txBody>
@@ -7329,7 +5585,7 @@
         <p:spPr>
           <a:xfrm>
             <a:off x="640080" y="1325880"/>
-            <a:ext cx="10908792" cy="1866268"/>
+            <a:ext cx="10908792" cy="1793366"/>
           </a:xfrm>
           <a:prstGeom prst="rect">
             <a:avLst/>
@@ -7378,7 +5634,7 @@
         <p:spPr>
           <a:xfrm>
             <a:off x="640080" y="1325880"/>
-            <a:ext cx="54864" cy="1866268"/>
+            <a:ext cx="54864" cy="1793366"/>
           </a:xfrm>
           <a:prstGeom prst="rect">
             <a:avLst/>
@@ -7469,7 +5725,7 @@
         <p:spPr>
           <a:xfrm>
             <a:off x="804671" y="1719072"/>
-            <a:ext cx="10616184" cy="1381636"/>
+            <a:ext cx="10616184" cy="1308734"/>
           </a:xfrm>
           <a:prstGeom prst="rect">
             <a:avLst/>
@@ -7510,8 +5766,8 @@
         </p:nvSpPr>
         <p:spPr>
           <a:xfrm>
-            <a:off x="640080" y="3301876"/>
-            <a:ext cx="2644902" cy="2916043"/>
+            <a:off x="640080" y="3228975"/>
+            <a:ext cx="2644902" cy="2988945"/>
           </a:xfrm>
           <a:prstGeom prst="rect">
             <a:avLst/>
@@ -7559,7 +5815,7 @@
         </p:nvSpPr>
         <p:spPr>
           <a:xfrm>
-            <a:off x="640080" y="3301876"/>
+            <a:off x="640080" y="3228975"/>
             <a:ext cx="2644902" cy="45720"/>
           </a:xfrm>
           <a:prstGeom prst="rect">
@@ -7608,7 +5864,7 @@
         </p:nvSpPr>
         <p:spPr>
           <a:xfrm>
-            <a:off x="749808" y="3429892"/>
+            <a:off x="749808" y="3356991"/>
             <a:ext cx="2425446" cy="201168"/>
           </a:xfrm>
           <a:prstGeom prst="rect">
@@ -7650,7 +5906,7 @@
         </p:nvSpPr>
         <p:spPr>
           <a:xfrm>
-            <a:off x="749808" y="3685924"/>
+            <a:off x="749808" y="3613023"/>
             <a:ext cx="2425446" cy="475488"/>
           </a:xfrm>
           <a:prstGeom prst="rect">
@@ -7734,8 +5990,8 @@
         </p:nvSpPr>
         <p:spPr>
           <a:xfrm>
-            <a:off x="3394710" y="3301876"/>
-            <a:ext cx="2644902" cy="2916043"/>
+            <a:off x="3394710" y="3228975"/>
+            <a:ext cx="2644902" cy="2988945"/>
           </a:xfrm>
           <a:prstGeom prst="rect">
             <a:avLst/>
@@ -7783,7 +6039,7 @@
         </p:nvSpPr>
         <p:spPr>
           <a:xfrm>
-            <a:off x="3394710" y="3301876"/>
+            <a:off x="3394710" y="3228975"/>
             <a:ext cx="2644902" cy="45720"/>
           </a:xfrm>
           <a:prstGeom prst="rect">
@@ -7832,7 +6088,7 @@
         </p:nvSpPr>
         <p:spPr>
           <a:xfrm>
-            <a:off x="3504438" y="3429892"/>
+            <a:off x="3504438" y="3356991"/>
             <a:ext cx="2425446" cy="201168"/>
           </a:xfrm>
           <a:prstGeom prst="rect">
@@ -7874,7 +6130,7 @@
         </p:nvSpPr>
         <p:spPr>
           <a:xfrm>
-            <a:off x="3504438" y="3685924"/>
+            <a:off x="3504438" y="3613023"/>
             <a:ext cx="2425446" cy="475488"/>
           </a:xfrm>
           <a:prstGeom prst="rect">
@@ -7958,8 +6214,8 @@
         </p:nvSpPr>
         <p:spPr>
           <a:xfrm>
-            <a:off x="6149340" y="3301876"/>
-            <a:ext cx="2644902" cy="2916043"/>
+            <a:off x="6149340" y="3228975"/>
+            <a:ext cx="2644902" cy="2988945"/>
           </a:xfrm>
           <a:prstGeom prst="rect">
             <a:avLst/>
@@ -8007,7 +6263,7 @@
         </p:nvSpPr>
         <p:spPr>
           <a:xfrm>
-            <a:off x="6149340" y="3301876"/>
+            <a:off x="6149340" y="3228975"/>
             <a:ext cx="2644902" cy="45720"/>
           </a:xfrm>
           <a:prstGeom prst="rect">
@@ -8056,7 +6312,7 @@
         </p:nvSpPr>
         <p:spPr>
           <a:xfrm>
-            <a:off x="6259068" y="3429892"/>
+            <a:off x="6259068" y="3356991"/>
             <a:ext cx="2425446" cy="201168"/>
           </a:xfrm>
           <a:prstGeom prst="rect">
@@ -8098,7 +6354,7 @@
         </p:nvSpPr>
         <p:spPr>
           <a:xfrm>
-            <a:off x="6259068" y="3685924"/>
+            <a:off x="6259068" y="3613023"/>
             <a:ext cx="2425446" cy="475488"/>
           </a:xfrm>
           <a:prstGeom prst="rect">
@@ -8182,8 +6438,8 @@
         </p:nvSpPr>
         <p:spPr>
           <a:xfrm>
-            <a:off x="8903970" y="3301876"/>
-            <a:ext cx="2644902" cy="2916043"/>
+            <a:off x="8903970" y="3228975"/>
+            <a:ext cx="2644902" cy="2988945"/>
           </a:xfrm>
           <a:prstGeom prst="rect">
             <a:avLst/>
@@ -8231,7 +6487,7 @@
         </p:nvSpPr>
         <p:spPr>
           <a:xfrm>
-            <a:off x="8903970" y="3301876"/>
+            <a:off x="8903970" y="3228975"/>
             <a:ext cx="2644902" cy="45720"/>
           </a:xfrm>
           <a:prstGeom prst="rect">
@@ -8280,7 +6536,7 @@
         </p:nvSpPr>
         <p:spPr>
           <a:xfrm>
-            <a:off x="9013698" y="3429892"/>
+            <a:off x="9013698" y="3356991"/>
             <a:ext cx="2425446" cy="201168"/>
           </a:xfrm>
           <a:prstGeom prst="rect">
@@ -8322,7 +6578,7 @@
         </p:nvSpPr>
         <p:spPr>
           <a:xfrm>
-            <a:off x="9013698" y="3685924"/>
+            <a:off x="9013698" y="3613023"/>
             <a:ext cx="2425446" cy="475488"/>
           </a:xfrm>
           <a:prstGeom prst="rect">
@@ -8916,7 +7172,7 @@
         </p:nvGraphicFramePr>
         <p:xfrm>
           <a:off x="640080" y="1600200"/>
-          <a:ext cx="10908792" cy="1287902"/>
+          <a:ext cx="10908792" cy="1187174"/>
         </p:xfrm>
         <a:graphic>
           <a:graphicData uri="http://schemas.openxmlformats.org/drawingml/2006/table">
@@ -8929,7 +7185,7 @@
                 <a:gridCol w="4448556"/>
                 <a:gridCol w="4448556"/>
               </a:tblGrid>
-              <a:tr h="429300">
+              <a:tr h="395724">
                 <a:tc>
                   <a:txBody>
                     <a:bodyPr/>
@@ -9012,7 +7268,7 @@
                   </a:tcPr>
                 </a:tc>
               </a:tr>
-              <a:tr h="429300">
+              <a:tr h="395724">
                 <a:tc>
                   <a:txBody>
                     <a:bodyPr/>
@@ -9095,7 +7351,7 @@
                   </a:tcPr>
                 </a:tc>
               </a:tr>
-              <a:tr h="429302">
+              <a:tr h="395726">
                 <a:tc>
                   <a:txBody>
                     <a:bodyPr/>
@@ -9190,8 +7446,8 @@
         </p:nvSpPr>
         <p:spPr>
           <a:xfrm>
-            <a:off x="640080" y="2997830"/>
-            <a:ext cx="10908792" cy="946801"/>
+            <a:off x="640080" y="2897102"/>
+            <a:ext cx="10908792" cy="531452"/>
           </a:xfrm>
           <a:prstGeom prst="rect">
             <a:avLst/>
@@ -9232,8 +7488,8 @@
         </p:nvSpPr>
         <p:spPr>
           <a:xfrm>
-            <a:off x="640080" y="4054360"/>
-            <a:ext cx="10908792" cy="1077897"/>
+            <a:off x="640080" y="3538282"/>
+            <a:ext cx="10908792" cy="820060"/>
           </a:xfrm>
           <a:prstGeom prst="rect">
             <a:avLst/>
@@ -9281,8 +7537,8 @@
         </p:nvSpPr>
         <p:spPr>
           <a:xfrm>
-            <a:off x="640080" y="4054360"/>
-            <a:ext cx="54864" cy="1077897"/>
+            <a:off x="640080" y="3538282"/>
+            <a:ext cx="54864" cy="820060"/>
           </a:xfrm>
           <a:prstGeom prst="rect">
             <a:avLst/>
@@ -9330,7 +7586,7 @@
         </p:nvSpPr>
         <p:spPr>
           <a:xfrm>
-            <a:off x="804671" y="4164088"/>
+            <a:off x="804671" y="3648010"/>
             <a:ext cx="10616184" cy="228600"/>
           </a:xfrm>
           <a:prstGeom prst="rect">
@@ -9372,8 +7628,8 @@
         </p:nvSpPr>
         <p:spPr>
           <a:xfrm>
-            <a:off x="804671" y="4447552"/>
-            <a:ext cx="10616184" cy="593265"/>
+            <a:off x="804671" y="3931474"/>
+            <a:ext cx="10616184" cy="335428"/>
           </a:xfrm>
           <a:prstGeom prst="rect">
             <a:avLst/>
@@ -9414,8 +7670,8 @@
         </p:nvSpPr>
         <p:spPr>
           <a:xfrm>
-            <a:off x="640080" y="5241985"/>
-            <a:ext cx="10908792" cy="975934"/>
+            <a:off x="640080" y="4468070"/>
+            <a:ext cx="10908792" cy="820060"/>
           </a:xfrm>
           <a:prstGeom prst="rect">
             <a:avLst/>
@@ -9463,8 +7719,8 @@
         </p:nvSpPr>
         <p:spPr>
           <a:xfrm>
-            <a:off x="640080" y="5241985"/>
-            <a:ext cx="54864" cy="975934"/>
+            <a:off x="640080" y="4468070"/>
+            <a:ext cx="54864" cy="820060"/>
           </a:xfrm>
           <a:prstGeom prst="rect">
             <a:avLst/>
@@ -9512,7 +7768,7 @@
         </p:nvSpPr>
         <p:spPr>
           <a:xfrm>
-            <a:off x="804671" y="5351713"/>
+            <a:off x="804671" y="4577798"/>
             <a:ext cx="10616184" cy="228600"/>
           </a:xfrm>
           <a:prstGeom prst="rect">
@@ -9554,8 +7810,8 @@
         </p:nvSpPr>
         <p:spPr>
           <a:xfrm>
-            <a:off x="804671" y="5635177"/>
-            <a:ext cx="10616184" cy="491302"/>
+            <a:off x="804671" y="4861262"/>
+            <a:ext cx="10616184" cy="335428"/>
           </a:xfrm>
           <a:prstGeom prst="rect">
             <a:avLst/>
@@ -9591,6 +7847,188 @@
       <p:sp>
         <p:nvSpPr>
           <p:cNvPr id="19" name="Rectangle 18"/>
+          <p:cNvSpPr/>
+          <p:nvPr/>
+        </p:nvSpPr>
+        <p:spPr>
+          <a:xfrm>
+            <a:off x="640080" y="5397859"/>
+            <a:ext cx="10908792" cy="820060"/>
+          </a:xfrm>
+          <a:prstGeom prst="rect">
+            <a:avLst/>
+          </a:prstGeom>
+          <a:solidFill>
+            <a:srgbClr val="F5F7F9"/>
+          </a:solidFill>
+          <a:ln>
+            <a:solidFill>
+              <a:srgbClr val="E3E7EC"/>
+            </a:solidFill>
+          </a:ln>
+        </p:spPr>
+        <p:style>
+          <a:lnRef idx="1">
+            <a:schemeClr val="accent1"/>
+          </a:lnRef>
+          <a:fillRef idx="3">
+            <a:schemeClr val="accent1"/>
+          </a:fillRef>
+          <a:effectRef idx="2">
+            <a:schemeClr val="accent1"/>
+          </a:effectRef>
+          <a:fontRef idx="minor">
+            <a:schemeClr val="lt1"/>
+          </a:fontRef>
+        </p:style>
+        <p:txBody>
+          <a:bodyPr rtlCol="0" anchor="ctr"/>
+          <a:lstStyle/>
+          <a:p>
+            <a:pPr algn="ctr">
+              <a:defRPr>
+                <a:latin typeface="Inter"/>
+              </a:defRPr>
+            </a:pPr>
+          </a:p>
+        </p:txBody>
+      </p:sp>
+      <p:sp>
+        <p:nvSpPr>
+          <p:cNvPr id="20" name="Rectangle 19"/>
+          <p:cNvSpPr/>
+          <p:nvPr/>
+        </p:nvSpPr>
+        <p:spPr>
+          <a:xfrm>
+            <a:off x="640080" y="5397859"/>
+            <a:ext cx="54864" cy="820060"/>
+          </a:xfrm>
+          <a:prstGeom prst="rect">
+            <a:avLst/>
+          </a:prstGeom>
+          <a:solidFill>
+            <a:srgbClr val="FF6B5E"/>
+          </a:solidFill>
+          <a:ln>
+            <a:solidFill>
+              <a:srgbClr val="FF6B5E"/>
+            </a:solidFill>
+          </a:ln>
+        </p:spPr>
+        <p:style>
+          <a:lnRef idx="1">
+            <a:schemeClr val="accent1"/>
+          </a:lnRef>
+          <a:fillRef idx="3">
+            <a:schemeClr val="accent1"/>
+          </a:fillRef>
+          <a:effectRef idx="2">
+            <a:schemeClr val="accent1"/>
+          </a:effectRef>
+          <a:fontRef idx="minor">
+            <a:schemeClr val="lt1"/>
+          </a:fontRef>
+        </p:style>
+        <p:txBody>
+          <a:bodyPr rtlCol="0" anchor="ctr"/>
+          <a:lstStyle/>
+          <a:p>
+            <a:pPr algn="ctr">
+              <a:defRPr>
+                <a:latin typeface="Inter"/>
+              </a:defRPr>
+            </a:pPr>
+          </a:p>
+        </p:txBody>
+      </p:sp>
+      <p:sp>
+        <p:nvSpPr>
+          <p:cNvPr id="21" name="TextBox 20"/>
+          <p:cNvSpPr txBox="1"/>
+          <p:nvPr/>
+        </p:nvSpPr>
+        <p:spPr>
+          <a:xfrm>
+            <a:off x="804671" y="5507587"/>
+            <a:ext cx="10616184" cy="228600"/>
+          </a:xfrm>
+          <a:prstGeom prst="rect">
+            <a:avLst/>
+          </a:prstGeom>
+          <a:noFill/>
+        </p:spPr>
+        <p:txBody>
+          <a:bodyPr wrap="none" lIns="9144" rIns="9144" tIns="9144" bIns="9144" anchor="t">
+            <a:spAutoFit/>
+          </a:bodyPr>
+          <a:lstStyle/>
+          <a:p>
+            <a:pPr algn="l">
+              <a:spcAft>
+                <a:spcPts val="0"/>
+              </a:spcAft>
+              <a:defRPr sz="1000" b="1">
+                <a:solidFill>
+                  <a:srgbClr val="0D1117"/>
+                </a:solidFill>
+                <a:latin typeface="Inter"/>
+              </a:defRPr>
+            </a:pPr>
+            <a:r>
+              <a:rPr>
+                <a:latin typeface="Inter"/>
+              </a:rPr>
+              <a:t>Key judgment — event timing is absent</a:t>
+            </a:r>
+          </a:p>
+        </p:txBody>
+      </p:sp>
+      <p:sp>
+        <p:nvSpPr>
+          <p:cNvPr id="22" name="TextBox 21"/>
+          <p:cNvSpPr txBox="1"/>
+          <p:nvPr/>
+        </p:nvSpPr>
+        <p:spPr>
+          <a:xfrm>
+            <a:off x="804671" y="5791051"/>
+            <a:ext cx="10616184" cy="335428"/>
+          </a:xfrm>
+          <a:prstGeom prst="rect">
+            <a:avLst/>
+          </a:prstGeom>
+          <a:noFill/>
+        </p:spPr>
+        <p:txBody>
+          <a:bodyPr wrap="none" lIns="9144" rIns="9144" tIns="9144" bIns="9144" anchor="t">
+            <a:spAutoFit/>
+          </a:bodyPr>
+          <a:lstStyle/>
+          <a:p>
+            <a:pPr algn="l">
+              <a:spcAft>
+                <a:spcPts val="0"/>
+              </a:spcAft>
+              <a:defRPr sz="950" b="0">
+                <a:solidFill>
+                  <a:srgbClr val="4A5563"/>
+                </a:solidFill>
+                <a:latin typeface="Inter"/>
+              </a:defRPr>
+            </a:pPr>
+            <a:r>
+              <a:rPr>
+                <a:latin typeface="Inter"/>
+              </a:rPr>
+              <a:t>The report names one significant event without the effective date needed to place it in the record [S1]. Readers therefore cannot align the event with reported returns, and dated evidence is required before assessing its period-specific relevance.</a:t>
+            </a:r>
+          </a:p>
+        </p:txBody>
+      </p:sp>
+      <p:sp>
+        <p:nvSpPr>
+          <p:cNvPr id="23" name="Rectangle 22"/>
           <p:cNvSpPr/>
           <p:nvPr/>
         </p:nvSpPr>
@@ -9639,7 +8077,7 @@
       </p:sp>
       <p:sp>
         <p:nvSpPr>
-          <p:cNvPr id="20" name="TextBox 19"/>
+          <p:cNvPr id="24" name="TextBox 23"/>
           <p:cNvSpPr txBox="1"/>
           <p:nvPr/>
         </p:nvSpPr>
@@ -9681,7 +8119,7 @@
       </p:sp>
       <p:sp>
         <p:nvSpPr>
-          <p:cNvPr id="21" name="TextBox 20"/>
+          <p:cNvPr id="25" name="TextBox 24"/>
           <p:cNvSpPr txBox="1"/>
           <p:nvPr/>
         </p:nvSpPr>
@@ -9723,7 +8161,7 @@
       </p:sp>
       <p:sp>
         <p:nvSpPr>
-          <p:cNvPr id="22" name="TextBox 21"/>
+          <p:cNvPr id="26" name="TextBox 25"/>
           <p:cNvSpPr txBox="1"/>
           <p:nvPr/>
         </p:nvSpPr>
@@ -10063,7 +8501,7 @@
         <p:spPr>
           <a:xfrm>
             <a:off x="640080" y="1325880"/>
-            <a:ext cx="10908792" cy="2334448"/>
+            <a:ext cx="10908792" cy="4892040"/>
           </a:xfrm>
           <a:prstGeom prst="rect">
             <a:avLst/>
@@ -10112,189 +8550,7 @@
         <p:spPr>
           <a:xfrm>
             <a:off x="640080" y="1325880"/>
-            <a:ext cx="54864" cy="2334448"/>
-          </a:xfrm>
-          <a:prstGeom prst="rect">
-            <a:avLst/>
-          </a:prstGeom>
-          <a:solidFill>
-            <a:srgbClr val="FF6B5E"/>
-          </a:solidFill>
-          <a:ln>
-            <a:solidFill>
-              <a:srgbClr val="FF6B5E"/>
-            </a:solidFill>
-          </a:ln>
-        </p:spPr>
-        <p:style>
-          <a:lnRef idx="1">
-            <a:schemeClr val="accent1"/>
-          </a:lnRef>
-          <a:fillRef idx="3">
-            <a:schemeClr val="accent1"/>
-          </a:fillRef>
-          <a:effectRef idx="2">
-            <a:schemeClr val="accent1"/>
-          </a:effectRef>
-          <a:fontRef idx="minor">
-            <a:schemeClr val="lt1"/>
-          </a:fontRef>
-        </p:style>
-        <p:txBody>
-          <a:bodyPr rtlCol="0" anchor="ctr"/>
-          <a:lstStyle/>
-          <a:p>
-            <a:pPr algn="ctr">
-              <a:defRPr>
-                <a:latin typeface="Inter"/>
-              </a:defRPr>
-            </a:pPr>
-          </a:p>
-        </p:txBody>
-      </p:sp>
-      <p:sp>
-        <p:nvSpPr>
-          <p:cNvPr id="10" name="TextBox 9"/>
-          <p:cNvSpPr txBox="1"/>
-          <p:nvPr/>
-        </p:nvSpPr>
-        <p:spPr>
-          <a:xfrm>
-            <a:off x="804671" y="1435607"/>
-            <a:ext cx="10616184" cy="228600"/>
-          </a:xfrm>
-          <a:prstGeom prst="rect">
-            <a:avLst/>
-          </a:prstGeom>
-          <a:noFill/>
-        </p:spPr>
-        <p:txBody>
-          <a:bodyPr wrap="none" lIns="9144" rIns="9144" tIns="9144" bIns="9144" anchor="t">
-            <a:spAutoFit/>
-          </a:bodyPr>
-          <a:lstStyle/>
-          <a:p>
-            <a:pPr algn="l">
-              <a:spcAft>
-                <a:spcPts val="0"/>
-              </a:spcAft>
-              <a:defRPr sz="1000" b="1">
-                <a:solidFill>
-                  <a:srgbClr val="0D1117"/>
-                </a:solidFill>
-                <a:latin typeface="Inter"/>
-              </a:defRPr>
-            </a:pPr>
-            <a:r>
-              <a:rPr>
-                <a:latin typeface="Inter"/>
-              </a:rPr>
-              <a:t>Key judgment — event timing is absent</a:t>
-            </a:r>
-          </a:p>
-        </p:txBody>
-      </p:sp>
-      <p:sp>
-        <p:nvSpPr>
-          <p:cNvPr id="11" name="TextBox 10"/>
-          <p:cNvSpPr txBox="1"/>
-          <p:nvPr/>
-        </p:nvSpPr>
-        <p:spPr>
-          <a:xfrm>
-            <a:off x="804671" y="1719072"/>
-            <a:ext cx="10616184" cy="1849816"/>
-          </a:xfrm>
-          <a:prstGeom prst="rect">
-            <a:avLst/>
-          </a:prstGeom>
-          <a:noFill/>
-        </p:spPr>
-        <p:txBody>
-          <a:bodyPr wrap="none" lIns="9144" rIns="9144" tIns="9144" bIns="9144" anchor="t">
-            <a:spAutoFit/>
-          </a:bodyPr>
-          <a:lstStyle/>
-          <a:p>
-            <a:pPr algn="l">
-              <a:spcAft>
-                <a:spcPts val="0"/>
-              </a:spcAft>
-              <a:defRPr sz="950" b="0">
-                <a:solidFill>
-                  <a:srgbClr val="4A5563"/>
-                </a:solidFill>
-                <a:latin typeface="Inter"/>
-              </a:defRPr>
-            </a:pPr>
-            <a:r>
-              <a:rPr>
-                <a:latin typeface="Inter"/>
-              </a:rPr>
-              <a:t>The report names one significant event without the effective date needed to place it in the record [S1]. Readers therefore cannot align the event with reported returns, and dated evidence is required before assessing its period-specific relevance.</a:t>
-            </a:r>
-          </a:p>
-        </p:txBody>
-      </p:sp>
-      <p:sp>
-        <p:nvSpPr>
-          <p:cNvPr id="12" name="Rectangle 11"/>
-          <p:cNvSpPr/>
-          <p:nvPr/>
-        </p:nvSpPr>
-        <p:spPr>
-          <a:xfrm>
-            <a:off x="640080" y="3770056"/>
-            <a:ext cx="10908792" cy="2447863"/>
-          </a:xfrm>
-          <a:prstGeom prst="rect">
-            <a:avLst/>
-          </a:prstGeom>
-          <a:solidFill>
-            <a:srgbClr val="F5F7F9"/>
-          </a:solidFill>
-          <a:ln>
-            <a:solidFill>
-              <a:srgbClr val="E3E7EC"/>
-            </a:solidFill>
-          </a:ln>
-        </p:spPr>
-        <p:style>
-          <a:lnRef idx="1">
-            <a:schemeClr val="accent1"/>
-          </a:lnRef>
-          <a:fillRef idx="3">
-            <a:schemeClr val="accent1"/>
-          </a:fillRef>
-          <a:effectRef idx="2">
-            <a:schemeClr val="accent1"/>
-          </a:effectRef>
-          <a:fontRef idx="minor">
-            <a:schemeClr val="lt1"/>
-          </a:fontRef>
-        </p:style>
-        <p:txBody>
-          <a:bodyPr rtlCol="0" anchor="ctr"/>
-          <a:lstStyle/>
-          <a:p>
-            <a:pPr algn="ctr">
-              <a:defRPr>
-                <a:latin typeface="Inter"/>
-              </a:defRPr>
-            </a:pPr>
-          </a:p>
-        </p:txBody>
-      </p:sp>
-      <p:sp>
-        <p:nvSpPr>
-          <p:cNvPr id="13" name="Rectangle 12"/>
-          <p:cNvSpPr/>
-          <p:nvPr/>
-        </p:nvSpPr>
-        <p:spPr>
-          <a:xfrm>
-            <a:off x="640080" y="3770056"/>
-            <a:ext cx="54864" cy="2447863"/>
+            <a:ext cx="54864" cy="4892040"/>
           </a:xfrm>
           <a:prstGeom prst="rect">
             <a:avLst/>
@@ -10336,13 +8592,13 @@
       </p:sp>
       <p:sp>
         <p:nvSpPr>
-          <p:cNvPr id="14" name="TextBox 13"/>
+          <p:cNvPr id="10" name="TextBox 9"/>
           <p:cNvSpPr txBox="1"/>
           <p:nvPr/>
         </p:nvSpPr>
         <p:spPr>
           <a:xfrm>
-            <a:off x="804671" y="3879784"/>
+            <a:off x="804671" y="1435607"/>
             <a:ext cx="10616184" cy="228600"/>
           </a:xfrm>
           <a:prstGeom prst="rect">
@@ -10378,14 +8634,14 @@
       </p:sp>
       <p:sp>
         <p:nvSpPr>
-          <p:cNvPr id="15" name="TextBox 14"/>
+          <p:cNvPr id="11" name="TextBox 10"/>
           <p:cNvSpPr txBox="1"/>
           <p:nvPr/>
         </p:nvSpPr>
         <p:spPr>
           <a:xfrm>
-            <a:off x="804671" y="4163248"/>
-            <a:ext cx="10616184" cy="1963231"/>
+            <a:off x="804671" y="1719072"/>
+            <a:ext cx="10616184" cy="4407408"/>
           </a:xfrm>
           <a:prstGeom prst="rect">
             <a:avLst/>
@@ -10420,7 +8676,7 @@
       </p:sp>
       <p:sp>
         <p:nvSpPr>
-          <p:cNvPr id="16" name="Rectangle 15"/>
+          <p:cNvPr id="12" name="Rectangle 11"/>
           <p:cNvSpPr/>
           <p:nvPr/>
         </p:nvSpPr>
@@ -10469,7 +8725,7 @@
       </p:sp>
       <p:sp>
         <p:nvSpPr>
-          <p:cNvPr id="17" name="TextBox 16"/>
+          <p:cNvPr id="13" name="TextBox 12"/>
           <p:cNvSpPr txBox="1"/>
           <p:nvPr/>
         </p:nvSpPr>
@@ -10504,14 +8760,14 @@
               <a:rPr>
                 <a:latin typeface="Inter"/>
               </a:rPr>
-              <a:t>Sources: S1 · S2</a:t>
-            </a:r>
-          </a:p>
-        </p:txBody>
-      </p:sp>
-      <p:sp>
-        <p:nvSpPr>
-          <p:cNvPr id="18" name="TextBox 17"/>
+              <a:t>Sources: S2</a:t>
+            </a:r>
+          </a:p>
+        </p:txBody>
+      </p:sp>
+      <p:sp>
+        <p:nvSpPr>
+          <p:cNvPr id="14" name="TextBox 13"/>
           <p:cNvSpPr txBox="1"/>
           <p:nvPr/>
         </p:nvSpPr>
@@ -10553,7 +8809,7 @@
       </p:sp>
       <p:sp>
         <p:nvSpPr>
-          <p:cNvPr id="19" name="TextBox 18"/>
+          <p:cNvPr id="15" name="TextBox 14"/>
           <p:cNvSpPr txBox="1"/>
           <p:nvPr/>
         </p:nvSpPr>
@@ -10893,7 +9149,7 @@
         <p:spPr>
           <a:xfrm>
             <a:off x="640080" y="1325880"/>
-            <a:ext cx="10908792" cy="201168"/>
+            <a:ext cx="5239512" cy="201168"/>
           </a:xfrm>
           <a:prstGeom prst="rect">
             <a:avLst/>
@@ -10936,7 +9192,7 @@
         </p:nvGraphicFramePr>
         <p:xfrm>
           <a:off x="640080" y="1600200"/>
-          <a:ext cx="10908792" cy="4617720"/>
+          <a:ext cx="5239512" cy="4617720"/>
         </p:xfrm>
         <a:graphic>
           <a:graphicData uri="http://schemas.openxmlformats.org/drawingml/2006/chart">
@@ -10952,8 +9208,8 @@
         </p:nvSpPr>
         <p:spPr>
           <a:xfrm>
-            <a:off x="640080" y="6446520"/>
-            <a:ext cx="10908792" cy="9144"/>
+            <a:off x="6080760" y="1325880"/>
+            <a:ext cx="9144" cy="4892040"/>
           </a:xfrm>
           <a:prstGeom prst="rect">
             <a:avLst/>
@@ -11001,6 +9257,115 @@
         </p:nvSpPr>
         <p:spPr>
           <a:xfrm>
+            <a:off x="6309360" y="1325880"/>
+            <a:ext cx="5239512" cy="201168"/>
+          </a:xfrm>
+          <a:prstGeom prst="rect">
+            <a:avLst/>
+          </a:prstGeom>
+          <a:noFill/>
+        </p:spPr>
+        <p:txBody>
+          <a:bodyPr wrap="none" lIns="9144" rIns="9144" tIns="9144" bIns="9144" anchor="t">
+            <a:spAutoFit/>
+          </a:bodyPr>
+          <a:lstStyle/>
+          <a:p>
+            <a:pPr algn="l">
+              <a:spcAft>
+                <a:spcPts val="0"/>
+              </a:spcAft>
+              <a:defRPr sz="720" b="1">
+                <a:solidFill>
+                  <a:srgbClr val="4A5563"/>
+                </a:solidFill>
+                <a:latin typeface="Inter"/>
+              </a:defRPr>
+            </a:pPr>
+            <a:r>
+              <a:rPr>
+                <a:latin typeface="Inter"/>
+              </a:rPr>
+              <a:t>FINDINGS BY SEVERITY</a:t>
+            </a:r>
+          </a:p>
+        </p:txBody>
+      </p:sp>
+      <p:graphicFrame>
+        <p:nvGraphicFramePr>
+          <p:cNvPr id="12" name="Chart 11"/>
+          <p:cNvGraphicFramePr>
+            <a:graphicFrameLocks noGrp="1"/>
+          </p:cNvGraphicFramePr>
+          <p:nvPr/>
+        </p:nvGraphicFramePr>
+        <p:xfrm>
+          <a:off x="6309360" y="1600200"/>
+          <a:ext cx="5239512" cy="4617720"/>
+        </p:xfrm>
+        <a:graphic>
+          <a:graphicData uri="http://schemas.openxmlformats.org/drawingml/2006/chart">
+            <c:chart xmlns:c="http://schemas.openxmlformats.org/drawingml/2006/chart" r:id="rId3"/>
+          </a:graphicData>
+        </a:graphic>
+      </p:graphicFrame>
+      <p:sp>
+        <p:nvSpPr>
+          <p:cNvPr id="13" name="Rectangle 12"/>
+          <p:cNvSpPr/>
+          <p:nvPr/>
+        </p:nvSpPr>
+        <p:spPr>
+          <a:xfrm>
+            <a:off x="640080" y="6446520"/>
+            <a:ext cx="10908792" cy="9144"/>
+          </a:xfrm>
+          <a:prstGeom prst="rect">
+            <a:avLst/>
+          </a:prstGeom>
+          <a:solidFill>
+            <a:srgbClr val="E3E7EC"/>
+          </a:solidFill>
+          <a:ln>
+            <a:solidFill>
+              <a:srgbClr val="E3E7EC"/>
+            </a:solidFill>
+          </a:ln>
+        </p:spPr>
+        <p:style>
+          <a:lnRef idx="1">
+            <a:schemeClr val="accent1"/>
+          </a:lnRef>
+          <a:fillRef idx="3">
+            <a:schemeClr val="accent1"/>
+          </a:fillRef>
+          <a:effectRef idx="2">
+            <a:schemeClr val="accent1"/>
+          </a:effectRef>
+          <a:fontRef idx="minor">
+            <a:schemeClr val="lt1"/>
+          </a:fontRef>
+        </p:style>
+        <p:txBody>
+          <a:bodyPr rtlCol="0" anchor="ctr"/>
+          <a:lstStyle/>
+          <a:p>
+            <a:pPr algn="ctr">
+              <a:defRPr>
+                <a:latin typeface="Inter"/>
+              </a:defRPr>
+            </a:pPr>
+          </a:p>
+        </p:txBody>
+      </p:sp>
+      <p:sp>
+        <p:nvSpPr>
+          <p:cNvPr id="14" name="TextBox 13"/>
+          <p:cNvSpPr txBox="1"/>
+          <p:nvPr/>
+        </p:nvSpPr>
+        <p:spPr>
+          <a:xfrm>
             <a:off x="640080" y="6501384"/>
             <a:ext cx="4297680" cy="146304"/>
           </a:xfrm>
@@ -11037,7 +9402,7 @@
       </p:sp>
       <p:sp>
         <p:nvSpPr>
-          <p:cNvPr id="12" name="TextBox 11"/>
+          <p:cNvPr id="15" name="TextBox 14"/>
           <p:cNvSpPr txBox="1"/>
           <p:nvPr/>
         </p:nvSpPr>
@@ -11079,7 +9444,7 @@
       </p:sp>
       <p:sp>
         <p:nvSpPr>
-          <p:cNvPr id="13" name="TextBox 12"/>
+          <p:cNvPr id="16" name="TextBox 15"/>
           <p:cNvSpPr txBox="1"/>
           <p:nvPr/>
         </p:nvSpPr>
@@ -11447,532 +9812,6 @@
               <a:rPr>
                 <a:latin typeface="Inter"/>
               </a:rPr>
-              <a:t>FINDINGS BY SEVERITY</a:t>
-            </a:r>
-          </a:p>
-        </p:txBody>
-      </p:sp>
-      <p:graphicFrame>
-        <p:nvGraphicFramePr>
-          <p:cNvPr id="9" name="Chart 8"/>
-          <p:cNvGraphicFramePr>
-            <a:graphicFrameLocks noGrp="1"/>
-          </p:cNvGraphicFramePr>
-          <p:nvPr/>
-        </p:nvGraphicFramePr>
-        <p:xfrm>
-          <a:off x="640080" y="1600200"/>
-          <a:ext cx="10908792" cy="4617720"/>
-        </p:xfrm>
-        <a:graphic>
-          <a:graphicData uri="http://schemas.openxmlformats.org/drawingml/2006/chart">
-            <c:chart xmlns:c="http://schemas.openxmlformats.org/drawingml/2006/chart" r:id="rId2"/>
-          </a:graphicData>
-        </a:graphic>
-      </p:graphicFrame>
-      <p:sp>
-        <p:nvSpPr>
-          <p:cNvPr id="10" name="Rectangle 9"/>
-          <p:cNvSpPr/>
-          <p:nvPr/>
-        </p:nvSpPr>
-        <p:spPr>
-          <a:xfrm>
-            <a:off x="640080" y="6446520"/>
-            <a:ext cx="10908792" cy="9144"/>
-          </a:xfrm>
-          <a:prstGeom prst="rect">
-            <a:avLst/>
-          </a:prstGeom>
-          <a:solidFill>
-            <a:srgbClr val="E3E7EC"/>
-          </a:solidFill>
-          <a:ln>
-            <a:solidFill>
-              <a:srgbClr val="E3E7EC"/>
-            </a:solidFill>
-          </a:ln>
-        </p:spPr>
-        <p:style>
-          <a:lnRef idx="1">
-            <a:schemeClr val="accent1"/>
-          </a:lnRef>
-          <a:fillRef idx="3">
-            <a:schemeClr val="accent1"/>
-          </a:fillRef>
-          <a:effectRef idx="2">
-            <a:schemeClr val="accent1"/>
-          </a:effectRef>
-          <a:fontRef idx="minor">
-            <a:schemeClr val="lt1"/>
-          </a:fontRef>
-        </p:style>
-        <p:txBody>
-          <a:bodyPr rtlCol="0" anchor="ctr"/>
-          <a:lstStyle/>
-          <a:p>
-            <a:pPr algn="ctr">
-              <a:defRPr>
-                <a:latin typeface="Inter"/>
-              </a:defRPr>
-            </a:pPr>
-          </a:p>
-        </p:txBody>
-      </p:sp>
-      <p:sp>
-        <p:nvSpPr>
-          <p:cNvPr id="11" name="TextBox 10"/>
-          <p:cNvSpPr txBox="1"/>
-          <p:nvPr/>
-        </p:nvSpPr>
-        <p:spPr>
-          <a:xfrm>
-            <a:off x="640080" y="6501384"/>
-            <a:ext cx="4297680" cy="146304"/>
-          </a:xfrm>
-          <a:prstGeom prst="rect">
-            <a:avLst/>
-          </a:prstGeom>
-          <a:noFill/>
-        </p:spPr>
-        <p:txBody>
-          <a:bodyPr wrap="none" lIns="9144" rIns="9144" tIns="9144" bIns="9144" anchor="t">
-            <a:spAutoFit/>
-          </a:bodyPr>
-          <a:lstStyle/>
-          <a:p>
-            <a:pPr algn="l">
-              <a:spcAft>
-                <a:spcPts val="0"/>
-              </a:spcAft>
-              <a:defRPr sz="650" b="0">
-                <a:solidFill>
-                  <a:srgbClr val="8A94A1"/>
-                </a:solidFill>
-                <a:latin typeface="Inter"/>
-              </a:defRPr>
-            </a:pPr>
-            <a:r>
-              <a:rPr>
-                <a:latin typeface="Inter"/>
-              </a:rPr>
-              <a:t>Sources: none cited</a:t>
-            </a:r>
-          </a:p>
-        </p:txBody>
-      </p:sp>
-      <p:sp>
-        <p:nvSpPr>
-          <p:cNvPr id="12" name="TextBox 11"/>
-          <p:cNvSpPr txBox="1"/>
-          <p:nvPr/>
-        </p:nvSpPr>
-        <p:spPr>
-          <a:xfrm>
-            <a:off x="4480560" y="6501384"/>
-            <a:ext cx="5303520" cy="146304"/>
-          </a:xfrm>
-          <a:prstGeom prst="rect">
-            <a:avLst/>
-          </a:prstGeom>
-          <a:noFill/>
-        </p:spPr>
-        <p:txBody>
-          <a:bodyPr wrap="none" lIns="9144" rIns="9144" tIns="9144" bIns="9144" anchor="t">
-            <a:spAutoFit/>
-          </a:bodyPr>
-          <a:lstStyle/>
-          <a:p>
-            <a:pPr algn="ctr">
-              <a:spcAft>
-                <a:spcPts val="0"/>
-              </a:spcAft>
-              <a:defRPr sz="650" b="0">
-                <a:solidFill>
-                  <a:srgbClr val="8A94A1"/>
-                </a:solidFill>
-                <a:latin typeface="Inter"/>
-              </a:defRPr>
-            </a:pPr>
-            <a:r>
-              <a:rPr>
-                <a:latin typeface="Inter"/>
-              </a:rPr>
-              <a:t>Confidential — performance standards review · Data as of 2025-12-31</a:t>
-            </a:r>
-          </a:p>
-        </p:txBody>
-      </p:sp>
-      <p:sp>
-        <p:nvSpPr>
-          <p:cNvPr id="13" name="TextBox 12"/>
-          <p:cNvSpPr txBox="1"/>
-          <p:nvPr/>
-        </p:nvSpPr>
-        <p:spPr>
-          <a:xfrm>
-            <a:off x="10287000" y="6501384"/>
-            <a:ext cx="1261872" cy="146304"/>
-          </a:xfrm>
-          <a:prstGeom prst="rect">
-            <a:avLst/>
-          </a:prstGeom>
-          <a:noFill/>
-        </p:spPr>
-        <p:txBody>
-          <a:bodyPr wrap="none" lIns="9144" rIns="9144" tIns="9144" bIns="9144" anchor="t">
-            <a:spAutoFit/>
-          </a:bodyPr>
-          <a:lstStyle/>
-          <a:p>
-            <a:pPr algn="r">
-              <a:spcAft>
-                <a:spcPts val="0"/>
-              </a:spcAft>
-              <a:defRPr sz="650" b="0">
-                <a:solidFill>
-                  <a:srgbClr val="8A94A1"/>
-                </a:solidFill>
-                <a:latin typeface="Inter"/>
-              </a:defRPr>
-            </a:pPr>
-            <a:r>
-              <a:rPr>
-                <a:latin typeface="Inter"/>
-              </a:rPr>
-              <a:t>6</a:t>
-            </a:r>
-          </a:p>
-        </p:txBody>
-      </p:sp>
-    </p:spTree>
-  </p:cSld>
-  <p:clrMapOvr>
-    <a:masterClrMapping/>
-  </p:clrMapOvr>
-</p:sld>
-</file>
-
-<file path=ppt/slides/slide7.xml><?xml version="1.0" encoding="utf-8"?>
-<p:sld xmlns:a="http://schemas.openxmlformats.org/drawingml/2006/main" xmlns:p="http://schemas.openxmlformats.org/presentationml/2006/main" xmlns:r="http://schemas.openxmlformats.org/officeDocument/2006/relationships">
-  <p:cSld>
-    <p:spTree>
-      <p:nvGrpSpPr>
-        <p:cNvPr id="1" name=""/>
-        <p:cNvGrpSpPr/>
-        <p:nvPr/>
-      </p:nvGrpSpPr>
-      <p:grpSpPr/>
-      <p:sp>
-        <p:nvSpPr>
-          <p:cNvPr id="2" name="Rectangle 1"/>
-          <p:cNvSpPr/>
-          <p:nvPr/>
-        </p:nvSpPr>
-        <p:spPr>
-          <a:xfrm>
-            <a:off x="0" y="0"/>
-            <a:ext cx="12191695" cy="6858000"/>
-          </a:xfrm>
-          <a:prstGeom prst="rect">
-            <a:avLst/>
-          </a:prstGeom>
-          <a:solidFill>
-            <a:srgbClr val="FFFFFF"/>
-          </a:solidFill>
-          <a:ln>
-            <a:solidFill>
-              <a:srgbClr val="FFFFFF"/>
-            </a:solidFill>
-          </a:ln>
-        </p:spPr>
-        <p:style>
-          <a:lnRef idx="1">
-            <a:schemeClr val="accent1"/>
-          </a:lnRef>
-          <a:fillRef idx="3">
-            <a:schemeClr val="accent1"/>
-          </a:fillRef>
-          <a:effectRef idx="2">
-            <a:schemeClr val="accent1"/>
-          </a:effectRef>
-          <a:fontRef idx="minor">
-            <a:schemeClr val="lt1"/>
-          </a:fontRef>
-        </p:style>
-        <p:txBody>
-          <a:bodyPr rtlCol="0" anchor="ctr"/>
-          <a:lstStyle/>
-          <a:p>
-            <a:pPr algn="ctr">
-              <a:defRPr>
-                <a:latin typeface="Inter"/>
-              </a:defRPr>
-            </a:pPr>
-          </a:p>
-        </p:txBody>
-      </p:sp>
-      <p:sp>
-        <p:nvSpPr>
-          <p:cNvPr id="3" name="TextBox 2"/>
-          <p:cNvSpPr txBox="1"/>
-          <p:nvPr/>
-        </p:nvSpPr>
-        <p:spPr>
-          <a:xfrm>
-            <a:off x="5897880" y="310896"/>
-            <a:ext cx="4800600" cy="256032"/>
-          </a:xfrm>
-          <a:prstGeom prst="rect">
-            <a:avLst/>
-          </a:prstGeom>
-          <a:noFill/>
-        </p:spPr>
-        <p:txBody>
-          <a:bodyPr wrap="none" lIns="9144" rIns="9144" tIns="9144" bIns="9144" anchor="t">
-            <a:spAutoFit/>
-          </a:bodyPr>
-          <a:lstStyle/>
-          <a:p>
-            <a:pPr algn="r">
-              <a:spcAft>
-                <a:spcPts val="0"/>
-              </a:spcAft>
-              <a:defRPr sz="680" b="1">
-                <a:solidFill>
-                  <a:srgbClr val="4F6B00"/>
-                </a:solidFill>
-                <a:latin typeface="Inter"/>
-              </a:defRPr>
-            </a:pPr>
-            <a:r>
-              <a:rPr>
-                <a:latin typeface="Inter"/>
-              </a:rPr>
-              <a:t>Illustrative, Gradient Maintained — demo data, not the client's holdings or managers</a:t>
-            </a:r>
-          </a:p>
-        </p:txBody>
-      </p:sp>
-      <p:sp>
-        <p:nvSpPr>
-          <p:cNvPr id="4" name="TextBox 3"/>
-          <p:cNvSpPr txBox="1"/>
-          <p:nvPr/>
-        </p:nvSpPr>
-        <p:spPr>
-          <a:xfrm>
-            <a:off x="640080" y="566928"/>
-            <a:ext cx="10058400" cy="530352"/>
-          </a:xfrm>
-          <a:prstGeom prst="rect">
-            <a:avLst/>
-          </a:prstGeom>
-          <a:noFill/>
-        </p:spPr>
-        <p:txBody>
-          <a:bodyPr wrap="none" lIns="9144" rIns="9144" tIns="9144" bIns="9144" anchor="t">
-            <a:spAutoFit/>
-          </a:bodyPr>
-          <a:lstStyle/>
-          <a:p>
-            <a:pPr algn="l">
-              <a:spcAft>
-                <a:spcPts val="0"/>
-              </a:spcAft>
-              <a:defRPr sz="2300" b="1">
-                <a:solidFill>
-                  <a:srgbClr val="0D1117"/>
-                </a:solidFill>
-                <a:latin typeface="Inter"/>
-              </a:defRPr>
-            </a:pPr>
-            <a:r>
-              <a:rPr>
-                <a:latin typeface="Inter"/>
-              </a:rPr>
-              <a:t>Findings — continued</a:t>
-            </a:r>
-          </a:p>
-        </p:txBody>
-      </p:sp>
-      <p:sp>
-        <p:nvSpPr>
-          <p:cNvPr id="5" name="Rectangle 4"/>
-          <p:cNvSpPr/>
-          <p:nvPr/>
-        </p:nvSpPr>
-        <p:spPr>
-          <a:xfrm>
-            <a:off x="640080" y="1115568"/>
-            <a:ext cx="10908792" cy="18288"/>
-          </a:xfrm>
-          <a:prstGeom prst="rect">
-            <a:avLst/>
-          </a:prstGeom>
-          <a:solidFill>
-            <a:srgbClr val="0D1117"/>
-          </a:solidFill>
-          <a:ln>
-            <a:solidFill>
-              <a:srgbClr val="0D1117"/>
-            </a:solidFill>
-          </a:ln>
-        </p:spPr>
-        <p:style>
-          <a:lnRef idx="1">
-            <a:schemeClr val="accent1"/>
-          </a:lnRef>
-          <a:fillRef idx="3">
-            <a:schemeClr val="accent1"/>
-          </a:fillRef>
-          <a:effectRef idx="2">
-            <a:schemeClr val="accent1"/>
-          </a:effectRef>
-          <a:fontRef idx="minor">
-            <a:schemeClr val="lt1"/>
-          </a:fontRef>
-        </p:style>
-        <p:txBody>
-          <a:bodyPr rtlCol="0" anchor="ctr"/>
-          <a:lstStyle/>
-          <a:p>
-            <a:pPr algn="ctr">
-              <a:defRPr>
-                <a:latin typeface="Inter"/>
-              </a:defRPr>
-            </a:pPr>
-          </a:p>
-        </p:txBody>
-      </p:sp>
-      <p:sp>
-        <p:nvSpPr>
-          <p:cNvPr id="6" name="Rectangle 5"/>
-          <p:cNvSpPr/>
-          <p:nvPr/>
-        </p:nvSpPr>
-        <p:spPr>
-          <a:xfrm>
-            <a:off x="11018520" y="502920"/>
-            <a:ext cx="530352" cy="393192"/>
-          </a:xfrm>
-          <a:prstGeom prst="rect">
-            <a:avLst/>
-          </a:prstGeom>
-          <a:solidFill>
-            <a:srgbClr val="C6F432"/>
-          </a:solidFill>
-          <a:ln>
-            <a:solidFill>
-              <a:srgbClr val="C6F432"/>
-            </a:solidFill>
-          </a:ln>
-        </p:spPr>
-        <p:style>
-          <a:lnRef idx="1">
-            <a:schemeClr val="accent1"/>
-          </a:lnRef>
-          <a:fillRef idx="3">
-            <a:schemeClr val="accent1"/>
-          </a:fillRef>
-          <a:effectRef idx="2">
-            <a:schemeClr val="accent1"/>
-          </a:effectRef>
-          <a:fontRef idx="minor">
-            <a:schemeClr val="lt1"/>
-          </a:fontRef>
-        </p:style>
-        <p:txBody>
-          <a:bodyPr rtlCol="0" anchor="ctr"/>
-          <a:lstStyle/>
-          <a:p>
-            <a:pPr algn="ctr">
-              <a:defRPr>
-                <a:latin typeface="Inter"/>
-              </a:defRPr>
-            </a:pPr>
-          </a:p>
-        </p:txBody>
-      </p:sp>
-      <p:sp>
-        <p:nvSpPr>
-          <p:cNvPr id="7" name="TextBox 6"/>
-          <p:cNvSpPr txBox="1"/>
-          <p:nvPr/>
-        </p:nvSpPr>
-        <p:spPr>
-          <a:xfrm>
-            <a:off x="11045952" y="557784"/>
-            <a:ext cx="475488" cy="182880"/>
-          </a:xfrm>
-          <a:prstGeom prst="rect">
-            <a:avLst/>
-          </a:prstGeom>
-          <a:noFill/>
-        </p:spPr>
-        <p:txBody>
-          <a:bodyPr wrap="none" lIns="9144" rIns="9144" tIns="9144" bIns="9144" anchor="t">
-            <a:spAutoFit/>
-          </a:bodyPr>
-          <a:lstStyle/>
-          <a:p>
-            <a:pPr algn="ctr">
-              <a:spcAft>
-                <a:spcPts val="0"/>
-              </a:spcAft>
-              <a:defRPr sz="1000" b="1">
-                <a:solidFill>
-                  <a:srgbClr val="0D1117"/>
-                </a:solidFill>
-                <a:latin typeface="Inter"/>
-              </a:defRPr>
-            </a:pPr>
-            <a:r>
-              <a:rPr>
-                <a:latin typeface="Inter"/>
-              </a:rPr>
-              <a:t>02</a:t>
-            </a:r>
-          </a:p>
-        </p:txBody>
-      </p:sp>
-      <p:sp>
-        <p:nvSpPr>
-          <p:cNvPr id="8" name="TextBox 7"/>
-          <p:cNvSpPr txBox="1"/>
-          <p:nvPr/>
-        </p:nvSpPr>
-        <p:spPr>
-          <a:xfrm>
-            <a:off x="640080" y="1325880"/>
-            <a:ext cx="10908792" cy="201168"/>
-          </a:xfrm>
-          <a:prstGeom prst="rect">
-            <a:avLst/>
-          </a:prstGeom>
-          <a:noFill/>
-        </p:spPr>
-        <p:txBody>
-          <a:bodyPr wrap="none" lIns="9144" rIns="9144" tIns="9144" bIns="9144" anchor="t">
-            <a:spAutoFit/>
-          </a:bodyPr>
-          <a:lstStyle/>
-          <a:p>
-            <a:pPr algn="l">
-              <a:spcAft>
-                <a:spcPts val="0"/>
-              </a:spcAft>
-              <a:defRPr sz="720" b="1">
-                <a:solidFill>
-                  <a:srgbClr val="4A5563"/>
-                </a:solidFill>
-                <a:latin typeface="Inter"/>
-              </a:defRPr>
-            </a:pPr>
-            <a:r>
-              <a:rPr>
-                <a:latin typeface="Inter"/>
-              </a:rPr>
               <a:t>PRIORITY FINDINGS</a:t>
             </a:r>
           </a:p>
@@ -11988,7 +9827,7 @@
         </p:nvGraphicFramePr>
         <p:xfrm>
           <a:off x="640080" y="1600200"/>
-          <a:ext cx="10908792" cy="2140059"/>
+          <a:ext cx="10908792" cy="1843833"/>
         </p:xfrm>
         <a:graphic>
           <a:graphicData uri="http://schemas.openxmlformats.org/drawingml/2006/table">
@@ -12001,7 +9840,7 @@
                 <a:gridCol w="4448556"/>
                 <a:gridCol w="4448556"/>
               </a:tblGrid>
-              <a:tr h="535014">
+              <a:tr h="460958">
                 <a:tc>
                   <a:txBody>
                     <a:bodyPr/>
@@ -12084,7 +9923,7 @@
                   </a:tcPr>
                 </a:tc>
               </a:tr>
-              <a:tr h="535014">
+              <a:tr h="460958">
                 <a:tc>
                   <a:txBody>
                     <a:bodyPr/>
@@ -12167,7 +10006,7 @@
                   </a:tcPr>
                 </a:tc>
               </a:tr>
-              <a:tr h="535014">
+              <a:tr h="460958">
                 <a:tc>
                   <a:txBody>
                     <a:bodyPr/>
@@ -12250,7 +10089,7 @@
                   </a:tcPr>
                 </a:tc>
               </a:tr>
-              <a:tr h="535017">
+              <a:tr h="460959">
                 <a:tc>
                   <a:txBody>
                     <a:bodyPr/>
@@ -12345,8 +10184,8 @@
         </p:nvSpPr>
         <p:spPr>
           <a:xfrm>
-            <a:off x="640080" y="3849987"/>
-            <a:ext cx="10908792" cy="1097445"/>
+            <a:off x="640080" y="3553761"/>
+            <a:ext cx="10908792" cy="661923"/>
           </a:xfrm>
           <a:prstGeom prst="rect">
             <a:avLst/>
@@ -12395,8 +10234,8 @@
         </p:nvSpPr>
         <p:spPr>
           <a:xfrm>
-            <a:off x="640080" y="5057160"/>
-            <a:ext cx="10908792" cy="1160759"/>
+            <a:off x="640080" y="4325412"/>
+            <a:ext cx="10908792" cy="891389"/>
           </a:xfrm>
           <a:prstGeom prst="rect">
             <a:avLst/>
@@ -12444,8 +10283,8 @@
         </p:nvSpPr>
         <p:spPr>
           <a:xfrm>
-            <a:off x="640080" y="5057160"/>
-            <a:ext cx="54864" cy="1160759"/>
+            <a:off x="640080" y="4325412"/>
+            <a:ext cx="54864" cy="891389"/>
           </a:xfrm>
           <a:prstGeom prst="rect">
             <a:avLst/>
@@ -12493,7 +10332,7 @@
         </p:nvSpPr>
         <p:spPr>
           <a:xfrm>
-            <a:off x="804671" y="5166888"/>
+            <a:off x="804671" y="4435140"/>
             <a:ext cx="10616184" cy="228600"/>
           </a:xfrm>
           <a:prstGeom prst="rect">
@@ -12535,8 +10374,8 @@
         </p:nvSpPr>
         <p:spPr>
           <a:xfrm>
-            <a:off x="804671" y="5450352"/>
-            <a:ext cx="10616184" cy="676127"/>
+            <a:off x="804671" y="4718604"/>
+            <a:ext cx="10616184" cy="406757"/>
           </a:xfrm>
           <a:prstGeom prst="rect">
             <a:avLst/>
@@ -12572,6 +10411,188 @@
       <p:sp>
         <p:nvSpPr>
           <p:cNvPr id="15" name="Rectangle 14"/>
+          <p:cNvSpPr/>
+          <p:nvPr/>
+        </p:nvSpPr>
+        <p:spPr>
+          <a:xfrm>
+            <a:off x="640080" y="5326530"/>
+            <a:ext cx="10908792" cy="891389"/>
+          </a:xfrm>
+          <a:prstGeom prst="rect">
+            <a:avLst/>
+          </a:prstGeom>
+          <a:solidFill>
+            <a:srgbClr val="F5F7F9"/>
+          </a:solidFill>
+          <a:ln>
+            <a:solidFill>
+              <a:srgbClr val="E3E7EC"/>
+            </a:solidFill>
+          </a:ln>
+        </p:spPr>
+        <p:style>
+          <a:lnRef idx="1">
+            <a:schemeClr val="accent1"/>
+          </a:lnRef>
+          <a:fillRef idx="3">
+            <a:schemeClr val="accent1"/>
+          </a:fillRef>
+          <a:effectRef idx="2">
+            <a:schemeClr val="accent1"/>
+          </a:effectRef>
+          <a:fontRef idx="minor">
+            <a:schemeClr val="lt1"/>
+          </a:fontRef>
+        </p:style>
+        <p:txBody>
+          <a:bodyPr rtlCol="0" anchor="ctr"/>
+          <a:lstStyle/>
+          <a:p>
+            <a:pPr algn="ctr">
+              <a:defRPr>
+                <a:latin typeface="Inter"/>
+              </a:defRPr>
+            </a:pPr>
+          </a:p>
+        </p:txBody>
+      </p:sp>
+      <p:sp>
+        <p:nvSpPr>
+          <p:cNvPr id="16" name="Rectangle 15"/>
+          <p:cNvSpPr/>
+          <p:nvPr/>
+        </p:nvSpPr>
+        <p:spPr>
+          <a:xfrm>
+            <a:off x="640080" y="5326530"/>
+            <a:ext cx="54864" cy="891389"/>
+          </a:xfrm>
+          <a:prstGeom prst="rect">
+            <a:avLst/>
+          </a:prstGeom>
+          <a:solidFill>
+            <a:srgbClr val="F2A93B"/>
+          </a:solidFill>
+          <a:ln>
+            <a:solidFill>
+              <a:srgbClr val="F2A93B"/>
+            </a:solidFill>
+          </a:ln>
+        </p:spPr>
+        <p:style>
+          <a:lnRef idx="1">
+            <a:schemeClr val="accent1"/>
+          </a:lnRef>
+          <a:fillRef idx="3">
+            <a:schemeClr val="accent1"/>
+          </a:fillRef>
+          <a:effectRef idx="2">
+            <a:schemeClr val="accent1"/>
+          </a:effectRef>
+          <a:fontRef idx="minor">
+            <a:schemeClr val="lt1"/>
+          </a:fontRef>
+        </p:style>
+        <p:txBody>
+          <a:bodyPr rtlCol="0" anchor="ctr"/>
+          <a:lstStyle/>
+          <a:p>
+            <a:pPr algn="ctr">
+              <a:defRPr>
+                <a:latin typeface="Inter"/>
+              </a:defRPr>
+            </a:pPr>
+          </a:p>
+        </p:txBody>
+      </p:sp>
+      <p:sp>
+        <p:nvSpPr>
+          <p:cNvPr id="17" name="TextBox 16"/>
+          <p:cNvSpPr txBox="1"/>
+          <p:nvPr/>
+        </p:nvSpPr>
+        <p:spPr>
+          <a:xfrm>
+            <a:off x="804671" y="5436258"/>
+            <a:ext cx="10616184" cy="228600"/>
+          </a:xfrm>
+          <a:prstGeom prst="rect">
+            <a:avLst/>
+          </a:prstGeom>
+          <a:noFill/>
+        </p:spPr>
+        <p:txBody>
+          <a:bodyPr wrap="none" lIns="9144" rIns="9144" tIns="9144" bIns="9144" anchor="t">
+            <a:spAutoFit/>
+          </a:bodyPr>
+          <a:lstStyle/>
+          <a:p>
+            <a:pPr algn="l">
+              <a:spcAft>
+                <a:spcPts val="0"/>
+              </a:spcAft>
+              <a:defRPr sz="1000" b="1">
+                <a:solidFill>
+                  <a:srgbClr val="0D1117"/>
+                </a:solidFill>
+                <a:latin typeface="Inter"/>
+              </a:defRPr>
+            </a:pPr>
+            <a:r>
+              <a:rPr>
+                <a:latin typeface="Inter"/>
+              </a:rPr>
+              <a:t>Analysis — fee interpretation remains open</a:t>
+            </a:r>
+          </a:p>
+        </p:txBody>
+      </p:sp>
+      <p:sp>
+        <p:nvSpPr>
+          <p:cNvPr id="18" name="TextBox 17"/>
+          <p:cNvSpPr txBox="1"/>
+          <p:nvPr/>
+        </p:nvSpPr>
+        <p:spPr>
+          <a:xfrm>
+            <a:off x="804671" y="5719722"/>
+            <a:ext cx="10616184" cy="406757"/>
+          </a:xfrm>
+          <a:prstGeom prst="rect">
+            <a:avLst/>
+          </a:prstGeom>
+          <a:noFill/>
+        </p:spPr>
+        <p:txBody>
+          <a:bodyPr wrap="none" lIns="9144" rIns="9144" tIns="9144" bIns="9144" anchor="t">
+            <a:spAutoFit/>
+          </a:bodyPr>
+          <a:lstStyle/>
+          <a:p>
+            <a:pPr algn="l">
+              <a:spcAft>
+                <a:spcPts val="0"/>
+              </a:spcAft>
+              <a:defRPr sz="950" b="0">
+                <a:solidFill>
+                  <a:srgbClr val="4A5563"/>
+                </a:solidFill>
+                <a:latin typeface="Inter"/>
+              </a:defRPr>
+            </a:pPr>
+            <a:r>
+              <a:rPr>
+                <a:latin typeface="Inter"/>
+              </a:rPr>
+              <a:t>Observation: One performance-fee term remains unclear in the disclosure schedule [S2]. Why it matters: Net-return disclosures require an explicit and complete fee basis. Uncertainty: The approved fee schedule…</a:t>
+            </a:r>
+          </a:p>
+        </p:txBody>
+      </p:sp>
+      <p:sp>
+        <p:nvSpPr>
+          <p:cNvPr id="19" name="Rectangle 18"/>
           <p:cNvSpPr/>
           <p:nvPr/>
         </p:nvSpPr>
@@ -12620,7 +10641,7 @@
       </p:sp>
       <p:sp>
         <p:nvSpPr>
-          <p:cNvPr id="16" name="TextBox 15"/>
+          <p:cNvPr id="20" name="TextBox 19"/>
           <p:cNvSpPr txBox="1"/>
           <p:nvPr/>
         </p:nvSpPr>
@@ -12662,7 +10683,7 @@
       </p:sp>
       <p:sp>
         <p:nvSpPr>
-          <p:cNvPr id="17" name="TextBox 16"/>
+          <p:cNvPr id="21" name="TextBox 20"/>
           <p:cNvSpPr txBox="1"/>
           <p:nvPr/>
         </p:nvSpPr>
@@ -12704,7 +10725,7 @@
       </p:sp>
       <p:sp>
         <p:nvSpPr>
-          <p:cNvPr id="18" name="TextBox 17"/>
+          <p:cNvPr id="22" name="TextBox 21"/>
           <p:cNvSpPr txBox="1"/>
           <p:nvPr/>
         </p:nvSpPr>
@@ -12739,7 +10760,7 @@
               <a:rPr>
                 <a:latin typeface="Inter"/>
               </a:rPr>
-              <a:t>7</a:t>
+              <a:t>6</a:t>
             </a:r>
           </a:p>
         </p:txBody>
@@ -12752,7 +10773,7 @@
 </p:sld>
 </file>
 
-<file path=ppt/slides/slide8.xml><?xml version="1.0" encoding="utf-8"?>
+<file path=ppt/slides/slide7.xml><?xml version="1.0" encoding="utf-8"?>
 <p:sld xmlns:a="http://schemas.openxmlformats.org/drawingml/2006/main" xmlns:p="http://schemas.openxmlformats.org/presentationml/2006/main" xmlns:r="http://schemas.openxmlformats.org/officeDocument/2006/relationships">
   <p:cSld>
     <p:spTree>
@@ -12890,7 +10911,7 @@
               <a:rPr>
                 <a:latin typeface="Inter"/>
               </a:rPr>
-              <a:t>Findings — continued</a:t>
+              <a:t>Preparer fix list</a:t>
             </a:r>
           </a:p>
         </p:txBody>
@@ -13030,654 +11051,6 @@
               <a:rPr>
                 <a:latin typeface="Inter"/>
               </a:rPr>
-              <a:t>02</a:t>
-            </a:r>
-          </a:p>
-        </p:txBody>
-      </p:sp>
-      <p:sp>
-        <p:nvSpPr>
-          <p:cNvPr id="8" name="Rectangle 7"/>
-          <p:cNvSpPr/>
-          <p:nvPr/>
-        </p:nvSpPr>
-        <p:spPr>
-          <a:xfrm>
-            <a:off x="640080" y="1325880"/>
-            <a:ext cx="10908792" cy="4892040"/>
-          </a:xfrm>
-          <a:prstGeom prst="rect">
-            <a:avLst/>
-          </a:prstGeom>
-          <a:solidFill>
-            <a:srgbClr val="F5F7F9"/>
-          </a:solidFill>
-          <a:ln>
-            <a:solidFill>
-              <a:srgbClr val="E3E7EC"/>
-            </a:solidFill>
-          </a:ln>
-        </p:spPr>
-        <p:style>
-          <a:lnRef idx="1">
-            <a:schemeClr val="accent1"/>
-          </a:lnRef>
-          <a:fillRef idx="3">
-            <a:schemeClr val="accent1"/>
-          </a:fillRef>
-          <a:effectRef idx="2">
-            <a:schemeClr val="accent1"/>
-          </a:effectRef>
-          <a:fontRef idx="minor">
-            <a:schemeClr val="lt1"/>
-          </a:fontRef>
-        </p:style>
-        <p:txBody>
-          <a:bodyPr rtlCol="0" anchor="ctr"/>
-          <a:lstStyle/>
-          <a:p>
-            <a:pPr algn="ctr">
-              <a:defRPr>
-                <a:latin typeface="Inter"/>
-              </a:defRPr>
-            </a:pPr>
-          </a:p>
-        </p:txBody>
-      </p:sp>
-      <p:sp>
-        <p:nvSpPr>
-          <p:cNvPr id="9" name="Rectangle 8"/>
-          <p:cNvSpPr/>
-          <p:nvPr/>
-        </p:nvSpPr>
-        <p:spPr>
-          <a:xfrm>
-            <a:off x="640080" y="1325880"/>
-            <a:ext cx="54864" cy="4892040"/>
-          </a:xfrm>
-          <a:prstGeom prst="rect">
-            <a:avLst/>
-          </a:prstGeom>
-          <a:solidFill>
-            <a:srgbClr val="F2A93B"/>
-          </a:solidFill>
-          <a:ln>
-            <a:solidFill>
-              <a:srgbClr val="F2A93B"/>
-            </a:solidFill>
-          </a:ln>
-        </p:spPr>
-        <p:style>
-          <a:lnRef idx="1">
-            <a:schemeClr val="accent1"/>
-          </a:lnRef>
-          <a:fillRef idx="3">
-            <a:schemeClr val="accent1"/>
-          </a:fillRef>
-          <a:effectRef idx="2">
-            <a:schemeClr val="accent1"/>
-          </a:effectRef>
-          <a:fontRef idx="minor">
-            <a:schemeClr val="lt1"/>
-          </a:fontRef>
-        </p:style>
-        <p:txBody>
-          <a:bodyPr rtlCol="0" anchor="ctr"/>
-          <a:lstStyle/>
-          <a:p>
-            <a:pPr algn="ctr">
-              <a:defRPr>
-                <a:latin typeface="Inter"/>
-              </a:defRPr>
-            </a:pPr>
-          </a:p>
-        </p:txBody>
-      </p:sp>
-      <p:sp>
-        <p:nvSpPr>
-          <p:cNvPr id="10" name="TextBox 9"/>
-          <p:cNvSpPr txBox="1"/>
-          <p:nvPr/>
-        </p:nvSpPr>
-        <p:spPr>
-          <a:xfrm>
-            <a:off x="804671" y="1435607"/>
-            <a:ext cx="10616184" cy="228600"/>
-          </a:xfrm>
-          <a:prstGeom prst="rect">
-            <a:avLst/>
-          </a:prstGeom>
-          <a:noFill/>
-        </p:spPr>
-        <p:txBody>
-          <a:bodyPr wrap="none" lIns="9144" rIns="9144" tIns="9144" bIns="9144" anchor="t">
-            <a:spAutoFit/>
-          </a:bodyPr>
-          <a:lstStyle/>
-          <a:p>
-            <a:pPr algn="l">
-              <a:spcAft>
-                <a:spcPts val="0"/>
-              </a:spcAft>
-              <a:defRPr sz="1000" b="1">
-                <a:solidFill>
-                  <a:srgbClr val="0D1117"/>
-                </a:solidFill>
-                <a:latin typeface="Inter"/>
-              </a:defRPr>
-            </a:pPr>
-            <a:r>
-              <a:rPr>
-                <a:latin typeface="Inter"/>
-              </a:rPr>
-              <a:t>Analysis — fee interpretation remains open</a:t>
-            </a:r>
-          </a:p>
-        </p:txBody>
-      </p:sp>
-      <p:sp>
-        <p:nvSpPr>
-          <p:cNvPr id="11" name="TextBox 10"/>
-          <p:cNvSpPr txBox="1"/>
-          <p:nvPr/>
-        </p:nvSpPr>
-        <p:spPr>
-          <a:xfrm>
-            <a:off x="804671" y="1719072"/>
-            <a:ext cx="10616184" cy="4407408"/>
-          </a:xfrm>
-          <a:prstGeom prst="rect">
-            <a:avLst/>
-          </a:prstGeom>
-          <a:noFill/>
-        </p:spPr>
-        <p:txBody>
-          <a:bodyPr wrap="none" lIns="9144" rIns="9144" tIns="9144" bIns="9144" anchor="t">
-            <a:spAutoFit/>
-          </a:bodyPr>
-          <a:lstStyle/>
-          <a:p>
-            <a:pPr algn="l">
-              <a:spcAft>
-                <a:spcPts val="0"/>
-              </a:spcAft>
-              <a:defRPr sz="950" b="0">
-                <a:solidFill>
-                  <a:srgbClr val="4A5563"/>
-                </a:solidFill>
-                <a:latin typeface="Inter"/>
-              </a:defRPr>
-            </a:pPr>
-            <a:r>
-              <a:rPr>
-                <a:latin typeface="Inter"/>
-              </a:rPr>
-              <a:t>Observation: One performance-fee term remains unclear in the disclosure schedule [S2]. Why it matters: Net-return disclosures require an explicit and complete fee basis. Uncertainty: The approved fee schedule…</a:t>
-            </a:r>
-          </a:p>
-        </p:txBody>
-      </p:sp>
-      <p:sp>
-        <p:nvSpPr>
-          <p:cNvPr id="12" name="Rectangle 11"/>
-          <p:cNvSpPr/>
-          <p:nvPr/>
-        </p:nvSpPr>
-        <p:spPr>
-          <a:xfrm>
-            <a:off x="640080" y="6446520"/>
-            <a:ext cx="10908792" cy="9144"/>
-          </a:xfrm>
-          <a:prstGeom prst="rect">
-            <a:avLst/>
-          </a:prstGeom>
-          <a:solidFill>
-            <a:srgbClr val="E3E7EC"/>
-          </a:solidFill>
-          <a:ln>
-            <a:solidFill>
-              <a:srgbClr val="E3E7EC"/>
-            </a:solidFill>
-          </a:ln>
-        </p:spPr>
-        <p:style>
-          <a:lnRef idx="1">
-            <a:schemeClr val="accent1"/>
-          </a:lnRef>
-          <a:fillRef idx="3">
-            <a:schemeClr val="accent1"/>
-          </a:fillRef>
-          <a:effectRef idx="2">
-            <a:schemeClr val="accent1"/>
-          </a:effectRef>
-          <a:fontRef idx="minor">
-            <a:schemeClr val="lt1"/>
-          </a:fontRef>
-        </p:style>
-        <p:txBody>
-          <a:bodyPr rtlCol="0" anchor="ctr"/>
-          <a:lstStyle/>
-          <a:p>
-            <a:pPr algn="ctr">
-              <a:defRPr>
-                <a:latin typeface="Inter"/>
-              </a:defRPr>
-            </a:pPr>
-          </a:p>
-        </p:txBody>
-      </p:sp>
-      <p:sp>
-        <p:nvSpPr>
-          <p:cNvPr id="13" name="TextBox 12"/>
-          <p:cNvSpPr txBox="1"/>
-          <p:nvPr/>
-        </p:nvSpPr>
-        <p:spPr>
-          <a:xfrm>
-            <a:off x="640080" y="6501384"/>
-            <a:ext cx="4297680" cy="146304"/>
-          </a:xfrm>
-          <a:prstGeom prst="rect">
-            <a:avLst/>
-          </a:prstGeom>
-          <a:noFill/>
-        </p:spPr>
-        <p:txBody>
-          <a:bodyPr wrap="none" lIns="9144" rIns="9144" tIns="9144" bIns="9144" anchor="t">
-            <a:spAutoFit/>
-          </a:bodyPr>
-          <a:lstStyle/>
-          <a:p>
-            <a:pPr algn="l">
-              <a:spcAft>
-                <a:spcPts val="0"/>
-              </a:spcAft>
-              <a:defRPr sz="650" b="0">
-                <a:solidFill>
-                  <a:srgbClr val="8A94A1"/>
-                </a:solidFill>
-                <a:latin typeface="Inter"/>
-              </a:defRPr>
-            </a:pPr>
-            <a:r>
-              <a:rPr>
-                <a:latin typeface="Inter"/>
-              </a:rPr>
-              <a:t>Sources: S2</a:t>
-            </a:r>
-          </a:p>
-        </p:txBody>
-      </p:sp>
-      <p:sp>
-        <p:nvSpPr>
-          <p:cNvPr id="14" name="TextBox 13"/>
-          <p:cNvSpPr txBox="1"/>
-          <p:nvPr/>
-        </p:nvSpPr>
-        <p:spPr>
-          <a:xfrm>
-            <a:off x="4480560" y="6501384"/>
-            <a:ext cx="5303520" cy="146304"/>
-          </a:xfrm>
-          <a:prstGeom prst="rect">
-            <a:avLst/>
-          </a:prstGeom>
-          <a:noFill/>
-        </p:spPr>
-        <p:txBody>
-          <a:bodyPr wrap="none" lIns="9144" rIns="9144" tIns="9144" bIns="9144" anchor="t">
-            <a:spAutoFit/>
-          </a:bodyPr>
-          <a:lstStyle/>
-          <a:p>
-            <a:pPr algn="ctr">
-              <a:spcAft>
-                <a:spcPts val="0"/>
-              </a:spcAft>
-              <a:defRPr sz="650" b="0">
-                <a:solidFill>
-                  <a:srgbClr val="8A94A1"/>
-                </a:solidFill>
-                <a:latin typeface="Inter"/>
-              </a:defRPr>
-            </a:pPr>
-            <a:r>
-              <a:rPr>
-                <a:latin typeface="Inter"/>
-              </a:rPr>
-              <a:t>Confidential — performance standards review · Data as of 2025-12-31</a:t>
-            </a:r>
-          </a:p>
-        </p:txBody>
-      </p:sp>
-      <p:sp>
-        <p:nvSpPr>
-          <p:cNvPr id="15" name="TextBox 14"/>
-          <p:cNvSpPr txBox="1"/>
-          <p:nvPr/>
-        </p:nvSpPr>
-        <p:spPr>
-          <a:xfrm>
-            <a:off x="10287000" y="6501384"/>
-            <a:ext cx="1261872" cy="146304"/>
-          </a:xfrm>
-          <a:prstGeom prst="rect">
-            <a:avLst/>
-          </a:prstGeom>
-          <a:noFill/>
-        </p:spPr>
-        <p:txBody>
-          <a:bodyPr wrap="none" lIns="9144" rIns="9144" tIns="9144" bIns="9144" anchor="t">
-            <a:spAutoFit/>
-          </a:bodyPr>
-          <a:lstStyle/>
-          <a:p>
-            <a:pPr algn="r">
-              <a:spcAft>
-                <a:spcPts val="0"/>
-              </a:spcAft>
-              <a:defRPr sz="650" b="0">
-                <a:solidFill>
-                  <a:srgbClr val="8A94A1"/>
-                </a:solidFill>
-                <a:latin typeface="Inter"/>
-              </a:defRPr>
-            </a:pPr>
-            <a:r>
-              <a:rPr>
-                <a:latin typeface="Inter"/>
-              </a:rPr>
-              <a:t>8</a:t>
-            </a:r>
-          </a:p>
-        </p:txBody>
-      </p:sp>
-    </p:spTree>
-  </p:cSld>
-  <p:clrMapOvr>
-    <a:masterClrMapping/>
-  </p:clrMapOvr>
-</p:sld>
-</file>
-
-<file path=ppt/slides/slide9.xml><?xml version="1.0" encoding="utf-8"?>
-<p:sld xmlns:a="http://schemas.openxmlformats.org/drawingml/2006/main" xmlns:p="http://schemas.openxmlformats.org/presentationml/2006/main" xmlns:r="http://schemas.openxmlformats.org/officeDocument/2006/relationships">
-  <p:cSld>
-    <p:spTree>
-      <p:nvGrpSpPr>
-        <p:cNvPr id="1" name=""/>
-        <p:cNvGrpSpPr/>
-        <p:nvPr/>
-      </p:nvGrpSpPr>
-      <p:grpSpPr/>
-      <p:sp>
-        <p:nvSpPr>
-          <p:cNvPr id="2" name="Rectangle 1"/>
-          <p:cNvSpPr/>
-          <p:nvPr/>
-        </p:nvSpPr>
-        <p:spPr>
-          <a:xfrm>
-            <a:off x="0" y="0"/>
-            <a:ext cx="12191695" cy="6858000"/>
-          </a:xfrm>
-          <a:prstGeom prst="rect">
-            <a:avLst/>
-          </a:prstGeom>
-          <a:solidFill>
-            <a:srgbClr val="FFFFFF"/>
-          </a:solidFill>
-          <a:ln>
-            <a:solidFill>
-              <a:srgbClr val="FFFFFF"/>
-            </a:solidFill>
-          </a:ln>
-        </p:spPr>
-        <p:style>
-          <a:lnRef idx="1">
-            <a:schemeClr val="accent1"/>
-          </a:lnRef>
-          <a:fillRef idx="3">
-            <a:schemeClr val="accent1"/>
-          </a:fillRef>
-          <a:effectRef idx="2">
-            <a:schemeClr val="accent1"/>
-          </a:effectRef>
-          <a:fontRef idx="minor">
-            <a:schemeClr val="lt1"/>
-          </a:fontRef>
-        </p:style>
-        <p:txBody>
-          <a:bodyPr rtlCol="0" anchor="ctr"/>
-          <a:lstStyle/>
-          <a:p>
-            <a:pPr algn="ctr">
-              <a:defRPr>
-                <a:latin typeface="Inter"/>
-              </a:defRPr>
-            </a:pPr>
-          </a:p>
-        </p:txBody>
-      </p:sp>
-      <p:sp>
-        <p:nvSpPr>
-          <p:cNvPr id="3" name="TextBox 2"/>
-          <p:cNvSpPr txBox="1"/>
-          <p:nvPr/>
-        </p:nvSpPr>
-        <p:spPr>
-          <a:xfrm>
-            <a:off x="5897880" y="310896"/>
-            <a:ext cx="4800600" cy="256032"/>
-          </a:xfrm>
-          <a:prstGeom prst="rect">
-            <a:avLst/>
-          </a:prstGeom>
-          <a:noFill/>
-        </p:spPr>
-        <p:txBody>
-          <a:bodyPr wrap="none" lIns="9144" rIns="9144" tIns="9144" bIns="9144" anchor="t">
-            <a:spAutoFit/>
-          </a:bodyPr>
-          <a:lstStyle/>
-          <a:p>
-            <a:pPr algn="r">
-              <a:spcAft>
-                <a:spcPts val="0"/>
-              </a:spcAft>
-              <a:defRPr sz="680" b="1">
-                <a:solidFill>
-                  <a:srgbClr val="4F6B00"/>
-                </a:solidFill>
-                <a:latin typeface="Inter"/>
-              </a:defRPr>
-            </a:pPr>
-            <a:r>
-              <a:rPr>
-                <a:latin typeface="Inter"/>
-              </a:rPr>
-              <a:t>Illustrative, Gradient Maintained — demo data, not the client's holdings or managers</a:t>
-            </a:r>
-          </a:p>
-        </p:txBody>
-      </p:sp>
-      <p:sp>
-        <p:nvSpPr>
-          <p:cNvPr id="4" name="TextBox 3"/>
-          <p:cNvSpPr txBox="1"/>
-          <p:nvPr/>
-        </p:nvSpPr>
-        <p:spPr>
-          <a:xfrm>
-            <a:off x="640080" y="566928"/>
-            <a:ext cx="10058400" cy="530352"/>
-          </a:xfrm>
-          <a:prstGeom prst="rect">
-            <a:avLst/>
-          </a:prstGeom>
-          <a:noFill/>
-        </p:spPr>
-        <p:txBody>
-          <a:bodyPr wrap="none" lIns="9144" rIns="9144" tIns="9144" bIns="9144" anchor="t">
-            <a:spAutoFit/>
-          </a:bodyPr>
-          <a:lstStyle/>
-          <a:p>
-            <a:pPr algn="l">
-              <a:spcAft>
-                <a:spcPts val="0"/>
-              </a:spcAft>
-              <a:defRPr sz="2300" b="1">
-                <a:solidFill>
-                  <a:srgbClr val="0D1117"/>
-                </a:solidFill>
-                <a:latin typeface="Inter"/>
-              </a:defRPr>
-            </a:pPr>
-            <a:r>
-              <a:rPr>
-                <a:latin typeface="Inter"/>
-              </a:rPr>
-              <a:t>Preparer fix list</a:t>
-            </a:r>
-          </a:p>
-        </p:txBody>
-      </p:sp>
-      <p:sp>
-        <p:nvSpPr>
-          <p:cNvPr id="5" name="Rectangle 4"/>
-          <p:cNvSpPr/>
-          <p:nvPr/>
-        </p:nvSpPr>
-        <p:spPr>
-          <a:xfrm>
-            <a:off x="640080" y="1115568"/>
-            <a:ext cx="10908792" cy="18288"/>
-          </a:xfrm>
-          <a:prstGeom prst="rect">
-            <a:avLst/>
-          </a:prstGeom>
-          <a:solidFill>
-            <a:srgbClr val="0D1117"/>
-          </a:solidFill>
-          <a:ln>
-            <a:solidFill>
-              <a:srgbClr val="0D1117"/>
-            </a:solidFill>
-          </a:ln>
-        </p:spPr>
-        <p:style>
-          <a:lnRef idx="1">
-            <a:schemeClr val="accent1"/>
-          </a:lnRef>
-          <a:fillRef idx="3">
-            <a:schemeClr val="accent1"/>
-          </a:fillRef>
-          <a:effectRef idx="2">
-            <a:schemeClr val="accent1"/>
-          </a:effectRef>
-          <a:fontRef idx="minor">
-            <a:schemeClr val="lt1"/>
-          </a:fontRef>
-        </p:style>
-        <p:txBody>
-          <a:bodyPr rtlCol="0" anchor="ctr"/>
-          <a:lstStyle/>
-          <a:p>
-            <a:pPr algn="ctr">
-              <a:defRPr>
-                <a:latin typeface="Inter"/>
-              </a:defRPr>
-            </a:pPr>
-          </a:p>
-        </p:txBody>
-      </p:sp>
-      <p:sp>
-        <p:nvSpPr>
-          <p:cNvPr id="6" name="Rectangle 5"/>
-          <p:cNvSpPr/>
-          <p:nvPr/>
-        </p:nvSpPr>
-        <p:spPr>
-          <a:xfrm>
-            <a:off x="11018520" y="502920"/>
-            <a:ext cx="530352" cy="393192"/>
-          </a:xfrm>
-          <a:prstGeom prst="rect">
-            <a:avLst/>
-          </a:prstGeom>
-          <a:solidFill>
-            <a:srgbClr val="C6F432"/>
-          </a:solidFill>
-          <a:ln>
-            <a:solidFill>
-              <a:srgbClr val="C6F432"/>
-            </a:solidFill>
-          </a:ln>
-        </p:spPr>
-        <p:style>
-          <a:lnRef idx="1">
-            <a:schemeClr val="accent1"/>
-          </a:lnRef>
-          <a:fillRef idx="3">
-            <a:schemeClr val="accent1"/>
-          </a:fillRef>
-          <a:effectRef idx="2">
-            <a:schemeClr val="accent1"/>
-          </a:effectRef>
-          <a:fontRef idx="minor">
-            <a:schemeClr val="lt1"/>
-          </a:fontRef>
-        </p:style>
-        <p:txBody>
-          <a:bodyPr rtlCol="0" anchor="ctr"/>
-          <a:lstStyle/>
-          <a:p>
-            <a:pPr algn="ctr">
-              <a:defRPr>
-                <a:latin typeface="Inter"/>
-              </a:defRPr>
-            </a:pPr>
-          </a:p>
-        </p:txBody>
-      </p:sp>
-      <p:sp>
-        <p:nvSpPr>
-          <p:cNvPr id="7" name="TextBox 6"/>
-          <p:cNvSpPr txBox="1"/>
-          <p:nvPr/>
-        </p:nvSpPr>
-        <p:spPr>
-          <a:xfrm>
-            <a:off x="11045952" y="557784"/>
-            <a:ext cx="475488" cy="182880"/>
-          </a:xfrm>
-          <a:prstGeom prst="rect">
-            <a:avLst/>
-          </a:prstGeom>
-          <a:noFill/>
-        </p:spPr>
-        <p:txBody>
-          <a:bodyPr wrap="none" lIns="9144" rIns="9144" tIns="9144" bIns="9144" anchor="t">
-            <a:spAutoFit/>
-          </a:bodyPr>
-          <a:lstStyle/>
-          <a:p>
-            <a:pPr algn="ctr">
-              <a:spcAft>
-                <a:spcPts val="0"/>
-              </a:spcAft>
-              <a:defRPr sz="1000" b="1">
-                <a:solidFill>
-                  <a:srgbClr val="0D1117"/>
-                </a:solidFill>
-                <a:latin typeface="Inter"/>
-              </a:defRPr>
-            </a:pPr>
-            <a:r>
-              <a:rPr>
-                <a:latin typeface="Inter"/>
-              </a:rPr>
               <a:t>03</a:t>
             </a:r>
           </a:p>
@@ -13735,7 +11108,7 @@
         </p:nvGraphicFramePr>
         <p:xfrm>
           <a:off x="640080" y="1600200"/>
-          <a:ext cx="10908792" cy="4617720"/>
+          <a:ext cx="10908792" cy="3959352"/>
         </p:xfrm>
         <a:graphic>
           <a:graphicData uri="http://schemas.openxmlformats.org/drawingml/2006/table">
@@ -13748,7 +11121,7 @@
                 <a:gridCol w="3636264"/>
                 <a:gridCol w="3636264"/>
               </a:tblGrid>
-              <a:tr h="923544">
+              <a:tr h="791870">
                 <a:tc>
                   <a:txBody>
                     <a:bodyPr/>
@@ -13825,7 +11198,7 @@
                   </a:tcPr>
                 </a:tc>
               </a:tr>
-              <a:tr h="923544">
+              <a:tr h="791870">
                 <a:tc>
                   <a:txBody>
                     <a:bodyPr/>
@@ -13908,7 +11281,7 @@
                   </a:tcPr>
                 </a:tc>
               </a:tr>
-              <a:tr h="923544">
+              <a:tr h="791870">
                 <a:tc>
                   <a:txBody>
                     <a:bodyPr/>
@@ -13991,7 +11364,7 @@
                   </a:tcPr>
                 </a:tc>
               </a:tr>
-              <a:tr h="923544">
+              <a:tr h="791870">
                 <a:tc>
                   <a:txBody>
                     <a:bodyPr/>
@@ -14074,7 +11447,7 @@
                   </a:tcPr>
                 </a:tc>
               </a:tr>
-              <a:tr h="923544">
+              <a:tr h="791872">
                 <a:tc>
                   <a:txBody>
                     <a:bodyPr/>
@@ -14163,7 +11536,68 @@
       </p:graphicFrame>
       <p:sp>
         <p:nvSpPr>
-          <p:cNvPr id="10" name="Rectangle 9"/>
+          <p:cNvPr id="10" name="TextBox 9"/>
+          <p:cNvSpPr txBox="1"/>
+          <p:nvPr/>
+        </p:nvSpPr>
+        <p:spPr>
+          <a:xfrm>
+            <a:off x="640080" y="5669280"/>
+            <a:ext cx="10908792" cy="548640"/>
+          </a:xfrm>
+          <a:prstGeom prst="rect">
+            <a:avLst/>
+          </a:prstGeom>
+          <a:noFill/>
+        </p:spPr>
+        <p:txBody>
+          <a:bodyPr wrap="none" lIns="9144" rIns="9144" tIns="9144" bIns="9144" anchor="t">
+            <a:spAutoFit/>
+          </a:bodyPr>
+          <a:lstStyle/>
+          <a:p>
+            <a:pPr algn="l">
+              <a:spcAft>
+                <a:spcPts val="500"/>
+              </a:spcAft>
+              <a:defRPr sz="1050" b="0">
+                <a:solidFill>
+                  <a:srgbClr val="0D1117"/>
+                </a:solidFill>
+                <a:latin typeface="Inter"/>
+              </a:defRPr>
+            </a:pPr>
+            <a:r>
+              <a:rPr>
+                <a:latin typeface="Inter"/>
+              </a:rPr>
+              <a:t>•  Add the significant event's effective date to the report before the next issue (4.C.19) [S1].</a:t>
+            </a:r>
+          </a:p>
+          <a:p>
+            <a:pPr algn="l">
+              <a:spcAft>
+                <a:spcPts val="500"/>
+              </a:spcAft>
+              <a:defRPr sz="1050" b="0">
+                <a:solidFill>
+                  <a:srgbClr val="0D1117"/>
+                </a:solidFill>
+                <a:latin typeface="Inter"/>
+              </a:defRPr>
+            </a:pPr>
+            <a:r>
+              <a:rPr>
+                <a:latin typeface="Inter"/>
+              </a:rPr>
+              <a:t>•  State the complete management and performance fee schedule in the disclosure note (4.C.11) [S2].</a:t>
+            </a:r>
+          </a:p>
+        </p:txBody>
+      </p:sp>
+      <p:sp>
+        <p:nvSpPr>
+          <p:cNvPr id="11" name="Rectangle 10"/>
           <p:cNvSpPr/>
           <p:nvPr/>
         </p:nvSpPr>
@@ -14212,7 +11646,7 @@
       </p:sp>
       <p:sp>
         <p:nvSpPr>
-          <p:cNvPr id="11" name="TextBox 10"/>
+          <p:cNvPr id="12" name="TextBox 11"/>
           <p:cNvSpPr txBox="1"/>
           <p:nvPr/>
         </p:nvSpPr>
@@ -14254,7 +11688,7 @@
       </p:sp>
       <p:sp>
         <p:nvSpPr>
-          <p:cNvPr id="12" name="TextBox 11"/>
+          <p:cNvPr id="13" name="TextBox 12"/>
           <p:cNvSpPr txBox="1"/>
           <p:nvPr/>
         </p:nvSpPr>
@@ -14296,7 +11730,1157 @@
       </p:sp>
       <p:sp>
         <p:nvSpPr>
+          <p:cNvPr id="14" name="TextBox 13"/>
+          <p:cNvSpPr txBox="1"/>
+          <p:nvPr/>
+        </p:nvSpPr>
+        <p:spPr>
+          <a:xfrm>
+            <a:off x="10287000" y="6501384"/>
+            <a:ext cx="1261872" cy="146304"/>
+          </a:xfrm>
+          <a:prstGeom prst="rect">
+            <a:avLst/>
+          </a:prstGeom>
+          <a:noFill/>
+        </p:spPr>
+        <p:txBody>
+          <a:bodyPr wrap="none" lIns="9144" rIns="9144" tIns="9144" bIns="9144" anchor="t">
+            <a:spAutoFit/>
+          </a:bodyPr>
+          <a:lstStyle/>
+          <a:p>
+            <a:pPr algn="r">
+              <a:spcAft>
+                <a:spcPts val="0"/>
+              </a:spcAft>
+              <a:defRPr sz="650" b="0">
+                <a:solidFill>
+                  <a:srgbClr val="8A94A1"/>
+                </a:solidFill>
+                <a:latin typeface="Inter"/>
+              </a:defRPr>
+            </a:pPr>
+            <a:r>
+              <a:rPr>
+                <a:latin typeface="Inter"/>
+              </a:rPr>
+              <a:t>7</a:t>
+            </a:r>
+          </a:p>
+        </p:txBody>
+      </p:sp>
+    </p:spTree>
+  </p:cSld>
+  <p:clrMapOvr>
+    <a:masterClrMapping/>
+  </p:clrMapOvr>
+</p:sld>
+</file>
+
+<file path=ppt/slides/slide8.xml><?xml version="1.0" encoding="utf-8"?>
+<p:sld xmlns:a="http://schemas.openxmlformats.org/drawingml/2006/main" xmlns:p="http://schemas.openxmlformats.org/presentationml/2006/main" xmlns:r="http://schemas.openxmlformats.org/officeDocument/2006/relationships">
+  <p:cSld>
+    <p:spTree>
+      <p:nvGrpSpPr>
+        <p:cNvPr id="1" name=""/>
+        <p:cNvGrpSpPr/>
+        <p:nvPr/>
+      </p:nvGrpSpPr>
+      <p:grpSpPr/>
+      <p:sp>
+        <p:nvSpPr>
+          <p:cNvPr id="2" name="Rectangle 1"/>
+          <p:cNvSpPr/>
+          <p:nvPr/>
+        </p:nvSpPr>
+        <p:spPr>
+          <a:xfrm>
+            <a:off x="0" y="0"/>
+            <a:ext cx="12191695" cy="6858000"/>
+          </a:xfrm>
+          <a:prstGeom prst="rect">
+            <a:avLst/>
+          </a:prstGeom>
+          <a:solidFill>
+            <a:srgbClr val="FFFFFF"/>
+          </a:solidFill>
+          <a:ln>
+            <a:solidFill>
+              <a:srgbClr val="FFFFFF"/>
+            </a:solidFill>
+          </a:ln>
+        </p:spPr>
+        <p:style>
+          <a:lnRef idx="1">
+            <a:schemeClr val="accent1"/>
+          </a:lnRef>
+          <a:fillRef idx="3">
+            <a:schemeClr val="accent1"/>
+          </a:fillRef>
+          <a:effectRef idx="2">
+            <a:schemeClr val="accent1"/>
+          </a:effectRef>
+          <a:fontRef idx="minor">
+            <a:schemeClr val="lt1"/>
+          </a:fontRef>
+        </p:style>
+        <p:txBody>
+          <a:bodyPr rtlCol="0" anchor="ctr"/>
+          <a:lstStyle/>
+          <a:p>
+            <a:pPr algn="ctr">
+              <a:defRPr>
+                <a:latin typeface="Inter"/>
+              </a:defRPr>
+            </a:pPr>
+          </a:p>
+        </p:txBody>
+      </p:sp>
+      <p:sp>
+        <p:nvSpPr>
+          <p:cNvPr id="3" name="TextBox 2"/>
+          <p:cNvSpPr txBox="1"/>
+          <p:nvPr/>
+        </p:nvSpPr>
+        <p:spPr>
+          <a:xfrm>
+            <a:off x="5897880" y="310896"/>
+            <a:ext cx="4800600" cy="256032"/>
+          </a:xfrm>
+          <a:prstGeom prst="rect">
+            <a:avLst/>
+          </a:prstGeom>
+          <a:noFill/>
+        </p:spPr>
+        <p:txBody>
+          <a:bodyPr wrap="none" lIns="9144" rIns="9144" tIns="9144" bIns="9144" anchor="t">
+            <a:spAutoFit/>
+          </a:bodyPr>
+          <a:lstStyle/>
+          <a:p>
+            <a:pPr algn="r">
+              <a:spcAft>
+                <a:spcPts val="0"/>
+              </a:spcAft>
+              <a:defRPr sz="680" b="1">
+                <a:solidFill>
+                  <a:srgbClr val="4F6B00"/>
+                </a:solidFill>
+                <a:latin typeface="Inter"/>
+              </a:defRPr>
+            </a:pPr>
+            <a:r>
+              <a:rPr>
+                <a:latin typeface="Inter"/>
+              </a:rPr>
+              <a:t>Illustrative, Gradient Maintained — demo data, not the client's holdings or managers</a:t>
+            </a:r>
+          </a:p>
+        </p:txBody>
+      </p:sp>
+      <p:sp>
+        <p:nvSpPr>
+          <p:cNvPr id="4" name="TextBox 3"/>
+          <p:cNvSpPr txBox="1"/>
+          <p:nvPr/>
+        </p:nvSpPr>
+        <p:spPr>
+          <a:xfrm>
+            <a:off x="640080" y="566928"/>
+            <a:ext cx="10058400" cy="530352"/>
+          </a:xfrm>
+          <a:prstGeom prst="rect">
+            <a:avLst/>
+          </a:prstGeom>
+          <a:noFill/>
+        </p:spPr>
+        <p:txBody>
+          <a:bodyPr wrap="none" lIns="9144" rIns="9144" tIns="9144" bIns="9144" anchor="t">
+            <a:spAutoFit/>
+          </a:bodyPr>
+          <a:lstStyle/>
+          <a:p>
+            <a:pPr algn="l">
+              <a:spcAft>
+                <a:spcPts val="0"/>
+              </a:spcAft>
+              <a:defRPr sz="2300" b="1">
+                <a:solidFill>
+                  <a:srgbClr val="0D1117"/>
+                </a:solidFill>
+                <a:latin typeface="Inter"/>
+              </a:defRPr>
+            </a:pPr>
+            <a:r>
+              <a:rPr>
+                <a:latin typeface="Inter"/>
+              </a:rPr>
+              <a:t>Follow-up requests</a:t>
+            </a:r>
+          </a:p>
+        </p:txBody>
+      </p:sp>
+      <p:sp>
+        <p:nvSpPr>
+          <p:cNvPr id="5" name="Rectangle 4"/>
+          <p:cNvSpPr/>
+          <p:nvPr/>
+        </p:nvSpPr>
+        <p:spPr>
+          <a:xfrm>
+            <a:off x="640080" y="1115568"/>
+            <a:ext cx="10908792" cy="18288"/>
+          </a:xfrm>
+          <a:prstGeom prst="rect">
+            <a:avLst/>
+          </a:prstGeom>
+          <a:solidFill>
+            <a:srgbClr val="0D1117"/>
+          </a:solidFill>
+          <a:ln>
+            <a:solidFill>
+              <a:srgbClr val="0D1117"/>
+            </a:solidFill>
+          </a:ln>
+        </p:spPr>
+        <p:style>
+          <a:lnRef idx="1">
+            <a:schemeClr val="accent1"/>
+          </a:lnRef>
+          <a:fillRef idx="3">
+            <a:schemeClr val="accent1"/>
+          </a:fillRef>
+          <a:effectRef idx="2">
+            <a:schemeClr val="accent1"/>
+          </a:effectRef>
+          <a:fontRef idx="minor">
+            <a:schemeClr val="lt1"/>
+          </a:fontRef>
+        </p:style>
+        <p:txBody>
+          <a:bodyPr rtlCol="0" anchor="ctr"/>
+          <a:lstStyle/>
+          <a:p>
+            <a:pPr algn="ctr">
+              <a:defRPr>
+                <a:latin typeface="Inter"/>
+              </a:defRPr>
+            </a:pPr>
+          </a:p>
+        </p:txBody>
+      </p:sp>
+      <p:sp>
+        <p:nvSpPr>
+          <p:cNvPr id="6" name="Rectangle 5"/>
+          <p:cNvSpPr/>
+          <p:nvPr/>
+        </p:nvSpPr>
+        <p:spPr>
+          <a:xfrm>
+            <a:off x="11018520" y="502920"/>
+            <a:ext cx="530352" cy="393192"/>
+          </a:xfrm>
+          <a:prstGeom prst="rect">
+            <a:avLst/>
+          </a:prstGeom>
+          <a:solidFill>
+            <a:srgbClr val="C6F432"/>
+          </a:solidFill>
+          <a:ln>
+            <a:solidFill>
+              <a:srgbClr val="C6F432"/>
+            </a:solidFill>
+          </a:ln>
+        </p:spPr>
+        <p:style>
+          <a:lnRef idx="1">
+            <a:schemeClr val="accent1"/>
+          </a:lnRef>
+          <a:fillRef idx="3">
+            <a:schemeClr val="accent1"/>
+          </a:fillRef>
+          <a:effectRef idx="2">
+            <a:schemeClr val="accent1"/>
+          </a:effectRef>
+          <a:fontRef idx="minor">
+            <a:schemeClr val="lt1"/>
+          </a:fontRef>
+        </p:style>
+        <p:txBody>
+          <a:bodyPr rtlCol="0" anchor="ctr"/>
+          <a:lstStyle/>
+          <a:p>
+            <a:pPr algn="ctr">
+              <a:defRPr>
+                <a:latin typeface="Inter"/>
+              </a:defRPr>
+            </a:pPr>
+          </a:p>
+        </p:txBody>
+      </p:sp>
+      <p:sp>
+        <p:nvSpPr>
+          <p:cNvPr id="7" name="TextBox 6"/>
+          <p:cNvSpPr txBox="1"/>
+          <p:nvPr/>
+        </p:nvSpPr>
+        <p:spPr>
+          <a:xfrm>
+            <a:off x="11045952" y="557784"/>
+            <a:ext cx="475488" cy="182880"/>
+          </a:xfrm>
+          <a:prstGeom prst="rect">
+            <a:avLst/>
+          </a:prstGeom>
+          <a:noFill/>
+        </p:spPr>
+        <p:txBody>
+          <a:bodyPr wrap="none" lIns="9144" rIns="9144" tIns="9144" bIns="9144" anchor="t">
+            <a:spAutoFit/>
+          </a:bodyPr>
+          <a:lstStyle/>
+          <a:p>
+            <a:pPr algn="ctr">
+              <a:spcAft>
+                <a:spcPts val="0"/>
+              </a:spcAft>
+              <a:defRPr sz="1000" b="1">
+                <a:solidFill>
+                  <a:srgbClr val="0D1117"/>
+                </a:solidFill>
+                <a:latin typeface="Inter"/>
+              </a:defRPr>
+            </a:pPr>
+            <a:r>
+              <a:rPr>
+                <a:latin typeface="Inter"/>
+              </a:rPr>
+              <a:t>04</a:t>
+            </a:r>
+          </a:p>
+        </p:txBody>
+      </p:sp>
+      <p:sp>
+        <p:nvSpPr>
+          <p:cNvPr id="8" name="TextBox 7"/>
+          <p:cNvSpPr txBox="1"/>
+          <p:nvPr/>
+        </p:nvSpPr>
+        <p:spPr>
+          <a:xfrm>
+            <a:off x="640080" y="1325880"/>
+            <a:ext cx="10908792" cy="3507028"/>
+          </a:xfrm>
+          <a:prstGeom prst="rect">
+            <a:avLst/>
+          </a:prstGeom>
+          <a:noFill/>
+        </p:spPr>
+        <p:txBody>
+          <a:bodyPr wrap="none" lIns="9144" rIns="9144" tIns="9144" bIns="9144" anchor="t">
+            <a:spAutoFit/>
+          </a:bodyPr>
+          <a:lstStyle/>
+          <a:p>
+            <a:pPr algn="l">
+              <a:spcAft>
+                <a:spcPts val="500"/>
+              </a:spcAft>
+              <a:defRPr sz="1000" b="0">
+                <a:solidFill>
+                  <a:srgbClr val="0D1117"/>
+                </a:solidFill>
+                <a:latin typeface="Inter"/>
+              </a:defRPr>
+            </a:pPr>
+            <a:r>
+              <a:rPr>
+                <a:latin typeface="Inter"/>
+              </a:rPr>
+              <a:t>01  Provide the significant-event effective date and approved disclosure text.</a:t>
+            </a:r>
+            <a:br/>
+            <a:r>
+              <a:rPr>
+                <a:latin typeface="Inter"/>
+              </a:rPr>
+              <a:t>      Closes the 4.C.19 gap [S1].</a:t>
+            </a:r>
+          </a:p>
+          <a:p>
+            <a:pPr algn="l">
+              <a:spcAft>
+                <a:spcPts val="500"/>
+              </a:spcAft>
+              <a:defRPr sz="1000" b="0">
+                <a:solidFill>
+                  <a:srgbClr val="0D1117"/>
+                </a:solidFill>
+                <a:latin typeface="Inter"/>
+              </a:defRPr>
+            </a:pPr>
+            <a:r>
+              <a:rPr>
+                <a:latin typeface="Inter"/>
+              </a:rPr>
+              <a:t>02  Provide the complete fee schedule and approved disclosure text.</a:t>
+            </a:r>
+            <a:br/>
+            <a:r>
+              <a:rPr>
+                <a:latin typeface="Inter"/>
+              </a:rPr>
+              <a:t>      Closes the 4.C.11 gap [S2].</a:t>
+            </a:r>
+          </a:p>
+        </p:txBody>
+      </p:sp>
+      <p:sp>
+        <p:nvSpPr>
+          <p:cNvPr id="9" name="TextBox 8"/>
+          <p:cNvSpPr txBox="1"/>
+          <p:nvPr/>
+        </p:nvSpPr>
+        <p:spPr>
+          <a:xfrm>
+            <a:off x="640080" y="4942636"/>
+            <a:ext cx="10908792" cy="1275283"/>
+          </a:xfrm>
+          <a:prstGeom prst="rect">
+            <a:avLst/>
+          </a:prstGeom>
+          <a:noFill/>
+        </p:spPr>
+        <p:txBody>
+          <a:bodyPr wrap="none" lIns="9144" rIns="9144" tIns="9144" bIns="9144" anchor="t">
+            <a:spAutoFit/>
+          </a:bodyPr>
+          <a:lstStyle/>
+          <a:p>
+            <a:pPr algn="l">
+              <a:spcAft>
+                <a:spcPts val="500"/>
+              </a:spcAft>
+              <a:defRPr sz="1050" b="0">
+                <a:solidFill>
+                  <a:srgbClr val="0D1117"/>
+                </a:solidFill>
+                <a:latin typeface="Inter"/>
+              </a:defRPr>
+            </a:pPr>
+            <a:r>
+              <a:rPr>
+                <a:latin typeface="Inter"/>
+              </a:rPr>
+              <a:t>•  Provide the significant-event effective date and the approved disclosure text (4.C.19) [S1].</a:t>
+            </a:r>
+          </a:p>
+          <a:p>
+            <a:pPr algn="l">
+              <a:spcAft>
+                <a:spcPts val="500"/>
+              </a:spcAft>
+              <a:defRPr sz="1050" b="0">
+                <a:solidFill>
+                  <a:srgbClr val="0D1117"/>
+                </a:solidFill>
+                <a:latin typeface="Inter"/>
+              </a:defRPr>
+            </a:pPr>
+            <a:r>
+              <a:rPr>
+                <a:latin typeface="Inter"/>
+              </a:rPr>
+              <a:t>•  Provide the complete fee schedule and approved disclosure text (4.C.11) [S2].</a:t>
+            </a:r>
+          </a:p>
+        </p:txBody>
+      </p:sp>
+      <p:sp>
+        <p:nvSpPr>
+          <p:cNvPr id="10" name="Rectangle 9"/>
+          <p:cNvSpPr/>
+          <p:nvPr/>
+        </p:nvSpPr>
+        <p:spPr>
+          <a:xfrm>
+            <a:off x="640080" y="6446520"/>
+            <a:ext cx="10908792" cy="9144"/>
+          </a:xfrm>
+          <a:prstGeom prst="rect">
+            <a:avLst/>
+          </a:prstGeom>
+          <a:solidFill>
+            <a:srgbClr val="E3E7EC"/>
+          </a:solidFill>
+          <a:ln>
+            <a:solidFill>
+              <a:srgbClr val="E3E7EC"/>
+            </a:solidFill>
+          </a:ln>
+        </p:spPr>
+        <p:style>
+          <a:lnRef idx="1">
+            <a:schemeClr val="accent1"/>
+          </a:lnRef>
+          <a:fillRef idx="3">
+            <a:schemeClr val="accent1"/>
+          </a:fillRef>
+          <a:effectRef idx="2">
+            <a:schemeClr val="accent1"/>
+          </a:effectRef>
+          <a:fontRef idx="minor">
+            <a:schemeClr val="lt1"/>
+          </a:fontRef>
+        </p:style>
+        <p:txBody>
+          <a:bodyPr rtlCol="0" anchor="ctr"/>
+          <a:lstStyle/>
+          <a:p>
+            <a:pPr algn="ctr">
+              <a:defRPr>
+                <a:latin typeface="Inter"/>
+              </a:defRPr>
+            </a:pPr>
+          </a:p>
+        </p:txBody>
+      </p:sp>
+      <p:sp>
+        <p:nvSpPr>
+          <p:cNvPr id="11" name="TextBox 10"/>
+          <p:cNvSpPr txBox="1"/>
+          <p:nvPr/>
+        </p:nvSpPr>
+        <p:spPr>
+          <a:xfrm>
+            <a:off x="640080" y="6501384"/>
+            <a:ext cx="4297680" cy="146304"/>
+          </a:xfrm>
+          <a:prstGeom prst="rect">
+            <a:avLst/>
+          </a:prstGeom>
+          <a:noFill/>
+        </p:spPr>
+        <p:txBody>
+          <a:bodyPr wrap="none" lIns="9144" rIns="9144" tIns="9144" bIns="9144" anchor="t">
+            <a:spAutoFit/>
+          </a:bodyPr>
+          <a:lstStyle/>
+          <a:p>
+            <a:pPr algn="l">
+              <a:spcAft>
+                <a:spcPts val="0"/>
+              </a:spcAft>
+              <a:defRPr sz="650" b="0">
+                <a:solidFill>
+                  <a:srgbClr val="8A94A1"/>
+                </a:solidFill>
+                <a:latin typeface="Inter"/>
+              </a:defRPr>
+            </a:pPr>
+            <a:r>
+              <a:rPr>
+                <a:latin typeface="Inter"/>
+              </a:rPr>
+              <a:t>Sources: S1 · S2</a:t>
+            </a:r>
+          </a:p>
+        </p:txBody>
+      </p:sp>
+      <p:sp>
+        <p:nvSpPr>
+          <p:cNvPr id="12" name="TextBox 11"/>
+          <p:cNvSpPr txBox="1"/>
+          <p:nvPr/>
+        </p:nvSpPr>
+        <p:spPr>
+          <a:xfrm>
+            <a:off x="4480560" y="6501384"/>
+            <a:ext cx="5303520" cy="146304"/>
+          </a:xfrm>
+          <a:prstGeom prst="rect">
+            <a:avLst/>
+          </a:prstGeom>
+          <a:noFill/>
+        </p:spPr>
+        <p:txBody>
+          <a:bodyPr wrap="none" lIns="9144" rIns="9144" tIns="9144" bIns="9144" anchor="t">
+            <a:spAutoFit/>
+          </a:bodyPr>
+          <a:lstStyle/>
+          <a:p>
+            <a:pPr algn="ctr">
+              <a:spcAft>
+                <a:spcPts val="0"/>
+              </a:spcAft>
+              <a:defRPr sz="650" b="0">
+                <a:solidFill>
+                  <a:srgbClr val="8A94A1"/>
+                </a:solidFill>
+                <a:latin typeface="Inter"/>
+              </a:defRPr>
+            </a:pPr>
+            <a:r>
+              <a:rPr>
+                <a:latin typeface="Inter"/>
+              </a:rPr>
+              <a:t>Confidential — performance standards review · Data as of 2025-12-31</a:t>
+            </a:r>
+          </a:p>
+        </p:txBody>
+      </p:sp>
+      <p:sp>
+        <p:nvSpPr>
           <p:cNvPr id="13" name="TextBox 12"/>
+          <p:cNvSpPr txBox="1"/>
+          <p:nvPr/>
+        </p:nvSpPr>
+        <p:spPr>
+          <a:xfrm>
+            <a:off x="10287000" y="6501384"/>
+            <a:ext cx="1261872" cy="146304"/>
+          </a:xfrm>
+          <a:prstGeom prst="rect">
+            <a:avLst/>
+          </a:prstGeom>
+          <a:noFill/>
+        </p:spPr>
+        <p:txBody>
+          <a:bodyPr wrap="none" lIns="9144" rIns="9144" tIns="9144" bIns="9144" anchor="t">
+            <a:spAutoFit/>
+          </a:bodyPr>
+          <a:lstStyle/>
+          <a:p>
+            <a:pPr algn="r">
+              <a:spcAft>
+                <a:spcPts val="0"/>
+              </a:spcAft>
+              <a:defRPr sz="650" b="0">
+                <a:solidFill>
+                  <a:srgbClr val="8A94A1"/>
+                </a:solidFill>
+                <a:latin typeface="Inter"/>
+              </a:defRPr>
+            </a:pPr>
+            <a:r>
+              <a:rPr>
+                <a:latin typeface="Inter"/>
+              </a:rPr>
+              <a:t>8</a:t>
+            </a:r>
+          </a:p>
+        </p:txBody>
+      </p:sp>
+    </p:spTree>
+  </p:cSld>
+  <p:clrMapOvr>
+    <a:masterClrMapping/>
+  </p:clrMapOvr>
+</p:sld>
+</file>
+
+<file path=ppt/slides/slide9.xml><?xml version="1.0" encoding="utf-8"?>
+<p:sld xmlns:a="http://schemas.openxmlformats.org/drawingml/2006/main" xmlns:p="http://schemas.openxmlformats.org/presentationml/2006/main" xmlns:r="http://schemas.openxmlformats.org/officeDocument/2006/relationships">
+  <p:cSld>
+    <p:spTree>
+      <p:nvGrpSpPr>
+        <p:cNvPr id="1" name=""/>
+        <p:cNvGrpSpPr/>
+        <p:nvPr/>
+      </p:nvGrpSpPr>
+      <p:grpSpPr/>
+      <p:sp>
+        <p:nvSpPr>
+          <p:cNvPr id="2" name="Rectangle 1"/>
+          <p:cNvSpPr/>
+          <p:nvPr/>
+        </p:nvSpPr>
+        <p:spPr>
+          <a:xfrm>
+            <a:off x="0" y="0"/>
+            <a:ext cx="12191695" cy="6858000"/>
+          </a:xfrm>
+          <a:prstGeom prst="rect">
+            <a:avLst/>
+          </a:prstGeom>
+          <a:solidFill>
+            <a:srgbClr val="FFFFFF"/>
+          </a:solidFill>
+          <a:ln>
+            <a:solidFill>
+              <a:srgbClr val="FFFFFF"/>
+            </a:solidFill>
+          </a:ln>
+        </p:spPr>
+        <p:style>
+          <a:lnRef idx="1">
+            <a:schemeClr val="accent1"/>
+          </a:lnRef>
+          <a:fillRef idx="3">
+            <a:schemeClr val="accent1"/>
+          </a:fillRef>
+          <a:effectRef idx="2">
+            <a:schemeClr val="accent1"/>
+          </a:effectRef>
+          <a:fontRef idx="minor">
+            <a:schemeClr val="lt1"/>
+          </a:fontRef>
+        </p:style>
+        <p:txBody>
+          <a:bodyPr rtlCol="0" anchor="ctr"/>
+          <a:lstStyle/>
+          <a:p>
+            <a:pPr algn="ctr">
+              <a:defRPr>
+                <a:latin typeface="Inter"/>
+              </a:defRPr>
+            </a:pPr>
+          </a:p>
+        </p:txBody>
+      </p:sp>
+      <p:sp>
+        <p:nvSpPr>
+          <p:cNvPr id="3" name="TextBox 2"/>
+          <p:cNvSpPr txBox="1"/>
+          <p:nvPr/>
+        </p:nvSpPr>
+        <p:spPr>
+          <a:xfrm>
+            <a:off x="5897880" y="310896"/>
+            <a:ext cx="4800600" cy="256032"/>
+          </a:xfrm>
+          <a:prstGeom prst="rect">
+            <a:avLst/>
+          </a:prstGeom>
+          <a:noFill/>
+        </p:spPr>
+        <p:txBody>
+          <a:bodyPr wrap="none" lIns="9144" rIns="9144" tIns="9144" bIns="9144" anchor="t">
+            <a:spAutoFit/>
+          </a:bodyPr>
+          <a:lstStyle/>
+          <a:p>
+            <a:pPr algn="r">
+              <a:spcAft>
+                <a:spcPts val="0"/>
+              </a:spcAft>
+              <a:defRPr sz="680" b="1">
+                <a:solidFill>
+                  <a:srgbClr val="4F6B00"/>
+                </a:solidFill>
+                <a:latin typeface="Inter"/>
+              </a:defRPr>
+            </a:pPr>
+            <a:r>
+              <a:rPr>
+                <a:latin typeface="Inter"/>
+              </a:rPr>
+              <a:t>Illustrative, Gradient Maintained — demo data, not the client's holdings or managers</a:t>
+            </a:r>
+          </a:p>
+        </p:txBody>
+      </p:sp>
+      <p:sp>
+        <p:nvSpPr>
+          <p:cNvPr id="4" name="TextBox 3"/>
+          <p:cNvSpPr txBox="1"/>
+          <p:nvPr/>
+        </p:nvSpPr>
+        <p:spPr>
+          <a:xfrm>
+            <a:off x="640080" y="566928"/>
+            <a:ext cx="10058400" cy="530352"/>
+          </a:xfrm>
+          <a:prstGeom prst="rect">
+            <a:avLst/>
+          </a:prstGeom>
+          <a:noFill/>
+        </p:spPr>
+        <p:txBody>
+          <a:bodyPr wrap="none" lIns="9144" rIns="9144" tIns="9144" bIns="9144" anchor="t">
+            <a:spAutoFit/>
+          </a:bodyPr>
+          <a:lstStyle/>
+          <a:p>
+            <a:pPr algn="l">
+              <a:spcAft>
+                <a:spcPts val="0"/>
+              </a:spcAft>
+              <a:defRPr sz="2300" b="1">
+                <a:solidFill>
+                  <a:srgbClr val="0D1117"/>
+                </a:solidFill>
+                <a:latin typeface="Inter"/>
+              </a:defRPr>
+            </a:pPr>
+            <a:r>
+              <a:rPr>
+                <a:latin typeface="Inter"/>
+              </a:rPr>
+              <a:t>Appendix — Findings checklist</a:t>
+            </a:r>
+          </a:p>
+        </p:txBody>
+      </p:sp>
+      <p:sp>
+        <p:nvSpPr>
+          <p:cNvPr id="5" name="Rectangle 4"/>
+          <p:cNvSpPr/>
+          <p:nvPr/>
+        </p:nvSpPr>
+        <p:spPr>
+          <a:xfrm>
+            <a:off x="640080" y="1115568"/>
+            <a:ext cx="10908792" cy="18288"/>
+          </a:xfrm>
+          <a:prstGeom prst="rect">
+            <a:avLst/>
+          </a:prstGeom>
+          <a:solidFill>
+            <a:srgbClr val="0D1117"/>
+          </a:solidFill>
+          <a:ln>
+            <a:solidFill>
+              <a:srgbClr val="0D1117"/>
+            </a:solidFill>
+          </a:ln>
+        </p:spPr>
+        <p:style>
+          <a:lnRef idx="1">
+            <a:schemeClr val="accent1"/>
+          </a:lnRef>
+          <a:fillRef idx="3">
+            <a:schemeClr val="accent1"/>
+          </a:fillRef>
+          <a:effectRef idx="2">
+            <a:schemeClr val="accent1"/>
+          </a:effectRef>
+          <a:fontRef idx="minor">
+            <a:schemeClr val="lt1"/>
+          </a:fontRef>
+        </p:style>
+        <p:txBody>
+          <a:bodyPr rtlCol="0" anchor="ctr"/>
+          <a:lstStyle/>
+          <a:p>
+            <a:pPr algn="ctr">
+              <a:defRPr>
+                <a:latin typeface="Inter"/>
+              </a:defRPr>
+            </a:pPr>
+          </a:p>
+        </p:txBody>
+      </p:sp>
+      <p:sp>
+        <p:nvSpPr>
+          <p:cNvPr id="6" name="Rectangle 5"/>
+          <p:cNvSpPr/>
+          <p:nvPr/>
+        </p:nvSpPr>
+        <p:spPr>
+          <a:xfrm>
+            <a:off x="11018520" y="502920"/>
+            <a:ext cx="530352" cy="393192"/>
+          </a:xfrm>
+          <a:prstGeom prst="rect">
+            <a:avLst/>
+          </a:prstGeom>
+          <a:solidFill>
+            <a:srgbClr val="9AA5B1"/>
+          </a:solidFill>
+          <a:ln>
+            <a:solidFill>
+              <a:srgbClr val="9AA5B1"/>
+            </a:solidFill>
+          </a:ln>
+        </p:spPr>
+        <p:style>
+          <a:lnRef idx="1">
+            <a:schemeClr val="accent1"/>
+          </a:lnRef>
+          <a:fillRef idx="3">
+            <a:schemeClr val="accent1"/>
+          </a:fillRef>
+          <a:effectRef idx="2">
+            <a:schemeClr val="accent1"/>
+          </a:effectRef>
+          <a:fontRef idx="minor">
+            <a:schemeClr val="lt1"/>
+          </a:fontRef>
+        </p:style>
+        <p:txBody>
+          <a:bodyPr rtlCol="0" anchor="ctr"/>
+          <a:lstStyle/>
+          <a:p>
+            <a:pPr algn="ctr">
+              <a:defRPr>
+                <a:latin typeface="Inter"/>
+              </a:defRPr>
+            </a:pPr>
+          </a:p>
+        </p:txBody>
+      </p:sp>
+      <p:sp>
+        <p:nvSpPr>
+          <p:cNvPr id="7" name="TextBox 6"/>
+          <p:cNvSpPr txBox="1"/>
+          <p:nvPr/>
+        </p:nvSpPr>
+        <p:spPr>
+          <a:xfrm>
+            <a:off x="11045952" y="557784"/>
+            <a:ext cx="475488" cy="182880"/>
+          </a:xfrm>
+          <a:prstGeom prst="rect">
+            <a:avLst/>
+          </a:prstGeom>
+          <a:noFill/>
+        </p:spPr>
+        <p:txBody>
+          <a:bodyPr wrap="none" lIns="9144" rIns="9144" tIns="9144" bIns="9144" anchor="t">
+            <a:spAutoFit/>
+          </a:bodyPr>
+          <a:lstStyle/>
+          <a:p>
+            <a:pPr algn="ctr">
+              <a:spcAft>
+                <a:spcPts val="0"/>
+              </a:spcAft>
+              <a:defRPr sz="1000" b="1">
+                <a:solidFill>
+                  <a:srgbClr val="0D1117"/>
+                </a:solidFill>
+                <a:latin typeface="Inter"/>
+              </a:defRPr>
+            </a:pPr>
+            <a:r>
+              <a:rPr>
+                <a:latin typeface="Inter"/>
+              </a:rPr>
+              <a:t>B</a:t>
+            </a:r>
+          </a:p>
+        </p:txBody>
+      </p:sp>
+      <p:sp>
+        <p:nvSpPr>
+          <p:cNvPr id="8" name="TextBox 7"/>
+          <p:cNvSpPr txBox="1"/>
+          <p:nvPr/>
+        </p:nvSpPr>
+        <p:spPr>
+          <a:xfrm>
+            <a:off x="640080" y="1325880"/>
+            <a:ext cx="10908792" cy="4892040"/>
+          </a:xfrm>
+          <a:prstGeom prst="rect">
+            <a:avLst/>
+          </a:prstGeom>
+          <a:noFill/>
+        </p:spPr>
+        <p:txBody>
+          <a:bodyPr wrap="none" lIns="9144" rIns="9144" tIns="9144" bIns="9144" anchor="t">
+            <a:spAutoFit/>
+          </a:bodyPr>
+          <a:lstStyle/>
+          <a:p>
+            <a:pPr algn="l">
+              <a:spcAft>
+                <a:spcPts val="0"/>
+              </a:spcAft>
+              <a:defRPr sz="1100" b="0">
+                <a:solidFill>
+                  <a:srgbClr val="4A5563"/>
+                </a:solidFill>
+                <a:latin typeface="Inter"/>
+              </a:defRPr>
+            </a:pPr>
+            <a:r>
+              <a:rPr>
+                <a:latin typeface="Inter"/>
+              </a:rPr>
+              <a:t>·  Area  ·  Requirement  ·  Provision  ·  Status  ·  Evidence  ·  Finding / follow-up  · </a:t>
+            </a:r>
+            <a:br/>
+            <a:br/>
+            <a:r>
+              <a:rPr>
+                <a:latin typeface="Inter"/>
+              </a:rPr>
+              <a:t> ·  Returns  ·  Required annual returns  ·  4.A.1  ·  Met  ·  Report pp.1–2 [S1]  ·  —  · </a:t>
+            </a:r>
+            <a:br/>
+            <a:br/>
+            <a:r>
+              <a:rPr>
+                <a:latin typeface="Inter"/>
+              </a:rPr>
+              <a:t> ·  Benchmark  ·  Benchmark returns  ·  4.A.1  ·  Met  ·  Report pp.1–2 [S1]  ·  —  · </a:t>
+            </a:r>
+            <a:br/>
+            <a:br/>
+            <a:r>
+              <a:rPr>
+                <a:latin typeface="Inter"/>
+              </a:rPr>
+              <a:t> ·  Composite  ·  Composite description  ·  4.C.10  ·  Met  ·  Schedule [S2]  ·  —  · </a:t>
+            </a:r>
+            <a:br/>
+            <a:br/>
+            <a:r>
+              <a:rPr>
+                <a:latin typeface="Inter"/>
+              </a:rPr>
+              <a:t> ·  Fees  ·  Fee disclosure  ·  4.C.11  ·  Partially met  ·  Schedule [S2]  ·  Performance fee unclear  · </a:t>
+            </a:r>
+            <a:br/>
+            <a:br/>
+            <a:r>
+              <a:rPr>
+                <a:latin typeface="Inter"/>
+              </a:rPr>
+              <a:t> ·  Events  ·  Significant-event disclosure  ·  4.C.19  ·  Not met  ·  Report [S1]  ·  Event date absent  ·</a:t>
+            </a:r>
+          </a:p>
+        </p:txBody>
+      </p:sp>
+      <p:sp>
+        <p:nvSpPr>
+          <p:cNvPr id="9" name="Rectangle 8"/>
+          <p:cNvSpPr/>
+          <p:nvPr/>
+        </p:nvSpPr>
+        <p:spPr>
+          <a:xfrm>
+            <a:off x="640080" y="6446520"/>
+            <a:ext cx="10908792" cy="9144"/>
+          </a:xfrm>
+          <a:prstGeom prst="rect">
+            <a:avLst/>
+          </a:prstGeom>
+          <a:solidFill>
+            <a:srgbClr val="E3E7EC"/>
+          </a:solidFill>
+          <a:ln>
+            <a:solidFill>
+              <a:srgbClr val="E3E7EC"/>
+            </a:solidFill>
+          </a:ln>
+        </p:spPr>
+        <p:style>
+          <a:lnRef idx="1">
+            <a:schemeClr val="accent1"/>
+          </a:lnRef>
+          <a:fillRef idx="3">
+            <a:schemeClr val="accent1"/>
+          </a:fillRef>
+          <a:effectRef idx="2">
+            <a:schemeClr val="accent1"/>
+          </a:effectRef>
+          <a:fontRef idx="minor">
+            <a:schemeClr val="lt1"/>
+          </a:fontRef>
+        </p:style>
+        <p:txBody>
+          <a:bodyPr rtlCol="0" anchor="ctr"/>
+          <a:lstStyle/>
+          <a:p>
+            <a:pPr algn="ctr">
+              <a:defRPr>
+                <a:latin typeface="Inter"/>
+              </a:defRPr>
+            </a:pPr>
+          </a:p>
+        </p:txBody>
+      </p:sp>
+      <p:sp>
+        <p:nvSpPr>
+          <p:cNvPr id="10" name="TextBox 9"/>
+          <p:cNvSpPr txBox="1"/>
+          <p:nvPr/>
+        </p:nvSpPr>
+        <p:spPr>
+          <a:xfrm>
+            <a:off x="640080" y="6501384"/>
+            <a:ext cx="4297680" cy="146304"/>
+          </a:xfrm>
+          <a:prstGeom prst="rect">
+            <a:avLst/>
+          </a:prstGeom>
+          <a:noFill/>
+        </p:spPr>
+        <p:txBody>
+          <a:bodyPr wrap="none" lIns="9144" rIns="9144" tIns="9144" bIns="9144" anchor="t">
+            <a:spAutoFit/>
+          </a:bodyPr>
+          <a:lstStyle/>
+          <a:p>
+            <a:pPr algn="l">
+              <a:spcAft>
+                <a:spcPts val="0"/>
+              </a:spcAft>
+              <a:defRPr sz="650" b="0">
+                <a:solidFill>
+                  <a:srgbClr val="8A94A1"/>
+                </a:solidFill>
+                <a:latin typeface="Inter"/>
+              </a:defRPr>
+            </a:pPr>
+            <a:r>
+              <a:rPr>
+                <a:latin typeface="Inter"/>
+              </a:rPr>
+              <a:t>Sources: S1 · S2</a:t>
+            </a:r>
+          </a:p>
+        </p:txBody>
+      </p:sp>
+      <p:sp>
+        <p:nvSpPr>
+          <p:cNvPr id="11" name="TextBox 10"/>
+          <p:cNvSpPr txBox="1"/>
+          <p:nvPr/>
+        </p:nvSpPr>
+        <p:spPr>
+          <a:xfrm>
+            <a:off x="4480560" y="6501384"/>
+            <a:ext cx="5303520" cy="146304"/>
+          </a:xfrm>
+          <a:prstGeom prst="rect">
+            <a:avLst/>
+          </a:prstGeom>
+          <a:noFill/>
+        </p:spPr>
+        <p:txBody>
+          <a:bodyPr wrap="none" lIns="9144" rIns="9144" tIns="9144" bIns="9144" anchor="t">
+            <a:spAutoFit/>
+          </a:bodyPr>
+          <a:lstStyle/>
+          <a:p>
+            <a:pPr algn="ctr">
+              <a:spcAft>
+                <a:spcPts val="0"/>
+              </a:spcAft>
+              <a:defRPr sz="650" b="0">
+                <a:solidFill>
+                  <a:srgbClr val="8A94A1"/>
+                </a:solidFill>
+                <a:latin typeface="Inter"/>
+              </a:defRPr>
+            </a:pPr>
+            <a:r>
+              <a:rPr>
+                <a:latin typeface="Inter"/>
+              </a:rPr>
+              <a:t>Confidential — performance standards review · Data as of 2025-12-31</a:t>
+            </a:r>
+          </a:p>
+        </p:txBody>
+      </p:sp>
+      <p:sp>
+        <p:nvSpPr>
+          <p:cNvPr id="12" name="TextBox 11"/>
           <p:cNvSpPr txBox="1"/>
           <p:nvPr/>
         </p:nvSpPr>

--- a/plugins/gradient-cio/assets/examples/internal-gips-review-firm.pptx
+++ b/plugins/gradient-cio/assets/examples/internal-gips-review-firm.pptx
@@ -3595,7 +3595,7 @@
               <a:rPr>
                 <a:latin typeface="Inter"/>
               </a:rPr>
-              <a:t>SUBJECT</a:t>
+              <a:t>COMPOSITE</a:t>
             </a:r>
           </a:p>
         </p:txBody>
@@ -3896,224 +3896,7 @@
       </p:sp>
       <p:sp>
         <p:nvSpPr>
-          <p:cNvPr id="17" name="Rectangle 16"/>
-          <p:cNvSpPr/>
-          <p:nvPr/>
-        </p:nvSpPr>
-        <p:spPr>
-          <a:xfrm>
-            <a:off x="685800" y="5687568"/>
-            <a:ext cx="3337560" cy="530352"/>
-          </a:xfrm>
-          <a:prstGeom prst="rect">
-            <a:avLst/>
-          </a:prstGeom>
-          <a:solidFill>
-            <a:srgbClr val="F2A93B"/>
-          </a:solidFill>
-          <a:ln>
-            <a:solidFill>
-              <a:srgbClr val="F2A93B"/>
-            </a:solidFill>
-          </a:ln>
-        </p:spPr>
-        <p:style>
-          <a:lnRef idx="1">
-            <a:schemeClr val="accent1"/>
-          </a:lnRef>
-          <a:fillRef idx="3">
-            <a:schemeClr val="accent1"/>
-          </a:fillRef>
-          <a:effectRef idx="2">
-            <a:schemeClr val="accent1"/>
-          </a:effectRef>
-          <a:fontRef idx="minor">
-            <a:schemeClr val="lt1"/>
-          </a:fontRef>
-        </p:style>
-        <p:txBody>
-          <a:bodyPr rtlCol="0" anchor="ctr"/>
-          <a:lstStyle/>
-          <a:p>
-            <a:pPr algn="ctr">
-              <a:defRPr>
-                <a:latin typeface="Inter"/>
-              </a:defRPr>
-            </a:pPr>
-          </a:p>
-        </p:txBody>
-      </p:sp>
-      <p:sp>
-        <p:nvSpPr>
-          <p:cNvPr id="18" name="TextBox 17"/>
-          <p:cNvSpPr txBox="1"/>
-          <p:nvPr/>
-        </p:nvSpPr>
-        <p:spPr>
-          <a:xfrm>
-            <a:off x="822960" y="5760720"/>
-            <a:ext cx="3063240" cy="128016"/>
-          </a:xfrm>
-          <a:prstGeom prst="rect">
-            <a:avLst/>
-          </a:prstGeom>
-          <a:noFill/>
-        </p:spPr>
-        <p:txBody>
-          <a:bodyPr wrap="none" lIns="9144" rIns="9144" tIns="9144" bIns="9144" anchor="t">
-            <a:spAutoFit/>
-          </a:bodyPr>
-          <a:lstStyle/>
-          <a:p>
-            <a:pPr algn="l">
-              <a:spcAft>
-                <a:spcPts val="0"/>
-              </a:spcAft>
-              <a:defRPr sz="620" b="1">
-                <a:solidFill>
-                  <a:srgbClr val="0D1117"/>
-                </a:solidFill>
-                <a:latin typeface="Inter"/>
-              </a:defRPr>
-            </a:pPr>
-            <a:r>
-              <a:rPr>
-                <a:latin typeface="Inter"/>
-              </a:rPr>
-              <a:t>OVERALL VIEW</a:t>
-            </a:r>
-          </a:p>
-        </p:txBody>
-      </p:sp>
-      <p:sp>
-        <p:nvSpPr>
-          <p:cNvPr id="19" name="TextBox 18"/>
-          <p:cNvSpPr txBox="1"/>
-          <p:nvPr/>
-        </p:nvSpPr>
-        <p:spPr>
-          <a:xfrm>
-            <a:off x="822960" y="5916168"/>
-            <a:ext cx="3063240" cy="182880"/>
-          </a:xfrm>
-          <a:prstGeom prst="rect">
-            <a:avLst/>
-          </a:prstGeom>
-          <a:noFill/>
-        </p:spPr>
-        <p:txBody>
-          <a:bodyPr wrap="none" lIns="9144" rIns="9144" tIns="9144" bIns="9144" anchor="t">
-            <a:spAutoFit/>
-          </a:bodyPr>
-          <a:lstStyle/>
-          <a:p>
-            <a:pPr algn="l">
-              <a:spcAft>
-                <a:spcPts val="0"/>
-              </a:spcAft>
-              <a:defRPr sz="900" b="1">
-                <a:solidFill>
-                  <a:srgbClr val="0D1117"/>
-                </a:solidFill>
-                <a:latin typeface="Inter"/>
-              </a:defRPr>
-            </a:pPr>
-            <a:r>
-              <a:rPr>
-                <a:latin typeface="Inter"/>
-              </a:rPr>
-              <a:t>Satisfactory with follow-ups</a:t>
-            </a:r>
-          </a:p>
-        </p:txBody>
-      </p:sp>
-      <p:sp>
-        <p:nvSpPr>
-          <p:cNvPr id="20" name="TextBox 19"/>
-          <p:cNvSpPr txBox="1"/>
-          <p:nvPr/>
-        </p:nvSpPr>
-        <p:spPr>
-          <a:xfrm>
-            <a:off x="4297680" y="5733288"/>
-            <a:ext cx="3108960" cy="164592"/>
-          </a:xfrm>
-          <a:prstGeom prst="rect">
-            <a:avLst/>
-          </a:prstGeom>
-          <a:noFill/>
-        </p:spPr>
-        <p:txBody>
-          <a:bodyPr wrap="none" lIns="9144" rIns="9144" tIns="9144" bIns="9144" anchor="t">
-            <a:spAutoFit/>
-          </a:bodyPr>
-          <a:lstStyle/>
-          <a:p>
-            <a:pPr algn="l">
-              <a:spcAft>
-                <a:spcPts val="0"/>
-              </a:spcAft>
-              <a:defRPr sz="650" b="1">
-                <a:solidFill>
-                  <a:srgbClr val="8A94A1"/>
-                </a:solidFill>
-                <a:latin typeface="Inter"/>
-              </a:defRPr>
-            </a:pPr>
-            <a:r>
-              <a:rPr>
-                <a:latin typeface="Inter"/>
-              </a:rPr>
-              <a:t>SCOPE REVIEWED</a:t>
-            </a:r>
-          </a:p>
-        </p:txBody>
-      </p:sp>
-      <p:sp>
-        <p:nvSpPr>
-          <p:cNvPr id="21" name="TextBox 20"/>
-          <p:cNvSpPr txBox="1"/>
-          <p:nvPr/>
-        </p:nvSpPr>
-        <p:spPr>
-          <a:xfrm>
-            <a:off x="4297680" y="5934456"/>
-            <a:ext cx="3108960" cy="201168"/>
-          </a:xfrm>
-          <a:prstGeom prst="rect">
-            <a:avLst/>
-          </a:prstGeom>
-          <a:noFill/>
-        </p:spPr>
-        <p:txBody>
-          <a:bodyPr wrap="none" lIns="9144" rIns="9144" tIns="9144" bIns="9144" anchor="t">
-            <a:spAutoFit/>
-          </a:bodyPr>
-          <a:lstStyle/>
-          <a:p>
-            <a:pPr algn="l">
-              <a:spcAft>
-                <a:spcPts val="0"/>
-              </a:spcAft>
-              <a:defRPr sz="800" b="1">
-                <a:solidFill>
-                  <a:srgbClr val="FFFFFF"/>
-                </a:solidFill>
-                <a:latin typeface="Inter"/>
-              </a:defRPr>
-            </a:pPr>
-            <a:r>
-              <a:rPr>
-                <a:latin typeface="Inter"/>
-              </a:rPr>
-              <a:t>5 of 5 · Complete</a:t>
-            </a:r>
-          </a:p>
-        </p:txBody>
-      </p:sp>
-      <p:sp>
-        <p:nvSpPr>
-          <p:cNvPr id="22" name="TextBox 21"/>
+          <p:cNvPr id="17" name="TextBox 16"/>
           <p:cNvSpPr txBox="1"/>
           <p:nvPr/>
         </p:nvSpPr>
@@ -4155,7 +3938,7 @@
       </p:sp>
       <p:sp>
         <p:nvSpPr>
-          <p:cNvPr id="23" name="TextBox 22"/>
+          <p:cNvPr id="18" name="TextBox 17"/>
           <p:cNvSpPr txBox="1"/>
           <p:nvPr/>
         </p:nvSpPr>
@@ -4197,7 +3980,7 @@
       </p:sp>
       <p:sp>
         <p:nvSpPr>
-          <p:cNvPr id="24" name="TextBox 23"/>
+          <p:cNvPr id="19" name="TextBox 18"/>
           <p:cNvSpPr txBox="1"/>
           <p:nvPr/>
         </p:nvSpPr>
@@ -4312,48 +4095,6 @@
         </p:nvSpPr>
         <p:spPr>
           <a:xfrm>
-            <a:off x="5897880" y="310896"/>
-            <a:ext cx="4800600" cy="256032"/>
-          </a:xfrm>
-          <a:prstGeom prst="rect">
-            <a:avLst/>
-          </a:prstGeom>
-          <a:noFill/>
-        </p:spPr>
-        <p:txBody>
-          <a:bodyPr wrap="none" lIns="9144" rIns="9144" tIns="9144" bIns="9144" anchor="t">
-            <a:spAutoFit/>
-          </a:bodyPr>
-          <a:lstStyle/>
-          <a:p>
-            <a:pPr algn="r">
-              <a:spcAft>
-                <a:spcPts val="0"/>
-              </a:spcAft>
-              <a:defRPr sz="680" b="1">
-                <a:solidFill>
-                  <a:srgbClr val="4F6B00"/>
-                </a:solidFill>
-                <a:latin typeface="Inter"/>
-              </a:defRPr>
-            </a:pPr>
-            <a:r>
-              <a:rPr>
-                <a:latin typeface="Inter"/>
-              </a:rPr>
-              <a:t>Illustrative, Gradient Maintained — demo data, not the client's holdings or managers</a:t>
-            </a:r>
-          </a:p>
-        </p:txBody>
-      </p:sp>
-      <p:sp>
-        <p:nvSpPr>
-          <p:cNvPr id="4" name="TextBox 3"/>
-          <p:cNvSpPr txBox="1"/>
-          <p:nvPr/>
-        </p:nvSpPr>
-        <p:spPr>
-          <a:xfrm>
             <a:off x="640080" y="566928"/>
             <a:ext cx="10058400" cy="530352"/>
           </a:xfrm>
@@ -4390,7 +4131,7 @@
       </p:sp>
       <p:sp>
         <p:nvSpPr>
-          <p:cNvPr id="5" name="Rectangle 4"/>
+          <p:cNvPr id="4" name="Rectangle 3"/>
           <p:cNvSpPr/>
           <p:nvPr/>
         </p:nvSpPr>
@@ -4439,7 +4180,7 @@
       </p:sp>
       <p:sp>
         <p:nvSpPr>
-          <p:cNvPr id="6" name="Rectangle 5"/>
+          <p:cNvPr id="5" name="Rectangle 4"/>
           <p:cNvSpPr/>
           <p:nvPr/>
         </p:nvSpPr>
@@ -4488,7 +4229,7 @@
       </p:sp>
       <p:sp>
         <p:nvSpPr>
-          <p:cNvPr id="7" name="TextBox 6"/>
+          <p:cNvPr id="6" name="TextBox 5"/>
           <p:cNvSpPr txBox="1"/>
           <p:nvPr/>
         </p:nvSpPr>
@@ -4530,7 +4271,7 @@
       </p:sp>
       <p:sp>
         <p:nvSpPr>
-          <p:cNvPr id="8" name="TextBox 7"/>
+          <p:cNvPr id="7" name="TextBox 6"/>
           <p:cNvSpPr txBox="1"/>
           <p:nvPr/>
         </p:nvSpPr>
@@ -4604,7 +4345,7 @@
       </p:sp>
       <p:sp>
         <p:nvSpPr>
-          <p:cNvPr id="9" name="Rectangle 8"/>
+          <p:cNvPr id="8" name="Rectangle 7"/>
           <p:cNvSpPr/>
           <p:nvPr/>
         </p:nvSpPr>
@@ -4653,7 +4394,7 @@
       </p:sp>
       <p:sp>
         <p:nvSpPr>
-          <p:cNvPr id="10" name="TextBox 9"/>
+          <p:cNvPr id="9" name="TextBox 8"/>
           <p:cNvSpPr txBox="1"/>
           <p:nvPr/>
         </p:nvSpPr>
@@ -4695,7 +4436,7 @@
       </p:sp>
       <p:sp>
         <p:nvSpPr>
-          <p:cNvPr id="11" name="TextBox 10"/>
+          <p:cNvPr id="10" name="TextBox 9"/>
           <p:cNvSpPr txBox="1"/>
           <p:nvPr/>
         </p:nvSpPr>
@@ -4737,7 +4478,7 @@
       </p:sp>
       <p:sp>
         <p:nvSpPr>
-          <p:cNvPr id="12" name="TextBox 11"/>
+          <p:cNvPr id="11" name="TextBox 10"/>
           <p:cNvSpPr txBox="1"/>
           <p:nvPr/>
         </p:nvSpPr>
@@ -4852,48 +4593,6 @@
         </p:nvSpPr>
         <p:spPr>
           <a:xfrm>
-            <a:off x="5897880" y="310896"/>
-            <a:ext cx="4800600" cy="256032"/>
-          </a:xfrm>
-          <a:prstGeom prst="rect">
-            <a:avLst/>
-          </a:prstGeom>
-          <a:noFill/>
-        </p:spPr>
-        <p:txBody>
-          <a:bodyPr wrap="none" lIns="9144" rIns="9144" tIns="9144" bIns="9144" anchor="t">
-            <a:spAutoFit/>
-          </a:bodyPr>
-          <a:lstStyle/>
-          <a:p>
-            <a:pPr algn="r">
-              <a:spcAft>
-                <a:spcPts val="0"/>
-              </a:spcAft>
-              <a:defRPr sz="680" b="1">
-                <a:solidFill>
-                  <a:srgbClr val="4F6B00"/>
-                </a:solidFill>
-                <a:latin typeface="Inter"/>
-              </a:defRPr>
-            </a:pPr>
-            <a:r>
-              <a:rPr>
-                <a:latin typeface="Inter"/>
-              </a:rPr>
-              <a:t>Illustrative, Gradient Maintained — demo data, not the client's holdings or managers</a:t>
-            </a:r>
-          </a:p>
-        </p:txBody>
-      </p:sp>
-      <p:sp>
-        <p:nvSpPr>
-          <p:cNvPr id="4" name="TextBox 3"/>
-          <p:cNvSpPr txBox="1"/>
-          <p:nvPr/>
-        </p:nvSpPr>
-        <p:spPr>
-          <a:xfrm>
             <a:off x="640080" y="566928"/>
             <a:ext cx="10058400" cy="530352"/>
           </a:xfrm>
@@ -4930,7 +4629,7 @@
       </p:sp>
       <p:sp>
         <p:nvSpPr>
-          <p:cNvPr id="5" name="Rectangle 4"/>
+          <p:cNvPr id="4" name="Rectangle 3"/>
           <p:cNvSpPr/>
           <p:nvPr/>
         </p:nvSpPr>
@@ -4979,7 +4678,7 @@
       </p:sp>
       <p:sp>
         <p:nvSpPr>
-          <p:cNvPr id="6" name="Rectangle 5"/>
+          <p:cNvPr id="5" name="Rectangle 4"/>
           <p:cNvSpPr/>
           <p:nvPr/>
         </p:nvSpPr>
@@ -5028,7 +4727,7 @@
       </p:sp>
       <p:sp>
         <p:nvSpPr>
-          <p:cNvPr id="7" name="TextBox 6"/>
+          <p:cNvPr id="6" name="TextBox 5"/>
           <p:cNvSpPr txBox="1"/>
           <p:nvPr/>
         </p:nvSpPr>
@@ -5070,7 +4769,7 @@
       </p:sp>
       <p:sp>
         <p:nvSpPr>
-          <p:cNvPr id="8" name="TextBox 7"/>
+          <p:cNvPr id="7" name="TextBox 6"/>
           <p:cNvSpPr txBox="1"/>
           <p:nvPr/>
         </p:nvSpPr>
@@ -5112,7 +4811,7 @@
       </p:sp>
       <p:sp>
         <p:nvSpPr>
-          <p:cNvPr id="9" name="Rectangle 8"/>
+          <p:cNvPr id="8" name="Rectangle 7"/>
           <p:cNvSpPr/>
           <p:nvPr/>
         </p:nvSpPr>
@@ -5161,7 +4860,7 @@
       </p:sp>
       <p:sp>
         <p:nvSpPr>
-          <p:cNvPr id="10" name="TextBox 9"/>
+          <p:cNvPr id="9" name="TextBox 8"/>
           <p:cNvSpPr txBox="1"/>
           <p:nvPr/>
         </p:nvSpPr>
@@ -5203,7 +4902,7 @@
       </p:sp>
       <p:sp>
         <p:nvSpPr>
-          <p:cNvPr id="11" name="TextBox 10"/>
+          <p:cNvPr id="10" name="TextBox 9"/>
           <p:cNvSpPr txBox="1"/>
           <p:nvPr/>
         </p:nvSpPr>
@@ -5245,7 +4944,7 @@
       </p:sp>
       <p:sp>
         <p:nvSpPr>
-          <p:cNvPr id="12" name="TextBox 11"/>
+          <p:cNvPr id="11" name="TextBox 10"/>
           <p:cNvSpPr txBox="1"/>
           <p:nvPr/>
         </p:nvSpPr>
@@ -5360,48 +5059,6 @@
         </p:nvSpPr>
         <p:spPr>
           <a:xfrm>
-            <a:off x="5897880" y="310896"/>
-            <a:ext cx="4800600" cy="256032"/>
-          </a:xfrm>
-          <a:prstGeom prst="rect">
-            <a:avLst/>
-          </a:prstGeom>
-          <a:noFill/>
-        </p:spPr>
-        <p:txBody>
-          <a:bodyPr wrap="none" lIns="9144" rIns="9144" tIns="9144" bIns="9144" anchor="t">
-            <a:spAutoFit/>
-          </a:bodyPr>
-          <a:lstStyle/>
-          <a:p>
-            <a:pPr algn="r">
-              <a:spcAft>
-                <a:spcPts val="0"/>
-              </a:spcAft>
-              <a:defRPr sz="680" b="1">
-                <a:solidFill>
-                  <a:srgbClr val="4F6B00"/>
-                </a:solidFill>
-                <a:latin typeface="Inter"/>
-              </a:defRPr>
-            </a:pPr>
-            <a:r>
-              <a:rPr>
-                <a:latin typeface="Inter"/>
-              </a:rPr>
-              <a:t>Illustrative, Gradient Maintained — demo data, not the client's holdings or managers</a:t>
-            </a:r>
-          </a:p>
-        </p:txBody>
-      </p:sp>
-      <p:sp>
-        <p:nvSpPr>
-          <p:cNvPr id="4" name="TextBox 3"/>
-          <p:cNvSpPr txBox="1"/>
-          <p:nvPr/>
-        </p:nvSpPr>
-        <p:spPr>
-          <a:xfrm>
             <a:off x="640080" y="566928"/>
             <a:ext cx="10058400" cy="530352"/>
           </a:xfrm>
@@ -5438,7 +5095,7 @@
       </p:sp>
       <p:sp>
         <p:nvSpPr>
-          <p:cNvPr id="5" name="Rectangle 4"/>
+          <p:cNvPr id="4" name="Rectangle 3"/>
           <p:cNvSpPr/>
           <p:nvPr/>
         </p:nvSpPr>
@@ -5487,7 +5144,7 @@
       </p:sp>
       <p:sp>
         <p:nvSpPr>
-          <p:cNvPr id="6" name="Rectangle 5"/>
+          <p:cNvPr id="5" name="Rectangle 4"/>
           <p:cNvSpPr/>
           <p:nvPr/>
         </p:nvSpPr>
@@ -5536,7 +5193,7 @@
       </p:sp>
       <p:sp>
         <p:nvSpPr>
-          <p:cNvPr id="7" name="TextBox 6"/>
+          <p:cNvPr id="6" name="TextBox 5"/>
           <p:cNvSpPr txBox="1"/>
           <p:nvPr/>
         </p:nvSpPr>
@@ -5578,14 +5235,105 @@
       </p:sp>
       <p:sp>
         <p:nvSpPr>
-          <p:cNvPr id="8" name="Rectangle 7"/>
+          <p:cNvPr id="7" name="Rectangle 6"/>
           <p:cNvSpPr/>
           <p:nvPr/>
         </p:nvSpPr>
         <p:spPr>
           <a:xfrm>
-            <a:off x="640080" y="1325880"/>
-            <a:ext cx="10908792" cy="1793366"/>
+            <a:off x="640080" y="1399032"/>
+            <a:ext cx="73152" cy="1188720"/>
+          </a:xfrm>
+          <a:prstGeom prst="rect">
+            <a:avLst/>
+          </a:prstGeom>
+          <a:solidFill>
+            <a:srgbClr val="F2A93B"/>
+          </a:solidFill>
+          <a:ln>
+            <a:solidFill>
+              <a:srgbClr val="F2A93B"/>
+            </a:solidFill>
+          </a:ln>
+        </p:spPr>
+        <p:style>
+          <a:lnRef idx="1">
+            <a:schemeClr val="accent1"/>
+          </a:lnRef>
+          <a:fillRef idx="3">
+            <a:schemeClr val="accent1"/>
+          </a:fillRef>
+          <a:effectRef idx="2">
+            <a:schemeClr val="accent1"/>
+          </a:effectRef>
+          <a:fontRef idx="minor">
+            <a:schemeClr val="lt1"/>
+          </a:fontRef>
+        </p:style>
+        <p:txBody>
+          <a:bodyPr rtlCol="0" anchor="ctr"/>
+          <a:lstStyle/>
+          <a:p>
+            <a:pPr algn="ctr">
+              <a:defRPr>
+                <a:latin typeface="Inter"/>
+              </a:defRPr>
+            </a:pPr>
+          </a:p>
+        </p:txBody>
+      </p:sp>
+      <p:sp>
+        <p:nvSpPr>
+          <p:cNvPr id="8" name="TextBox 7"/>
+          <p:cNvSpPr txBox="1"/>
+          <p:nvPr/>
+        </p:nvSpPr>
+        <p:spPr>
+          <a:xfrm>
+            <a:off x="896112" y="1371600"/>
+            <a:ext cx="10588752" cy="774313"/>
+          </a:xfrm>
+          <a:prstGeom prst="rect">
+            <a:avLst/>
+          </a:prstGeom>
+          <a:noFill/>
+        </p:spPr>
+        <p:txBody>
+          <a:bodyPr wrap="none" lIns="9144" rIns="9144" tIns="9144" bIns="9144" anchor="t">
+            <a:spAutoFit/>
+          </a:bodyPr>
+          <a:lstStyle/>
+          <a:p>
+            <a:pPr algn="l">
+              <a:spcAft>
+                <a:spcPts val="0"/>
+              </a:spcAft>
+              <a:defRPr sz="1800" b="1">
+                <a:solidFill>
+                  <a:srgbClr val="0D1117"/>
+                </a:solidFill>
+                <a:latin typeface="Inter"/>
+              </a:defRPr>
+            </a:pPr>
+            <a:r>
+              <a:rPr>
+                <a:latin typeface="Inter"/>
+              </a:rPr>
+              <a:t>Satisfactory with follow-ups</a:t>
+            </a:r>
+          </a:p>
+        </p:txBody>
+      </p:sp>
+      <p:sp>
+        <p:nvSpPr>
+          <p:cNvPr id="9" name="Rectangle 8"/>
+          <p:cNvSpPr/>
+          <p:nvPr/>
+        </p:nvSpPr>
+        <p:spPr>
+          <a:xfrm>
+            <a:off x="640080" y="2770632"/>
+            <a:ext cx="10908792" cy="1251585"/>
           </a:xfrm>
           <a:prstGeom prst="rect">
             <a:avLst/>
@@ -5627,14 +5375,14 @@
       </p:sp>
       <p:sp>
         <p:nvSpPr>
-          <p:cNvPr id="9" name="Rectangle 8"/>
+          <p:cNvPr id="10" name="Rectangle 9"/>
           <p:cNvSpPr/>
           <p:nvPr/>
         </p:nvSpPr>
         <p:spPr>
           <a:xfrm>
-            <a:off x="640080" y="1325880"/>
-            <a:ext cx="54864" cy="1793366"/>
+            <a:off x="640080" y="2770632"/>
+            <a:ext cx="54864" cy="1251585"/>
           </a:xfrm>
           <a:prstGeom prst="rect">
             <a:avLst/>
@@ -5676,13 +5424,13 @@
       </p:sp>
       <p:sp>
         <p:nvSpPr>
-          <p:cNvPr id="10" name="TextBox 9"/>
+          <p:cNvPr id="11" name="TextBox 10"/>
           <p:cNvSpPr txBox="1"/>
           <p:nvPr/>
         </p:nvSpPr>
         <p:spPr>
           <a:xfrm>
-            <a:off x="804671" y="1435607"/>
+            <a:off x="804671" y="2880360"/>
             <a:ext cx="10616184" cy="228600"/>
           </a:xfrm>
           <a:prstGeom prst="rect">
@@ -5718,14 +5466,14 @@
       </p:sp>
       <p:sp>
         <p:nvSpPr>
-          <p:cNvPr id="11" name="TextBox 10"/>
+          <p:cNvPr id="12" name="TextBox 11"/>
           <p:cNvSpPr txBox="1"/>
           <p:nvPr/>
         </p:nvSpPr>
         <p:spPr>
           <a:xfrm>
-            <a:off x="804671" y="1719072"/>
-            <a:ext cx="10616184" cy="1308734"/>
+            <a:off x="804671" y="3163824"/>
+            <a:ext cx="10616184" cy="766952"/>
           </a:xfrm>
           <a:prstGeom prst="rect">
             <a:avLst/>
@@ -5760,14 +5508,14 @@
       </p:sp>
       <p:sp>
         <p:nvSpPr>
-          <p:cNvPr id="12" name="Rectangle 11"/>
+          <p:cNvPr id="13" name="Rectangle 12"/>
           <p:cNvSpPr/>
           <p:nvPr/>
         </p:nvSpPr>
         <p:spPr>
           <a:xfrm>
-            <a:off x="640080" y="3228975"/>
-            <a:ext cx="2644902" cy="2988945"/>
+            <a:off x="640080" y="4131945"/>
+            <a:ext cx="2644902" cy="2085975"/>
           </a:xfrm>
           <a:prstGeom prst="rect">
             <a:avLst/>
@@ -5809,13 +5557,13 @@
       </p:sp>
       <p:sp>
         <p:nvSpPr>
-          <p:cNvPr id="13" name="Rectangle 12"/>
+          <p:cNvPr id="14" name="Rectangle 13"/>
           <p:cNvSpPr/>
           <p:nvPr/>
         </p:nvSpPr>
         <p:spPr>
           <a:xfrm>
-            <a:off x="640080" y="3228975"/>
+            <a:off x="640080" y="4131945"/>
             <a:ext cx="2644902" cy="45720"/>
           </a:xfrm>
           <a:prstGeom prst="rect">
@@ -5858,13 +5606,13 @@
       </p:sp>
       <p:sp>
         <p:nvSpPr>
-          <p:cNvPr id="14" name="TextBox 13"/>
+          <p:cNvPr id="15" name="TextBox 14"/>
           <p:cNvSpPr txBox="1"/>
           <p:nvPr/>
         </p:nvSpPr>
         <p:spPr>
           <a:xfrm>
-            <a:off x="749808" y="3356991"/>
+            <a:off x="749808" y="4259961"/>
             <a:ext cx="2425446" cy="201168"/>
           </a:xfrm>
           <a:prstGeom prst="rect">
@@ -5900,13 +5648,13 @@
       </p:sp>
       <p:sp>
         <p:nvSpPr>
-          <p:cNvPr id="15" name="TextBox 14"/>
+          <p:cNvPr id="16" name="TextBox 15"/>
           <p:cNvSpPr txBox="1"/>
           <p:nvPr/>
         </p:nvSpPr>
         <p:spPr>
           <a:xfrm>
-            <a:off x="749808" y="3613023"/>
+            <a:off x="749808" y="4515993"/>
             <a:ext cx="2425446" cy="475488"/>
           </a:xfrm>
           <a:prstGeom prst="rect">
@@ -5942,7 +5690,7 @@
       </p:sp>
       <p:sp>
         <p:nvSpPr>
-          <p:cNvPr id="16" name="TextBox 15"/>
+          <p:cNvPr id="17" name="TextBox 16"/>
           <p:cNvSpPr txBox="1"/>
           <p:nvPr/>
         </p:nvSpPr>
@@ -5984,14 +5732,14 @@
       </p:sp>
       <p:sp>
         <p:nvSpPr>
-          <p:cNvPr id="17" name="Rectangle 16"/>
+          <p:cNvPr id="18" name="Rectangle 17"/>
           <p:cNvSpPr/>
           <p:nvPr/>
         </p:nvSpPr>
         <p:spPr>
           <a:xfrm>
-            <a:off x="3394710" y="3228975"/>
-            <a:ext cx="2644902" cy="2988945"/>
+            <a:off x="3394710" y="4131945"/>
+            <a:ext cx="2644902" cy="2085975"/>
           </a:xfrm>
           <a:prstGeom prst="rect">
             <a:avLst/>
@@ -6033,13 +5781,13 @@
       </p:sp>
       <p:sp>
         <p:nvSpPr>
-          <p:cNvPr id="18" name="Rectangle 17"/>
+          <p:cNvPr id="19" name="Rectangle 18"/>
           <p:cNvSpPr/>
           <p:nvPr/>
         </p:nvSpPr>
         <p:spPr>
           <a:xfrm>
-            <a:off x="3394710" y="3228975"/>
+            <a:off x="3394710" y="4131945"/>
             <a:ext cx="2644902" cy="45720"/>
           </a:xfrm>
           <a:prstGeom prst="rect">
@@ -6082,13 +5830,13 @@
       </p:sp>
       <p:sp>
         <p:nvSpPr>
-          <p:cNvPr id="19" name="TextBox 18"/>
+          <p:cNvPr id="20" name="TextBox 19"/>
           <p:cNvSpPr txBox="1"/>
           <p:nvPr/>
         </p:nvSpPr>
         <p:spPr>
           <a:xfrm>
-            <a:off x="3504438" y="3356991"/>
+            <a:off x="3504438" y="4259961"/>
             <a:ext cx="2425446" cy="201168"/>
           </a:xfrm>
           <a:prstGeom prst="rect">
@@ -6124,13 +5872,13 @@
       </p:sp>
       <p:sp>
         <p:nvSpPr>
-          <p:cNvPr id="20" name="TextBox 19"/>
+          <p:cNvPr id="21" name="TextBox 20"/>
           <p:cNvSpPr txBox="1"/>
           <p:nvPr/>
         </p:nvSpPr>
         <p:spPr>
           <a:xfrm>
-            <a:off x="3504438" y="3613023"/>
+            <a:off x="3504438" y="4515993"/>
             <a:ext cx="2425446" cy="475488"/>
           </a:xfrm>
           <a:prstGeom prst="rect">
@@ -6166,7 +5914,7 @@
       </p:sp>
       <p:sp>
         <p:nvSpPr>
-          <p:cNvPr id="21" name="TextBox 20"/>
+          <p:cNvPr id="22" name="TextBox 21"/>
           <p:cNvSpPr txBox="1"/>
           <p:nvPr/>
         </p:nvSpPr>
@@ -6208,14 +5956,14 @@
       </p:sp>
       <p:sp>
         <p:nvSpPr>
-          <p:cNvPr id="22" name="Rectangle 21"/>
+          <p:cNvPr id="23" name="Rectangle 22"/>
           <p:cNvSpPr/>
           <p:nvPr/>
         </p:nvSpPr>
         <p:spPr>
           <a:xfrm>
-            <a:off x="6149340" y="3228975"/>
-            <a:ext cx="2644902" cy="2988945"/>
+            <a:off x="6149340" y="4131945"/>
+            <a:ext cx="2644902" cy="2085975"/>
           </a:xfrm>
           <a:prstGeom prst="rect">
             <a:avLst/>
@@ -6257,13 +6005,13 @@
       </p:sp>
       <p:sp>
         <p:nvSpPr>
-          <p:cNvPr id="23" name="Rectangle 22"/>
+          <p:cNvPr id="24" name="Rectangle 23"/>
           <p:cNvSpPr/>
           <p:nvPr/>
         </p:nvSpPr>
         <p:spPr>
           <a:xfrm>
-            <a:off x="6149340" y="3228975"/>
+            <a:off x="6149340" y="4131945"/>
             <a:ext cx="2644902" cy="45720"/>
           </a:xfrm>
           <a:prstGeom prst="rect">
@@ -6306,13 +6054,13 @@
       </p:sp>
       <p:sp>
         <p:nvSpPr>
-          <p:cNvPr id="24" name="TextBox 23"/>
+          <p:cNvPr id="25" name="TextBox 24"/>
           <p:cNvSpPr txBox="1"/>
           <p:nvPr/>
         </p:nvSpPr>
         <p:spPr>
           <a:xfrm>
-            <a:off x="6259068" y="3356991"/>
+            <a:off x="6259068" y="4259961"/>
             <a:ext cx="2425446" cy="201168"/>
           </a:xfrm>
           <a:prstGeom prst="rect">
@@ -6348,13 +6096,13 @@
       </p:sp>
       <p:sp>
         <p:nvSpPr>
-          <p:cNvPr id="25" name="TextBox 24"/>
+          <p:cNvPr id="26" name="TextBox 25"/>
           <p:cNvSpPr txBox="1"/>
           <p:nvPr/>
         </p:nvSpPr>
         <p:spPr>
           <a:xfrm>
-            <a:off x="6259068" y="3613023"/>
+            <a:off x="6259068" y="4515993"/>
             <a:ext cx="2425446" cy="475488"/>
           </a:xfrm>
           <a:prstGeom prst="rect">
@@ -6390,7 +6138,7 @@
       </p:sp>
       <p:sp>
         <p:nvSpPr>
-          <p:cNvPr id="26" name="TextBox 25"/>
+          <p:cNvPr id="27" name="TextBox 26"/>
           <p:cNvSpPr txBox="1"/>
           <p:nvPr/>
         </p:nvSpPr>
@@ -6432,14 +6180,14 @@
       </p:sp>
       <p:sp>
         <p:nvSpPr>
-          <p:cNvPr id="27" name="Rectangle 26"/>
+          <p:cNvPr id="28" name="Rectangle 27"/>
           <p:cNvSpPr/>
           <p:nvPr/>
         </p:nvSpPr>
         <p:spPr>
           <a:xfrm>
-            <a:off x="8903970" y="3228975"/>
-            <a:ext cx="2644902" cy="2988945"/>
+            <a:off x="8903970" y="4131945"/>
+            <a:ext cx="2644902" cy="2085975"/>
           </a:xfrm>
           <a:prstGeom prst="rect">
             <a:avLst/>
@@ -6481,13 +6229,13 @@
       </p:sp>
       <p:sp>
         <p:nvSpPr>
-          <p:cNvPr id="28" name="Rectangle 27"/>
+          <p:cNvPr id="29" name="Rectangle 28"/>
           <p:cNvSpPr/>
           <p:nvPr/>
         </p:nvSpPr>
         <p:spPr>
           <a:xfrm>
-            <a:off x="8903970" y="3228975"/>
+            <a:off x="8903970" y="4131945"/>
             <a:ext cx="2644902" cy="45720"/>
           </a:xfrm>
           <a:prstGeom prst="rect">
@@ -6530,13 +6278,13 @@
       </p:sp>
       <p:sp>
         <p:nvSpPr>
-          <p:cNvPr id="29" name="TextBox 28"/>
+          <p:cNvPr id="30" name="TextBox 29"/>
           <p:cNvSpPr txBox="1"/>
           <p:nvPr/>
         </p:nvSpPr>
         <p:spPr>
           <a:xfrm>
-            <a:off x="9013698" y="3356991"/>
+            <a:off x="9013698" y="4259961"/>
             <a:ext cx="2425446" cy="201168"/>
           </a:xfrm>
           <a:prstGeom prst="rect">
@@ -6572,13 +6320,13 @@
       </p:sp>
       <p:sp>
         <p:nvSpPr>
-          <p:cNvPr id="30" name="TextBox 29"/>
+          <p:cNvPr id="31" name="TextBox 30"/>
           <p:cNvSpPr txBox="1"/>
           <p:nvPr/>
         </p:nvSpPr>
         <p:spPr>
           <a:xfrm>
-            <a:off x="9013698" y="3613023"/>
+            <a:off x="9013698" y="4515993"/>
             <a:ext cx="2425446" cy="475488"/>
           </a:xfrm>
           <a:prstGeom prst="rect">
@@ -6614,7 +6362,7 @@
       </p:sp>
       <p:sp>
         <p:nvSpPr>
-          <p:cNvPr id="31" name="TextBox 30"/>
+          <p:cNvPr id="32" name="TextBox 31"/>
           <p:cNvSpPr txBox="1"/>
           <p:nvPr/>
         </p:nvSpPr>
@@ -6656,7 +6404,7 @@
       </p:sp>
       <p:sp>
         <p:nvSpPr>
-          <p:cNvPr id="32" name="Rectangle 31"/>
+          <p:cNvPr id="33" name="Rectangle 32"/>
           <p:cNvSpPr/>
           <p:nvPr/>
         </p:nvSpPr>
@@ -6705,7 +6453,7 @@
       </p:sp>
       <p:sp>
         <p:nvSpPr>
-          <p:cNvPr id="33" name="TextBox 32"/>
+          <p:cNvPr id="34" name="TextBox 33"/>
           <p:cNvSpPr txBox="1"/>
           <p:nvPr/>
         </p:nvSpPr>
@@ -6747,7 +6495,7 @@
       </p:sp>
       <p:sp>
         <p:nvSpPr>
-          <p:cNvPr id="34" name="TextBox 33"/>
+          <p:cNvPr id="35" name="TextBox 34"/>
           <p:cNvSpPr txBox="1"/>
           <p:nvPr/>
         </p:nvSpPr>
@@ -6789,7 +6537,7 @@
       </p:sp>
       <p:sp>
         <p:nvSpPr>
-          <p:cNvPr id="35" name="TextBox 34"/>
+          <p:cNvPr id="36" name="TextBox 35"/>
           <p:cNvSpPr txBox="1"/>
           <p:nvPr/>
         </p:nvSpPr>
@@ -6904,48 +6652,6 @@
         </p:nvSpPr>
         <p:spPr>
           <a:xfrm>
-            <a:off x="5897880" y="310896"/>
-            <a:ext cx="4800600" cy="256032"/>
-          </a:xfrm>
-          <a:prstGeom prst="rect">
-            <a:avLst/>
-          </a:prstGeom>
-          <a:noFill/>
-        </p:spPr>
-        <p:txBody>
-          <a:bodyPr wrap="none" lIns="9144" rIns="9144" tIns="9144" bIns="9144" anchor="t">
-            <a:spAutoFit/>
-          </a:bodyPr>
-          <a:lstStyle/>
-          <a:p>
-            <a:pPr algn="r">
-              <a:spcAft>
-                <a:spcPts val="0"/>
-              </a:spcAft>
-              <a:defRPr sz="680" b="1">
-                <a:solidFill>
-                  <a:srgbClr val="4F6B00"/>
-                </a:solidFill>
-                <a:latin typeface="Inter"/>
-              </a:defRPr>
-            </a:pPr>
-            <a:r>
-              <a:rPr>
-                <a:latin typeface="Inter"/>
-              </a:rPr>
-              <a:t>Illustrative, Gradient Maintained — demo data, not the client's holdings or managers</a:t>
-            </a:r>
-          </a:p>
-        </p:txBody>
-      </p:sp>
-      <p:sp>
-        <p:nvSpPr>
-          <p:cNvPr id="4" name="TextBox 3"/>
-          <p:cNvSpPr txBox="1"/>
-          <p:nvPr/>
-        </p:nvSpPr>
-        <p:spPr>
-          <a:xfrm>
             <a:off x="640080" y="566928"/>
             <a:ext cx="10058400" cy="530352"/>
           </a:xfrm>
@@ -6982,7 +6688,7 @@
       </p:sp>
       <p:sp>
         <p:nvSpPr>
-          <p:cNvPr id="5" name="Rectangle 4"/>
+          <p:cNvPr id="4" name="Rectangle 3"/>
           <p:cNvSpPr/>
           <p:nvPr/>
         </p:nvSpPr>
@@ -7031,7 +6737,7 @@
       </p:sp>
       <p:sp>
         <p:nvSpPr>
-          <p:cNvPr id="6" name="Rectangle 5"/>
+          <p:cNvPr id="5" name="Rectangle 4"/>
           <p:cNvSpPr/>
           <p:nvPr/>
         </p:nvSpPr>
@@ -7080,7 +6786,7 @@
       </p:sp>
       <p:sp>
         <p:nvSpPr>
-          <p:cNvPr id="7" name="TextBox 6"/>
+          <p:cNvPr id="6" name="TextBox 5"/>
           <p:cNvSpPr txBox="1"/>
           <p:nvPr/>
         </p:nvSpPr>
@@ -7122,7 +6828,7 @@
       </p:sp>
       <p:sp>
         <p:nvSpPr>
-          <p:cNvPr id="8" name="TextBox 7"/>
+          <p:cNvPr id="7" name="TextBox 6"/>
           <p:cNvSpPr txBox="1"/>
           <p:nvPr/>
         </p:nvSpPr>
@@ -7164,7 +6870,7 @@
       </p:sp>
       <p:graphicFrame>
         <p:nvGraphicFramePr>
-          <p:cNvPr id="9" name="Table 8"/>
+          <p:cNvPr id="8" name="Table 7"/>
           <p:cNvGraphicFramePr>
             <a:graphicFrameLocks noGrp="1"/>
           </p:cNvGraphicFramePr>
@@ -7313,7 +7019,7 @@
                         <a:rPr>
                           <a:latin typeface="Inter"/>
                         </a:rPr>
-                        <a:t>● available</a:t>
+                        <a:t>● Available</a:t>
                       </a:r>
                     </a:p>
                   </a:txBody>
@@ -7396,7 +7102,7 @@
                         <a:rPr>
                           <a:latin typeface="Inter"/>
                         </a:rPr>
-                        <a:t>● degraded</a:t>
+                        <a:t>● Incomplete</a:t>
                       </a:r>
                     </a:p>
                   </a:txBody>
@@ -7440,7 +7146,7 @@
       </p:graphicFrame>
       <p:sp>
         <p:nvSpPr>
-          <p:cNvPr id="10" name="TextBox 9"/>
+          <p:cNvPr id="9" name="TextBox 8"/>
           <p:cNvSpPr txBox="1"/>
           <p:nvPr/>
         </p:nvSpPr>
@@ -7482,7 +7188,7 @@
       </p:sp>
       <p:sp>
         <p:nvSpPr>
-          <p:cNvPr id="11" name="Rectangle 10"/>
+          <p:cNvPr id="10" name="Rectangle 9"/>
           <p:cNvSpPr/>
           <p:nvPr/>
         </p:nvSpPr>
@@ -7531,7 +7237,7 @@
       </p:sp>
       <p:sp>
         <p:nvSpPr>
-          <p:cNvPr id="12" name="Rectangle 11"/>
+          <p:cNvPr id="11" name="Rectangle 10"/>
           <p:cNvSpPr/>
           <p:nvPr/>
         </p:nvSpPr>
@@ -7580,7 +7286,7 @@
       </p:sp>
       <p:sp>
         <p:nvSpPr>
-          <p:cNvPr id="13" name="TextBox 12"/>
+          <p:cNvPr id="12" name="TextBox 11"/>
           <p:cNvSpPr txBox="1"/>
           <p:nvPr/>
         </p:nvSpPr>
@@ -7622,7 +7328,7 @@
       </p:sp>
       <p:sp>
         <p:nvSpPr>
-          <p:cNvPr id="14" name="TextBox 13"/>
+          <p:cNvPr id="13" name="TextBox 12"/>
           <p:cNvSpPr txBox="1"/>
           <p:nvPr/>
         </p:nvSpPr>
@@ -7664,7 +7370,7 @@
       </p:sp>
       <p:sp>
         <p:nvSpPr>
-          <p:cNvPr id="15" name="Rectangle 14"/>
+          <p:cNvPr id="14" name="Rectangle 13"/>
           <p:cNvSpPr/>
           <p:nvPr/>
         </p:nvSpPr>
@@ -7713,7 +7419,7 @@
       </p:sp>
       <p:sp>
         <p:nvSpPr>
-          <p:cNvPr id="16" name="Rectangle 15"/>
+          <p:cNvPr id="15" name="Rectangle 14"/>
           <p:cNvSpPr/>
           <p:nvPr/>
         </p:nvSpPr>
@@ -7762,7 +7468,7 @@
       </p:sp>
       <p:sp>
         <p:nvSpPr>
-          <p:cNvPr id="17" name="TextBox 16"/>
+          <p:cNvPr id="16" name="TextBox 15"/>
           <p:cNvSpPr txBox="1"/>
           <p:nvPr/>
         </p:nvSpPr>
@@ -7804,7 +7510,7 @@
       </p:sp>
       <p:sp>
         <p:nvSpPr>
-          <p:cNvPr id="18" name="TextBox 17"/>
+          <p:cNvPr id="17" name="TextBox 16"/>
           <p:cNvSpPr txBox="1"/>
           <p:nvPr/>
         </p:nvSpPr>
@@ -7846,7 +7552,7 @@
       </p:sp>
       <p:sp>
         <p:nvSpPr>
-          <p:cNvPr id="19" name="Rectangle 18"/>
+          <p:cNvPr id="18" name="Rectangle 17"/>
           <p:cNvSpPr/>
           <p:nvPr/>
         </p:nvSpPr>
@@ -7895,7 +7601,7 @@
       </p:sp>
       <p:sp>
         <p:nvSpPr>
-          <p:cNvPr id="20" name="Rectangle 19"/>
+          <p:cNvPr id="19" name="Rectangle 18"/>
           <p:cNvSpPr/>
           <p:nvPr/>
         </p:nvSpPr>
@@ -7944,7 +7650,7 @@
       </p:sp>
       <p:sp>
         <p:nvSpPr>
-          <p:cNvPr id="21" name="TextBox 20"/>
+          <p:cNvPr id="20" name="TextBox 19"/>
           <p:cNvSpPr txBox="1"/>
           <p:nvPr/>
         </p:nvSpPr>
@@ -7986,7 +7692,7 @@
       </p:sp>
       <p:sp>
         <p:nvSpPr>
-          <p:cNvPr id="22" name="TextBox 21"/>
+          <p:cNvPr id="21" name="TextBox 20"/>
           <p:cNvSpPr txBox="1"/>
           <p:nvPr/>
         </p:nvSpPr>
@@ -8028,7 +7734,7 @@
       </p:sp>
       <p:sp>
         <p:nvSpPr>
-          <p:cNvPr id="23" name="Rectangle 22"/>
+          <p:cNvPr id="22" name="Rectangle 21"/>
           <p:cNvSpPr/>
           <p:nvPr/>
         </p:nvSpPr>
@@ -8077,7 +7783,7 @@
       </p:sp>
       <p:sp>
         <p:nvSpPr>
-          <p:cNvPr id="24" name="TextBox 23"/>
+          <p:cNvPr id="23" name="TextBox 22"/>
           <p:cNvSpPr txBox="1"/>
           <p:nvPr/>
         </p:nvSpPr>
@@ -8119,7 +7825,7 @@
       </p:sp>
       <p:sp>
         <p:nvSpPr>
-          <p:cNvPr id="25" name="TextBox 24"/>
+          <p:cNvPr id="24" name="TextBox 23"/>
           <p:cNvSpPr txBox="1"/>
           <p:nvPr/>
         </p:nvSpPr>
@@ -8161,7 +7867,7 @@
       </p:sp>
       <p:sp>
         <p:nvSpPr>
-          <p:cNvPr id="26" name="TextBox 25"/>
+          <p:cNvPr id="25" name="TextBox 24"/>
           <p:cNvSpPr txBox="1"/>
           <p:nvPr/>
         </p:nvSpPr>
@@ -8276,48 +7982,6 @@
         </p:nvSpPr>
         <p:spPr>
           <a:xfrm>
-            <a:off x="5897880" y="310896"/>
-            <a:ext cx="4800600" cy="256032"/>
-          </a:xfrm>
-          <a:prstGeom prst="rect">
-            <a:avLst/>
-          </a:prstGeom>
-          <a:noFill/>
-        </p:spPr>
-        <p:txBody>
-          <a:bodyPr wrap="none" lIns="9144" rIns="9144" tIns="9144" bIns="9144" anchor="t">
-            <a:spAutoFit/>
-          </a:bodyPr>
-          <a:lstStyle/>
-          <a:p>
-            <a:pPr algn="r">
-              <a:spcAft>
-                <a:spcPts val="0"/>
-              </a:spcAft>
-              <a:defRPr sz="680" b="1">
-                <a:solidFill>
-                  <a:srgbClr val="4F6B00"/>
-                </a:solidFill>
-                <a:latin typeface="Inter"/>
-              </a:defRPr>
-            </a:pPr>
-            <a:r>
-              <a:rPr>
-                <a:latin typeface="Inter"/>
-              </a:rPr>
-              <a:t>Illustrative, Gradient Maintained — demo data, not the client's holdings or managers</a:t>
-            </a:r>
-          </a:p>
-        </p:txBody>
-      </p:sp>
-      <p:sp>
-        <p:nvSpPr>
-          <p:cNvPr id="4" name="TextBox 3"/>
-          <p:cNvSpPr txBox="1"/>
-          <p:nvPr/>
-        </p:nvSpPr>
-        <p:spPr>
-          <a:xfrm>
             <a:off x="640080" y="566928"/>
             <a:ext cx="10058400" cy="530352"/>
           </a:xfrm>
@@ -8354,7 +8018,7 @@
       </p:sp>
       <p:sp>
         <p:nvSpPr>
-          <p:cNvPr id="5" name="Rectangle 4"/>
+          <p:cNvPr id="4" name="Rectangle 3"/>
           <p:cNvSpPr/>
           <p:nvPr/>
         </p:nvSpPr>
@@ -8403,7 +8067,7 @@
       </p:sp>
       <p:sp>
         <p:nvSpPr>
-          <p:cNvPr id="6" name="Rectangle 5"/>
+          <p:cNvPr id="5" name="Rectangle 4"/>
           <p:cNvSpPr/>
           <p:nvPr/>
         </p:nvSpPr>
@@ -8452,7 +8116,7 @@
       </p:sp>
       <p:sp>
         <p:nvSpPr>
-          <p:cNvPr id="7" name="TextBox 6"/>
+          <p:cNvPr id="6" name="TextBox 5"/>
           <p:cNvSpPr txBox="1"/>
           <p:nvPr/>
         </p:nvSpPr>
@@ -8494,7 +8158,7 @@
       </p:sp>
       <p:sp>
         <p:nvSpPr>
-          <p:cNvPr id="8" name="Rectangle 7"/>
+          <p:cNvPr id="7" name="Rectangle 6"/>
           <p:cNvSpPr/>
           <p:nvPr/>
         </p:nvSpPr>
@@ -8543,7 +8207,7 @@
       </p:sp>
       <p:sp>
         <p:nvSpPr>
-          <p:cNvPr id="9" name="Rectangle 8"/>
+          <p:cNvPr id="8" name="Rectangle 7"/>
           <p:cNvSpPr/>
           <p:nvPr/>
         </p:nvSpPr>
@@ -8592,7 +8256,7 @@
       </p:sp>
       <p:sp>
         <p:nvSpPr>
-          <p:cNvPr id="10" name="TextBox 9"/>
+          <p:cNvPr id="9" name="TextBox 8"/>
           <p:cNvSpPr txBox="1"/>
           <p:nvPr/>
         </p:nvSpPr>
@@ -8634,7 +8298,7 @@
       </p:sp>
       <p:sp>
         <p:nvSpPr>
-          <p:cNvPr id="11" name="TextBox 10"/>
+          <p:cNvPr id="10" name="TextBox 9"/>
           <p:cNvSpPr txBox="1"/>
           <p:nvPr/>
         </p:nvSpPr>
@@ -8676,7 +8340,7 @@
       </p:sp>
       <p:sp>
         <p:nvSpPr>
-          <p:cNvPr id="12" name="Rectangle 11"/>
+          <p:cNvPr id="11" name="Rectangle 10"/>
           <p:cNvSpPr/>
           <p:nvPr/>
         </p:nvSpPr>
@@ -8725,7 +8389,7 @@
       </p:sp>
       <p:sp>
         <p:nvSpPr>
-          <p:cNvPr id="13" name="TextBox 12"/>
+          <p:cNvPr id="12" name="TextBox 11"/>
           <p:cNvSpPr txBox="1"/>
           <p:nvPr/>
         </p:nvSpPr>
@@ -8767,7 +8431,7 @@
       </p:sp>
       <p:sp>
         <p:nvSpPr>
-          <p:cNvPr id="14" name="TextBox 13"/>
+          <p:cNvPr id="13" name="TextBox 12"/>
           <p:cNvSpPr txBox="1"/>
           <p:nvPr/>
         </p:nvSpPr>
@@ -8809,7 +8473,7 @@
       </p:sp>
       <p:sp>
         <p:nvSpPr>
-          <p:cNvPr id="15" name="TextBox 14"/>
+          <p:cNvPr id="14" name="TextBox 13"/>
           <p:cNvSpPr txBox="1"/>
           <p:nvPr/>
         </p:nvSpPr>
@@ -8924,48 +8588,6 @@
         </p:nvSpPr>
         <p:spPr>
           <a:xfrm>
-            <a:off x="5897880" y="310896"/>
-            <a:ext cx="4800600" cy="256032"/>
-          </a:xfrm>
-          <a:prstGeom prst="rect">
-            <a:avLst/>
-          </a:prstGeom>
-          <a:noFill/>
-        </p:spPr>
-        <p:txBody>
-          <a:bodyPr wrap="none" lIns="9144" rIns="9144" tIns="9144" bIns="9144" anchor="t">
-            <a:spAutoFit/>
-          </a:bodyPr>
-          <a:lstStyle/>
-          <a:p>
-            <a:pPr algn="r">
-              <a:spcAft>
-                <a:spcPts val="0"/>
-              </a:spcAft>
-              <a:defRPr sz="680" b="1">
-                <a:solidFill>
-                  <a:srgbClr val="4F6B00"/>
-                </a:solidFill>
-                <a:latin typeface="Inter"/>
-              </a:defRPr>
-            </a:pPr>
-            <a:r>
-              <a:rPr>
-                <a:latin typeface="Inter"/>
-              </a:rPr>
-              <a:t>Illustrative, Gradient Maintained — demo data, not the client's holdings or managers</a:t>
-            </a:r>
-          </a:p>
-        </p:txBody>
-      </p:sp>
-      <p:sp>
-        <p:nvSpPr>
-          <p:cNvPr id="4" name="TextBox 3"/>
-          <p:cNvSpPr txBox="1"/>
-          <p:nvPr/>
-        </p:nvSpPr>
-        <p:spPr>
-          <a:xfrm>
             <a:off x="640080" y="566928"/>
             <a:ext cx="10058400" cy="530352"/>
           </a:xfrm>
@@ -9002,7 +8624,7 @@
       </p:sp>
       <p:sp>
         <p:nvSpPr>
-          <p:cNvPr id="5" name="Rectangle 4"/>
+          <p:cNvPr id="4" name="Rectangle 3"/>
           <p:cNvSpPr/>
           <p:nvPr/>
         </p:nvSpPr>
@@ -9051,7 +8673,7 @@
       </p:sp>
       <p:sp>
         <p:nvSpPr>
-          <p:cNvPr id="6" name="Rectangle 5"/>
+          <p:cNvPr id="5" name="Rectangle 4"/>
           <p:cNvSpPr/>
           <p:nvPr/>
         </p:nvSpPr>
@@ -9100,7 +8722,7 @@
       </p:sp>
       <p:sp>
         <p:nvSpPr>
-          <p:cNvPr id="7" name="TextBox 6"/>
+          <p:cNvPr id="6" name="TextBox 5"/>
           <p:cNvSpPr txBox="1"/>
           <p:nvPr/>
         </p:nvSpPr>
@@ -9142,7 +8764,7 @@
       </p:sp>
       <p:sp>
         <p:nvSpPr>
-          <p:cNvPr id="8" name="TextBox 7"/>
+          <p:cNvPr id="7" name="TextBox 6"/>
           <p:cNvSpPr txBox="1"/>
           <p:nvPr/>
         </p:nvSpPr>
@@ -9184,7 +8806,7 @@
       </p:sp>
       <p:graphicFrame>
         <p:nvGraphicFramePr>
-          <p:cNvPr id="9" name="Chart 8"/>
+          <p:cNvPr id="8" name="Chart 7"/>
           <p:cNvGraphicFramePr>
             <a:graphicFrameLocks noGrp="1"/>
           </p:cNvGraphicFramePr>
@@ -9202,7 +8824,7 @@
       </p:graphicFrame>
       <p:sp>
         <p:nvSpPr>
-          <p:cNvPr id="10" name="Rectangle 9"/>
+          <p:cNvPr id="9" name="Rectangle 8"/>
           <p:cNvSpPr/>
           <p:nvPr/>
         </p:nvSpPr>
@@ -9251,7 +8873,7 @@
       </p:sp>
       <p:sp>
         <p:nvSpPr>
-          <p:cNvPr id="11" name="TextBox 10"/>
+          <p:cNvPr id="10" name="TextBox 9"/>
           <p:cNvSpPr txBox="1"/>
           <p:nvPr/>
         </p:nvSpPr>
@@ -9293,7 +8915,7 @@
       </p:sp>
       <p:graphicFrame>
         <p:nvGraphicFramePr>
-          <p:cNvPr id="12" name="Chart 11"/>
+          <p:cNvPr id="11" name="Chart 10"/>
           <p:cNvGraphicFramePr>
             <a:graphicFrameLocks noGrp="1"/>
           </p:cNvGraphicFramePr>
@@ -9311,7 +8933,7 @@
       </p:graphicFrame>
       <p:sp>
         <p:nvSpPr>
-          <p:cNvPr id="13" name="Rectangle 12"/>
+          <p:cNvPr id="12" name="Rectangle 11"/>
           <p:cNvSpPr/>
           <p:nvPr/>
         </p:nvSpPr>
@@ -9360,7 +8982,7 @@
       </p:sp>
       <p:sp>
         <p:nvSpPr>
-          <p:cNvPr id="14" name="TextBox 13"/>
+          <p:cNvPr id="13" name="TextBox 12"/>
           <p:cNvSpPr txBox="1"/>
           <p:nvPr/>
         </p:nvSpPr>
@@ -9402,7 +9024,7 @@
       </p:sp>
       <p:sp>
         <p:nvSpPr>
-          <p:cNvPr id="15" name="TextBox 14"/>
+          <p:cNvPr id="14" name="TextBox 13"/>
           <p:cNvSpPr txBox="1"/>
           <p:nvPr/>
         </p:nvSpPr>
@@ -9444,7 +9066,7 @@
       </p:sp>
       <p:sp>
         <p:nvSpPr>
-          <p:cNvPr id="16" name="TextBox 15"/>
+          <p:cNvPr id="15" name="TextBox 14"/>
           <p:cNvSpPr txBox="1"/>
           <p:nvPr/>
         </p:nvSpPr>
@@ -9559,48 +9181,6 @@
         </p:nvSpPr>
         <p:spPr>
           <a:xfrm>
-            <a:off x="5897880" y="310896"/>
-            <a:ext cx="4800600" cy="256032"/>
-          </a:xfrm>
-          <a:prstGeom prst="rect">
-            <a:avLst/>
-          </a:prstGeom>
-          <a:noFill/>
-        </p:spPr>
-        <p:txBody>
-          <a:bodyPr wrap="none" lIns="9144" rIns="9144" tIns="9144" bIns="9144" anchor="t">
-            <a:spAutoFit/>
-          </a:bodyPr>
-          <a:lstStyle/>
-          <a:p>
-            <a:pPr algn="r">
-              <a:spcAft>
-                <a:spcPts val="0"/>
-              </a:spcAft>
-              <a:defRPr sz="680" b="1">
-                <a:solidFill>
-                  <a:srgbClr val="4F6B00"/>
-                </a:solidFill>
-                <a:latin typeface="Inter"/>
-              </a:defRPr>
-            </a:pPr>
-            <a:r>
-              <a:rPr>
-                <a:latin typeface="Inter"/>
-              </a:rPr>
-              <a:t>Illustrative, Gradient Maintained — demo data, not the client's holdings or managers</a:t>
-            </a:r>
-          </a:p>
-        </p:txBody>
-      </p:sp>
-      <p:sp>
-        <p:nvSpPr>
-          <p:cNvPr id="4" name="TextBox 3"/>
-          <p:cNvSpPr txBox="1"/>
-          <p:nvPr/>
-        </p:nvSpPr>
-        <p:spPr>
-          <a:xfrm>
             <a:off x="640080" y="566928"/>
             <a:ext cx="10058400" cy="530352"/>
           </a:xfrm>
@@ -9637,7 +9217,7 @@
       </p:sp>
       <p:sp>
         <p:nvSpPr>
-          <p:cNvPr id="5" name="Rectangle 4"/>
+          <p:cNvPr id="4" name="Rectangle 3"/>
           <p:cNvSpPr/>
           <p:nvPr/>
         </p:nvSpPr>
@@ -9686,7 +9266,7 @@
       </p:sp>
       <p:sp>
         <p:nvSpPr>
-          <p:cNvPr id="6" name="Rectangle 5"/>
+          <p:cNvPr id="5" name="Rectangle 4"/>
           <p:cNvSpPr/>
           <p:nvPr/>
         </p:nvSpPr>
@@ -9735,7 +9315,7 @@
       </p:sp>
       <p:sp>
         <p:nvSpPr>
-          <p:cNvPr id="7" name="TextBox 6"/>
+          <p:cNvPr id="6" name="TextBox 5"/>
           <p:cNvSpPr txBox="1"/>
           <p:nvPr/>
         </p:nvSpPr>
@@ -9777,7 +9357,7 @@
       </p:sp>
       <p:sp>
         <p:nvSpPr>
-          <p:cNvPr id="8" name="TextBox 7"/>
+          <p:cNvPr id="7" name="TextBox 6"/>
           <p:cNvSpPr txBox="1"/>
           <p:nvPr/>
         </p:nvSpPr>
@@ -9819,7 +9399,7 @@
       </p:sp>
       <p:graphicFrame>
         <p:nvGraphicFramePr>
-          <p:cNvPr id="9" name="Table 8"/>
+          <p:cNvPr id="8" name="Table 7"/>
           <p:cNvGraphicFramePr>
             <a:graphicFrameLocks noGrp="1"/>
           </p:cNvGraphicFramePr>
@@ -9941,7 +9521,7 @@
                         <a:rPr>
                           <a:latin typeface="Inter"/>
                         </a:rPr>
-                        <a:t>● MEDIUM</a:t>
+                        <a:t>● Medium</a:t>
                       </a:r>
                     </a:p>
                   </a:txBody>
@@ -10024,7 +9604,7 @@
                         <a:rPr>
                           <a:latin typeface="Inter"/>
                         </a:rPr>
-                        <a:t>● MEDIUM</a:t>
+                        <a:t>● Medium</a:t>
                       </a:r>
                     </a:p>
                   </a:txBody>
@@ -10107,7 +9687,7 @@
                         <a:rPr>
                           <a:latin typeface="Inter"/>
                         </a:rPr>
-                        <a:t>● LOW</a:t>
+                        <a:t>● Low</a:t>
                       </a:r>
                     </a:p>
                   </a:txBody>
@@ -10178,7 +9758,7 @@
       </p:graphicFrame>
       <p:sp>
         <p:nvSpPr>
-          <p:cNvPr id="10" name="TextBox 9"/>
+          <p:cNvPr id="9" name="TextBox 8"/>
           <p:cNvSpPr txBox="1"/>
           <p:nvPr/>
         </p:nvSpPr>
@@ -10228,7 +9808,7 @@
       </p:sp>
       <p:sp>
         <p:nvSpPr>
-          <p:cNvPr id="11" name="Rectangle 10"/>
+          <p:cNvPr id="10" name="Rectangle 9"/>
           <p:cNvSpPr/>
           <p:nvPr/>
         </p:nvSpPr>
@@ -10277,7 +9857,7 @@
       </p:sp>
       <p:sp>
         <p:nvSpPr>
-          <p:cNvPr id="12" name="Rectangle 11"/>
+          <p:cNvPr id="11" name="Rectangle 10"/>
           <p:cNvSpPr/>
           <p:nvPr/>
         </p:nvSpPr>
@@ -10326,7 +9906,7 @@
       </p:sp>
       <p:sp>
         <p:nvSpPr>
-          <p:cNvPr id="13" name="TextBox 12"/>
+          <p:cNvPr id="12" name="TextBox 11"/>
           <p:cNvSpPr txBox="1"/>
           <p:nvPr/>
         </p:nvSpPr>
@@ -10368,7 +9948,7 @@
       </p:sp>
       <p:sp>
         <p:nvSpPr>
-          <p:cNvPr id="14" name="TextBox 13"/>
+          <p:cNvPr id="13" name="TextBox 12"/>
           <p:cNvSpPr txBox="1"/>
           <p:nvPr/>
         </p:nvSpPr>
@@ -10410,7 +9990,7 @@
       </p:sp>
       <p:sp>
         <p:nvSpPr>
-          <p:cNvPr id="15" name="Rectangle 14"/>
+          <p:cNvPr id="14" name="Rectangle 13"/>
           <p:cNvSpPr/>
           <p:nvPr/>
         </p:nvSpPr>
@@ -10459,7 +10039,7 @@
       </p:sp>
       <p:sp>
         <p:nvSpPr>
-          <p:cNvPr id="16" name="Rectangle 15"/>
+          <p:cNvPr id="15" name="Rectangle 14"/>
           <p:cNvSpPr/>
           <p:nvPr/>
         </p:nvSpPr>
@@ -10508,7 +10088,7 @@
       </p:sp>
       <p:sp>
         <p:nvSpPr>
-          <p:cNvPr id="17" name="TextBox 16"/>
+          <p:cNvPr id="16" name="TextBox 15"/>
           <p:cNvSpPr txBox="1"/>
           <p:nvPr/>
         </p:nvSpPr>
@@ -10550,7 +10130,7 @@
       </p:sp>
       <p:sp>
         <p:nvSpPr>
-          <p:cNvPr id="18" name="TextBox 17"/>
+          <p:cNvPr id="17" name="TextBox 16"/>
           <p:cNvSpPr txBox="1"/>
           <p:nvPr/>
         </p:nvSpPr>
@@ -10592,7 +10172,7 @@
       </p:sp>
       <p:sp>
         <p:nvSpPr>
-          <p:cNvPr id="19" name="Rectangle 18"/>
+          <p:cNvPr id="18" name="Rectangle 17"/>
           <p:cNvSpPr/>
           <p:nvPr/>
         </p:nvSpPr>
@@ -10641,7 +10221,7 @@
       </p:sp>
       <p:sp>
         <p:nvSpPr>
-          <p:cNvPr id="20" name="TextBox 19"/>
+          <p:cNvPr id="19" name="TextBox 18"/>
           <p:cNvSpPr txBox="1"/>
           <p:nvPr/>
         </p:nvSpPr>
@@ -10683,7 +10263,7 @@
       </p:sp>
       <p:sp>
         <p:nvSpPr>
-          <p:cNvPr id="21" name="TextBox 20"/>
+          <p:cNvPr id="20" name="TextBox 19"/>
           <p:cNvSpPr txBox="1"/>
           <p:nvPr/>
         </p:nvSpPr>
@@ -10725,7 +10305,7 @@
       </p:sp>
       <p:sp>
         <p:nvSpPr>
-          <p:cNvPr id="22" name="TextBox 21"/>
+          <p:cNvPr id="21" name="TextBox 20"/>
           <p:cNvSpPr txBox="1"/>
           <p:nvPr/>
         </p:nvSpPr>
@@ -10840,48 +10420,6 @@
         </p:nvSpPr>
         <p:spPr>
           <a:xfrm>
-            <a:off x="5897880" y="310896"/>
-            <a:ext cx="4800600" cy="256032"/>
-          </a:xfrm>
-          <a:prstGeom prst="rect">
-            <a:avLst/>
-          </a:prstGeom>
-          <a:noFill/>
-        </p:spPr>
-        <p:txBody>
-          <a:bodyPr wrap="none" lIns="9144" rIns="9144" tIns="9144" bIns="9144" anchor="t">
-            <a:spAutoFit/>
-          </a:bodyPr>
-          <a:lstStyle/>
-          <a:p>
-            <a:pPr algn="r">
-              <a:spcAft>
-                <a:spcPts val="0"/>
-              </a:spcAft>
-              <a:defRPr sz="680" b="1">
-                <a:solidFill>
-                  <a:srgbClr val="4F6B00"/>
-                </a:solidFill>
-                <a:latin typeface="Inter"/>
-              </a:defRPr>
-            </a:pPr>
-            <a:r>
-              <a:rPr>
-                <a:latin typeface="Inter"/>
-              </a:rPr>
-              <a:t>Illustrative, Gradient Maintained — demo data, not the client's holdings or managers</a:t>
-            </a:r>
-          </a:p>
-        </p:txBody>
-      </p:sp>
-      <p:sp>
-        <p:nvSpPr>
-          <p:cNvPr id="4" name="TextBox 3"/>
-          <p:cNvSpPr txBox="1"/>
-          <p:nvPr/>
-        </p:nvSpPr>
-        <p:spPr>
-          <a:xfrm>
             <a:off x="640080" y="566928"/>
             <a:ext cx="10058400" cy="530352"/>
           </a:xfrm>
@@ -10918,7 +10456,7 @@
       </p:sp>
       <p:sp>
         <p:nvSpPr>
-          <p:cNvPr id="5" name="Rectangle 4"/>
+          <p:cNvPr id="4" name="Rectangle 3"/>
           <p:cNvSpPr/>
           <p:nvPr/>
         </p:nvSpPr>
@@ -10967,7 +10505,7 @@
       </p:sp>
       <p:sp>
         <p:nvSpPr>
-          <p:cNvPr id="6" name="Rectangle 5"/>
+          <p:cNvPr id="5" name="Rectangle 4"/>
           <p:cNvSpPr/>
           <p:nvPr/>
         </p:nvSpPr>
@@ -11016,7 +10554,7 @@
       </p:sp>
       <p:sp>
         <p:nvSpPr>
-          <p:cNvPr id="7" name="TextBox 6"/>
+          <p:cNvPr id="6" name="TextBox 5"/>
           <p:cNvSpPr txBox="1"/>
           <p:nvPr/>
         </p:nvSpPr>
@@ -11058,7 +10596,7 @@
       </p:sp>
       <p:sp>
         <p:nvSpPr>
-          <p:cNvPr id="8" name="TextBox 7"/>
+          <p:cNvPr id="7" name="TextBox 6"/>
           <p:cNvSpPr txBox="1"/>
           <p:nvPr/>
         </p:nvSpPr>
@@ -11100,7 +10638,7 @@
       </p:sp>
       <p:graphicFrame>
         <p:nvGraphicFramePr>
-          <p:cNvPr id="9" name="Table 8"/>
+          <p:cNvPr id="8" name="Table 7"/>
           <p:cNvGraphicFramePr>
             <a:graphicFrameLocks noGrp="1"/>
           </p:cNvGraphicFramePr>
@@ -11536,7 +11074,7 @@
       </p:graphicFrame>
       <p:sp>
         <p:nvSpPr>
-          <p:cNvPr id="10" name="TextBox 9"/>
+          <p:cNvPr id="9" name="TextBox 8"/>
           <p:cNvSpPr txBox="1"/>
           <p:nvPr/>
         </p:nvSpPr>
@@ -11597,7 +11135,7 @@
       </p:sp>
       <p:sp>
         <p:nvSpPr>
-          <p:cNvPr id="11" name="Rectangle 10"/>
+          <p:cNvPr id="10" name="Rectangle 9"/>
           <p:cNvSpPr/>
           <p:nvPr/>
         </p:nvSpPr>
@@ -11646,7 +11184,7 @@
       </p:sp>
       <p:sp>
         <p:nvSpPr>
-          <p:cNvPr id="12" name="TextBox 11"/>
+          <p:cNvPr id="11" name="TextBox 10"/>
           <p:cNvSpPr txBox="1"/>
           <p:nvPr/>
         </p:nvSpPr>
@@ -11688,7 +11226,7 @@
       </p:sp>
       <p:sp>
         <p:nvSpPr>
-          <p:cNvPr id="13" name="TextBox 12"/>
+          <p:cNvPr id="12" name="TextBox 11"/>
           <p:cNvSpPr txBox="1"/>
           <p:nvPr/>
         </p:nvSpPr>
@@ -11730,7 +11268,7 @@
       </p:sp>
       <p:sp>
         <p:nvSpPr>
-          <p:cNvPr id="14" name="TextBox 13"/>
+          <p:cNvPr id="13" name="TextBox 12"/>
           <p:cNvSpPr txBox="1"/>
           <p:nvPr/>
         </p:nvSpPr>
@@ -11845,48 +11383,6 @@
         </p:nvSpPr>
         <p:spPr>
           <a:xfrm>
-            <a:off x="5897880" y="310896"/>
-            <a:ext cx="4800600" cy="256032"/>
-          </a:xfrm>
-          <a:prstGeom prst="rect">
-            <a:avLst/>
-          </a:prstGeom>
-          <a:noFill/>
-        </p:spPr>
-        <p:txBody>
-          <a:bodyPr wrap="none" lIns="9144" rIns="9144" tIns="9144" bIns="9144" anchor="t">
-            <a:spAutoFit/>
-          </a:bodyPr>
-          <a:lstStyle/>
-          <a:p>
-            <a:pPr algn="r">
-              <a:spcAft>
-                <a:spcPts val="0"/>
-              </a:spcAft>
-              <a:defRPr sz="680" b="1">
-                <a:solidFill>
-                  <a:srgbClr val="4F6B00"/>
-                </a:solidFill>
-                <a:latin typeface="Inter"/>
-              </a:defRPr>
-            </a:pPr>
-            <a:r>
-              <a:rPr>
-                <a:latin typeface="Inter"/>
-              </a:rPr>
-              <a:t>Illustrative, Gradient Maintained — demo data, not the client's holdings or managers</a:t>
-            </a:r>
-          </a:p>
-        </p:txBody>
-      </p:sp>
-      <p:sp>
-        <p:nvSpPr>
-          <p:cNvPr id="4" name="TextBox 3"/>
-          <p:cNvSpPr txBox="1"/>
-          <p:nvPr/>
-        </p:nvSpPr>
-        <p:spPr>
-          <a:xfrm>
             <a:off x="640080" y="566928"/>
             <a:ext cx="10058400" cy="530352"/>
           </a:xfrm>
@@ -11923,7 +11419,7 @@
       </p:sp>
       <p:sp>
         <p:nvSpPr>
-          <p:cNvPr id="5" name="Rectangle 4"/>
+          <p:cNvPr id="4" name="Rectangle 3"/>
           <p:cNvSpPr/>
           <p:nvPr/>
         </p:nvSpPr>
@@ -11972,7 +11468,7 @@
       </p:sp>
       <p:sp>
         <p:nvSpPr>
-          <p:cNvPr id="6" name="Rectangle 5"/>
+          <p:cNvPr id="5" name="Rectangle 4"/>
           <p:cNvSpPr/>
           <p:nvPr/>
         </p:nvSpPr>
@@ -12021,7 +11517,7 @@
       </p:sp>
       <p:sp>
         <p:nvSpPr>
-          <p:cNvPr id="7" name="TextBox 6"/>
+          <p:cNvPr id="6" name="TextBox 5"/>
           <p:cNvSpPr txBox="1"/>
           <p:nvPr/>
         </p:nvSpPr>
@@ -12063,7 +11559,7 @@
       </p:sp>
       <p:sp>
         <p:nvSpPr>
-          <p:cNvPr id="8" name="TextBox 7"/>
+          <p:cNvPr id="7" name="TextBox 6"/>
           <p:cNvSpPr txBox="1"/>
           <p:nvPr/>
         </p:nvSpPr>
@@ -12138,7 +11634,7 @@
       </p:sp>
       <p:sp>
         <p:nvSpPr>
-          <p:cNvPr id="9" name="TextBox 8"/>
+          <p:cNvPr id="8" name="TextBox 7"/>
           <p:cNvSpPr txBox="1"/>
           <p:nvPr/>
         </p:nvSpPr>
@@ -12199,7 +11695,7 @@
       </p:sp>
       <p:sp>
         <p:nvSpPr>
-          <p:cNvPr id="10" name="Rectangle 9"/>
+          <p:cNvPr id="9" name="Rectangle 8"/>
           <p:cNvSpPr/>
           <p:nvPr/>
         </p:nvSpPr>
@@ -12248,7 +11744,7 @@
       </p:sp>
       <p:sp>
         <p:nvSpPr>
-          <p:cNvPr id="11" name="TextBox 10"/>
+          <p:cNvPr id="10" name="TextBox 9"/>
           <p:cNvSpPr txBox="1"/>
           <p:nvPr/>
         </p:nvSpPr>
@@ -12290,7 +11786,7 @@
       </p:sp>
       <p:sp>
         <p:nvSpPr>
-          <p:cNvPr id="12" name="TextBox 11"/>
+          <p:cNvPr id="11" name="TextBox 10"/>
           <p:cNvSpPr txBox="1"/>
           <p:nvPr/>
         </p:nvSpPr>
@@ -12332,7 +11828,7 @@
       </p:sp>
       <p:sp>
         <p:nvSpPr>
-          <p:cNvPr id="13" name="TextBox 12"/>
+          <p:cNvPr id="12" name="TextBox 11"/>
           <p:cNvSpPr txBox="1"/>
           <p:nvPr/>
         </p:nvSpPr>
@@ -12447,48 +11943,6 @@
         </p:nvSpPr>
         <p:spPr>
           <a:xfrm>
-            <a:off x="5897880" y="310896"/>
-            <a:ext cx="4800600" cy="256032"/>
-          </a:xfrm>
-          <a:prstGeom prst="rect">
-            <a:avLst/>
-          </a:prstGeom>
-          <a:noFill/>
-        </p:spPr>
-        <p:txBody>
-          <a:bodyPr wrap="none" lIns="9144" rIns="9144" tIns="9144" bIns="9144" anchor="t">
-            <a:spAutoFit/>
-          </a:bodyPr>
-          <a:lstStyle/>
-          <a:p>
-            <a:pPr algn="r">
-              <a:spcAft>
-                <a:spcPts val="0"/>
-              </a:spcAft>
-              <a:defRPr sz="680" b="1">
-                <a:solidFill>
-                  <a:srgbClr val="4F6B00"/>
-                </a:solidFill>
-                <a:latin typeface="Inter"/>
-              </a:defRPr>
-            </a:pPr>
-            <a:r>
-              <a:rPr>
-                <a:latin typeface="Inter"/>
-              </a:rPr>
-              <a:t>Illustrative, Gradient Maintained — demo data, not the client's holdings or managers</a:t>
-            </a:r>
-          </a:p>
-        </p:txBody>
-      </p:sp>
-      <p:sp>
-        <p:nvSpPr>
-          <p:cNvPr id="4" name="TextBox 3"/>
-          <p:cNvSpPr txBox="1"/>
-          <p:nvPr/>
-        </p:nvSpPr>
-        <p:spPr>
-          <a:xfrm>
             <a:off x="640080" y="566928"/>
             <a:ext cx="10058400" cy="530352"/>
           </a:xfrm>
@@ -12525,7 +11979,7 @@
       </p:sp>
       <p:sp>
         <p:nvSpPr>
-          <p:cNvPr id="5" name="Rectangle 4"/>
+          <p:cNvPr id="4" name="Rectangle 3"/>
           <p:cNvSpPr/>
           <p:nvPr/>
         </p:nvSpPr>
@@ -12574,7 +12028,7 @@
       </p:sp>
       <p:sp>
         <p:nvSpPr>
-          <p:cNvPr id="6" name="Rectangle 5"/>
+          <p:cNvPr id="5" name="Rectangle 4"/>
           <p:cNvSpPr/>
           <p:nvPr/>
         </p:nvSpPr>
@@ -12623,7 +12077,7 @@
       </p:sp>
       <p:sp>
         <p:nvSpPr>
-          <p:cNvPr id="7" name="TextBox 6"/>
+          <p:cNvPr id="6" name="TextBox 5"/>
           <p:cNvSpPr txBox="1"/>
           <p:nvPr/>
         </p:nvSpPr>
@@ -12665,7 +12119,7 @@
       </p:sp>
       <p:sp>
         <p:nvSpPr>
-          <p:cNvPr id="8" name="TextBox 7"/>
+          <p:cNvPr id="7" name="TextBox 6"/>
           <p:cNvSpPr txBox="1"/>
           <p:nvPr/>
         </p:nvSpPr>
@@ -12747,7 +12201,7 @@
       </p:sp>
       <p:sp>
         <p:nvSpPr>
-          <p:cNvPr id="9" name="Rectangle 8"/>
+          <p:cNvPr id="8" name="Rectangle 7"/>
           <p:cNvSpPr/>
           <p:nvPr/>
         </p:nvSpPr>
@@ -12796,7 +12250,7 @@
       </p:sp>
       <p:sp>
         <p:nvSpPr>
-          <p:cNvPr id="10" name="TextBox 9"/>
+          <p:cNvPr id="9" name="TextBox 8"/>
           <p:cNvSpPr txBox="1"/>
           <p:nvPr/>
         </p:nvSpPr>
@@ -12838,7 +12292,7 @@
       </p:sp>
       <p:sp>
         <p:nvSpPr>
-          <p:cNvPr id="11" name="TextBox 10"/>
+          <p:cNvPr id="10" name="TextBox 9"/>
           <p:cNvSpPr txBox="1"/>
           <p:nvPr/>
         </p:nvSpPr>
@@ -12880,7 +12334,7 @@
       </p:sp>
       <p:sp>
         <p:nvSpPr>
-          <p:cNvPr id="12" name="TextBox 11"/>
+          <p:cNvPr id="11" name="TextBox 10"/>
           <p:cNvSpPr txBox="1"/>
           <p:nvPr/>
         </p:nvSpPr>
